--- a/documents/202425s2-RM-Slides-Sy.pptx
+++ b/documents/202425s2-RM-Slides-Sy.pptx
@@ -5,7 +5,7 @@
     <p:sldMasterId id="2147483657" r:id="rId1"/>
   </p:sldMasterIdLst>
   <p:notesMasterIdLst>
-    <p:notesMasterId r:id="rId9"/>
+    <p:notesMasterId r:id="rId11"/>
   </p:notesMasterIdLst>
   <p:sldIdLst>
     <p:sldId id="256" r:id="rId2"/>
@@ -15,6 +15,8 @@
     <p:sldId id="301" r:id="rId6"/>
     <p:sldId id="261" r:id="rId7"/>
     <p:sldId id="303" r:id="rId8"/>
+    <p:sldId id="304" r:id="rId9"/>
+    <p:sldId id="305" r:id="rId10"/>
   </p:sldIdLst>
   <p:sldSz cx="12192000" cy="6858000"/>
   <p:notesSz cx="6858000" cy="9144000"/>
@@ -8757,7 +8759,7 @@
           </a:lstStyle>
           <a:p>
             <a:r>
-              <a:rPr lang="en-US"/>
+              <a:rPr lang="en-US" dirty="0"/>
               <a:t>2025.02.06</a:t>
             </a:r>
             <a:endParaRPr lang="en-PH" dirty="0"/>
@@ -20621,7 +20623,7 @@
           <p:cNvPr id="2" name="Title 1">
             <a:extLst>
               <a:ext uri="{FF2B5EF4-FFF2-40B4-BE49-F238E27FC236}">
-                <a16:creationId xmlns:a16="http://schemas.microsoft.com/office/drawing/2014/main" id="{2F87BFAE-5BA8-4BC2-01ED-900EBDF89C24}"/>
+                <a16:creationId xmlns:a16="http://schemas.microsoft.com/office/drawing/2014/main" id="{6AA1FFC5-1CB7-8737-4D8B-74F6116151DF}"/>
               </a:ext>
             </a:extLst>
           </p:cNvPr>
@@ -20637,7 +20639,10 @@
           <a:bodyPr/>
           <a:lstStyle/>
           <a:p>
-            <a:endParaRPr lang="en-PH"/>
+            <a:r>
+              <a:rPr lang="en-PH" dirty="0"/>
+              <a:t>Comparison with Nitta model (2010)</a:t>
+            </a:r>
           </a:p>
         </p:txBody>
       </p:sp>
@@ -20646,7 +20651,7 @@
           <p:cNvPr id="3" name="Content Placeholder 2">
             <a:extLst>
               <a:ext uri="{FF2B5EF4-FFF2-40B4-BE49-F238E27FC236}">
-                <a16:creationId xmlns:a16="http://schemas.microsoft.com/office/drawing/2014/main" id="{9200911F-B647-2DC0-959F-C90DA4B173F2}"/>
+                <a16:creationId xmlns:a16="http://schemas.microsoft.com/office/drawing/2014/main" id="{C2EDBC3B-B420-0390-7099-D0FC5FED7881}"/>
               </a:ext>
             </a:extLst>
           </p:cNvPr>
@@ -20662,7 +20667,46 @@
           <a:bodyPr/>
           <a:lstStyle/>
           <a:p>
-            <a:endParaRPr lang="en-PH"/>
+            <a:pPr marL="0" indent="0">
+              <a:buNone/>
+            </a:pPr>
+            <a:r>
+              <a:rPr lang="en-PH" b="1" u="sng" dirty="0"/>
+              <a:t>Observations:</a:t>
+            </a:r>
+          </a:p>
+          <a:p>
+            <a:r>
+              <a:rPr lang="en-PH" dirty="0"/>
+              <a:t>Close to Nitta for favorable conditions of PI</a:t>
+            </a:r>
+          </a:p>
+          <a:p>
+            <a:pPr lvl="1"/>
+            <a:r>
+              <a:rPr lang="en-PH" dirty="0"/>
+              <a:t>Small, fast, homogenous</a:t>
+            </a:r>
+          </a:p>
+          <a:p>
+            <a:r>
+              <a:rPr lang="en-PH" dirty="0"/>
+              <a:t>TI does not conform at all (positive concavity)</a:t>
+            </a:r>
+          </a:p>
+          <a:p>
+            <a:r>
+              <a:rPr lang="en-PH" dirty="0"/>
+              <a:t>Pls see </a:t>
+            </a:r>
+            <a:r>
+              <a:rPr lang="en-PH" i="1" dirty="0"/>
+              <a:t>/output/analysis/return-map </a:t>
+            </a:r>
+            <a:r>
+              <a:rPr lang="en-PH" dirty="0"/>
+              <a:t>for plots</a:t>
+            </a:r>
           </a:p>
         </p:txBody>
       </p:sp>
@@ -20671,7 +20715,7 @@
           <p:cNvPr id="4" name="Slide Number Placeholder 3">
             <a:extLst>
               <a:ext uri="{FF2B5EF4-FFF2-40B4-BE49-F238E27FC236}">
-                <a16:creationId xmlns:a16="http://schemas.microsoft.com/office/drawing/2014/main" id="{0D9A6018-0380-09A3-5477-36FBEF3D2098}"/>
+                <a16:creationId xmlns:a16="http://schemas.microsoft.com/office/drawing/2014/main" id="{E2B0BEA7-2729-8D25-2C58-8416A7CF7B42}"/>
               </a:ext>
             </a:extLst>
           </p:cNvPr>
@@ -20700,7 +20744,256 @@
           <p:cNvPr id="5" name="Footer Placeholder 4">
             <a:extLst>
               <a:ext uri="{FF2B5EF4-FFF2-40B4-BE49-F238E27FC236}">
-                <a16:creationId xmlns:a16="http://schemas.microsoft.com/office/drawing/2014/main" id="{FB20E994-30E1-D2B9-76FD-6151E114F94D}"/>
+                <a16:creationId xmlns:a16="http://schemas.microsoft.com/office/drawing/2014/main" id="{77E1B17F-B12F-4DBC-5E24-A670CF4AA6DE}"/>
+              </a:ext>
+            </a:extLst>
+          </p:cNvPr>
+          <p:cNvSpPr>
+            <a:spLocks noGrp="1"/>
+          </p:cNvSpPr>
+          <p:nvPr>
+            <p:ph type="ftr" sz="quarter" idx="3"/>
+          </p:nvPr>
+        </p:nvSpPr>
+        <p:spPr/>
+        <p:txBody>
+          <a:bodyPr/>
+          <a:lstStyle/>
+          <a:p>
+            <a:pPr algn="l"/>
+            <a:r>
+              <a:rPr lang="en-PH" dirty="0"/>
+              <a:t>https://journals.aps.org/prper/abstract/10.1103/PhysRevSTPER.6.020105</a:t>
+            </a:r>
+          </a:p>
+        </p:txBody>
+      </p:sp>
+      <p:sp>
+        <p:nvSpPr>
+          <p:cNvPr id="6" name="Date Placeholder 5">
+            <a:extLst>
+              <a:ext uri="{FF2B5EF4-FFF2-40B4-BE49-F238E27FC236}">
+                <a16:creationId xmlns:a16="http://schemas.microsoft.com/office/drawing/2014/main" id="{6126AA6D-9B6D-71CB-EB8B-F6376B0EBA19}"/>
+              </a:ext>
+            </a:extLst>
+          </p:cNvPr>
+          <p:cNvSpPr>
+            <a:spLocks noGrp="1"/>
+          </p:cNvSpPr>
+          <p:nvPr>
+            <p:ph type="dt" sz="half" idx="2"/>
+          </p:nvPr>
+        </p:nvSpPr>
+        <p:spPr/>
+        <p:txBody>
+          <a:bodyPr/>
+          <a:lstStyle/>
+          <a:p>
+            <a:r>
+              <a:rPr lang="en-US"/>
+              <a:t>2025.02.06</a:t>
+            </a:r>
+            <a:endParaRPr lang="en-PH" dirty="0"/>
+          </a:p>
+        </p:txBody>
+      </p:sp>
+    </p:spTree>
+    <p:extLst>
+      <p:ext uri="{BB962C8B-B14F-4D97-AF65-F5344CB8AC3E}">
+        <p14:creationId xmlns:p14="http://schemas.microsoft.com/office/powerpoint/2010/main" val="2717875455"/>
+      </p:ext>
+    </p:extLst>
+  </p:cSld>
+  <p:clrMapOvr>
+    <a:masterClrMapping/>
+  </p:clrMapOvr>
+  <mc:AlternateContent xmlns:mc="http://schemas.openxmlformats.org/markup-compatibility/2006" xmlns:p14="http://schemas.microsoft.com/office/powerpoint/2010/main">
+    <mc:Choice Requires="p14">
+      <p:transition p14:dur="200">
+        <p:fade/>
+      </p:transition>
+    </mc:Choice>
+    <mc:Fallback xmlns="">
+      <p:transition>
+        <p:fade/>
+      </p:transition>
+    </mc:Fallback>
+  </mc:AlternateContent>
+</p:sld>
+</file>
+
+<file path=ppt/slides/slide8.xml><?xml version="1.0" encoding="utf-8"?>
+<p:sld xmlns:a="http://schemas.openxmlformats.org/drawingml/2006/main" xmlns:r="http://schemas.openxmlformats.org/officeDocument/2006/relationships" xmlns:p="http://schemas.openxmlformats.org/presentationml/2006/main">
+  <p:cSld>
+    <p:spTree>
+      <p:nvGrpSpPr>
+        <p:cNvPr id="1" name=""/>
+        <p:cNvGrpSpPr/>
+        <p:nvPr/>
+      </p:nvGrpSpPr>
+      <p:grpSpPr>
+        <a:xfrm>
+          <a:off x="0" y="0"/>
+          <a:ext cx="0" cy="0"/>
+          <a:chOff x="0" y="0"/>
+          <a:chExt cx="0" cy="0"/>
+        </a:xfrm>
+      </p:grpSpPr>
+      <p:sp>
+        <p:nvSpPr>
+          <p:cNvPr id="2" name="Title 1">
+            <a:extLst>
+              <a:ext uri="{FF2B5EF4-FFF2-40B4-BE49-F238E27FC236}">
+                <a16:creationId xmlns:a16="http://schemas.microsoft.com/office/drawing/2014/main" id="{F07ABDF3-6F1B-526D-A8F2-5E5675B63221}"/>
+              </a:ext>
+            </a:extLst>
+          </p:cNvPr>
+          <p:cNvSpPr>
+            <a:spLocks noGrp="1"/>
+          </p:cNvSpPr>
+          <p:nvPr>
+            <p:ph type="title"/>
+          </p:nvPr>
+        </p:nvSpPr>
+        <p:spPr/>
+        <p:txBody>
+          <a:bodyPr/>
+          <a:lstStyle/>
+          <a:p>
+            <a:r>
+              <a:rPr lang="en-PH" dirty="0"/>
+              <a:t>PRPE paper conclusions</a:t>
+            </a:r>
+          </a:p>
+        </p:txBody>
+      </p:sp>
+      <p:sp>
+        <p:nvSpPr>
+          <p:cNvPr id="3" name="Content Placeholder 2">
+            <a:extLst>
+              <a:ext uri="{FF2B5EF4-FFF2-40B4-BE49-F238E27FC236}">
+                <a16:creationId xmlns:a16="http://schemas.microsoft.com/office/drawing/2014/main" id="{7034DEEE-B47E-8818-EDD6-B23814D93EBC}"/>
+              </a:ext>
+            </a:extLst>
+          </p:cNvPr>
+          <p:cNvSpPr>
+            <a:spLocks noGrp="1"/>
+          </p:cNvSpPr>
+          <p:nvPr>
+            <p:ph idx="1"/>
+          </p:nvPr>
+        </p:nvSpPr>
+        <p:spPr/>
+        <p:txBody>
+          <a:bodyPr>
+            <a:normAutofit fontScale="92500" lnSpcReduction="10000"/>
+          </a:bodyPr>
+          <a:lstStyle/>
+          <a:p>
+            <a:r>
+              <a:rPr lang="en-PH" dirty="0"/>
+              <a:t>Results of modelling PI as CA are consistent </a:t>
+            </a:r>
+            <a:br>
+              <a:rPr lang="en-PH" dirty="0"/>
+            </a:br>
+            <a:r>
+              <a:rPr lang="en-PH" dirty="0"/>
+              <a:t>with current findings</a:t>
+            </a:r>
+          </a:p>
+          <a:p>
+            <a:pPr lvl="1"/>
+            <a:r>
+              <a:rPr lang="en-PH" dirty="0"/>
+              <a:t>PI yields better or similar results to TI (3D plots, multiple)</a:t>
+            </a:r>
+          </a:p>
+          <a:p>
+            <a:pPr lvl="1"/>
+            <a:r>
+              <a:rPr lang="en-PH" dirty="0"/>
+              <a:t>PI is better for classes with slower learners than TI (3D plots)</a:t>
+            </a:r>
+          </a:p>
+          <a:p>
+            <a:pPr lvl="1"/>
+            <a:r>
+              <a:rPr lang="en-PH" dirty="0"/>
+              <a:t>Heterogeneity is bad</a:t>
+            </a:r>
+          </a:p>
+          <a:p>
+            <a:pPr lvl="1"/>
+            <a:r>
+              <a:rPr lang="en-PH" dirty="0"/>
+              <a:t>Current best practices validated</a:t>
+            </a:r>
+          </a:p>
+          <a:p>
+            <a:r>
+              <a:rPr lang="en-PH" dirty="0"/>
+              <a:t>New?:</a:t>
+            </a:r>
+          </a:p>
+          <a:p>
+            <a:pPr lvl="1"/>
+            <a:r>
+              <a:rPr lang="en-PH" dirty="0"/>
+              <a:t>Different dynamics (2-stage learning for TI, </a:t>
+            </a:r>
+            <a:br>
+              <a:rPr lang="en-PH" dirty="0"/>
+            </a:br>
+            <a:r>
+              <a:rPr lang="en-PH" dirty="0"/>
+              <a:t>S-curve evolution for PI)</a:t>
+            </a:r>
+          </a:p>
+          <a:p>
+            <a:pPr lvl="1"/>
+            <a:r>
+              <a:rPr lang="en-PH" dirty="0"/>
+              <a:t>Different optimal seating arrangement</a:t>
+            </a:r>
+          </a:p>
+        </p:txBody>
+      </p:sp>
+      <p:sp>
+        <p:nvSpPr>
+          <p:cNvPr id="4" name="Slide Number Placeholder 3">
+            <a:extLst>
+              <a:ext uri="{FF2B5EF4-FFF2-40B4-BE49-F238E27FC236}">
+                <a16:creationId xmlns:a16="http://schemas.microsoft.com/office/drawing/2014/main" id="{5D7F8D4A-9A0F-873F-69C1-4BDC9C77EE24}"/>
+              </a:ext>
+            </a:extLst>
+          </p:cNvPr>
+          <p:cNvSpPr>
+            <a:spLocks noGrp="1"/>
+          </p:cNvSpPr>
+          <p:nvPr>
+            <p:ph type="sldNum" sz="quarter" idx="12"/>
+          </p:nvPr>
+        </p:nvSpPr>
+        <p:spPr/>
+        <p:txBody>
+          <a:bodyPr/>
+          <a:lstStyle/>
+          <a:p>
+            <a:fld id="{32177519-FDB5-46C8-A273-662D2447F0A4}" type="slidenum">
+              <a:rPr lang="en-PH" smtClean="0"/>
+              <a:t>8</a:t>
+            </a:fld>
+            <a:endParaRPr lang="en-PH"/>
+          </a:p>
+        </p:txBody>
+      </p:sp>
+      <p:sp>
+        <p:nvSpPr>
+          <p:cNvPr id="5" name="Footer Placeholder 4">
+            <a:extLst>
+              <a:ext uri="{FF2B5EF4-FFF2-40B4-BE49-F238E27FC236}">
+                <a16:creationId xmlns:a16="http://schemas.microsoft.com/office/drawing/2014/main" id="{281263A0-A1C0-9758-7220-75B4CA0BE5DA}"/>
               </a:ext>
             </a:extLst>
           </p:cNvPr>
@@ -20725,7 +21018,7 @@
           <p:cNvPr id="6" name="Date Placeholder 5">
             <a:extLst>
               <a:ext uri="{FF2B5EF4-FFF2-40B4-BE49-F238E27FC236}">
-                <a16:creationId xmlns:a16="http://schemas.microsoft.com/office/drawing/2014/main" id="{094B3D97-15E6-6640-240A-043EE86260DD}"/>
+                <a16:creationId xmlns:a16="http://schemas.microsoft.com/office/drawing/2014/main" id="{E0B72CA8-21B4-4635-909B-D464A31AEB60}"/>
               </a:ext>
             </a:extLst>
           </p:cNvPr>
@@ -20742,8 +21035,8 @@
           <a:lstStyle/>
           <a:p>
             <a:r>
-              <a:rPr lang="en-US" dirty="0"/>
-              <a:t>2024.12.12</a:t>
+              <a:rPr lang="en-US"/>
+              <a:t>2025.02.06</a:t>
             </a:r>
             <a:endParaRPr lang="en-PH" dirty="0"/>
           </a:p>
@@ -20752,7 +21045,213 @@
     </p:spTree>
     <p:extLst>
       <p:ext uri="{BB962C8B-B14F-4D97-AF65-F5344CB8AC3E}">
-        <p14:creationId xmlns:p14="http://schemas.microsoft.com/office/powerpoint/2010/main" val="3865736279"/>
+        <p14:creationId xmlns:p14="http://schemas.microsoft.com/office/powerpoint/2010/main" val="1828315405"/>
+      </p:ext>
+    </p:extLst>
+  </p:cSld>
+  <p:clrMapOvr>
+    <a:masterClrMapping/>
+  </p:clrMapOvr>
+  <mc:AlternateContent xmlns:mc="http://schemas.openxmlformats.org/markup-compatibility/2006" xmlns:p14="http://schemas.microsoft.com/office/powerpoint/2010/main">
+    <mc:Choice Requires="p14">
+      <p:transition p14:dur="200">
+        <p:fade/>
+      </p:transition>
+    </mc:Choice>
+    <mc:Fallback xmlns="">
+      <p:transition>
+        <p:fade/>
+      </p:transition>
+    </mc:Fallback>
+  </mc:AlternateContent>
+</p:sld>
+</file>
+
+<file path=ppt/slides/slide9.xml><?xml version="1.0" encoding="utf-8"?>
+<p:sld xmlns:a="http://schemas.openxmlformats.org/drawingml/2006/main" xmlns:r="http://schemas.openxmlformats.org/officeDocument/2006/relationships" xmlns:p="http://schemas.openxmlformats.org/presentationml/2006/main">
+  <p:cSld>
+    <p:spTree>
+      <p:nvGrpSpPr>
+        <p:cNvPr id="1" name=""/>
+        <p:cNvGrpSpPr/>
+        <p:nvPr/>
+      </p:nvGrpSpPr>
+      <p:grpSpPr>
+        <a:xfrm>
+          <a:off x="0" y="0"/>
+          <a:ext cx="0" cy="0"/>
+          <a:chOff x="0" y="0"/>
+          <a:chExt cx="0" cy="0"/>
+        </a:xfrm>
+      </p:grpSpPr>
+      <p:sp>
+        <p:nvSpPr>
+          <p:cNvPr id="2" name="Title 1">
+            <a:extLst>
+              <a:ext uri="{FF2B5EF4-FFF2-40B4-BE49-F238E27FC236}">
+                <a16:creationId xmlns:a16="http://schemas.microsoft.com/office/drawing/2014/main" id="{E3383B26-D5C0-F32C-F004-9E900CFD1653}"/>
+              </a:ext>
+            </a:extLst>
+          </p:cNvPr>
+          <p:cNvSpPr>
+            <a:spLocks noGrp="1"/>
+          </p:cNvSpPr>
+          <p:nvPr>
+            <p:ph type="title"/>
+          </p:nvPr>
+        </p:nvSpPr>
+        <p:spPr/>
+        <p:txBody>
+          <a:bodyPr/>
+          <a:lstStyle/>
+          <a:p>
+            <a:r>
+              <a:rPr lang="en-PH" dirty="0"/>
+              <a:t>PRPE reminders:</a:t>
+            </a:r>
+          </a:p>
+        </p:txBody>
+      </p:sp>
+      <p:sp>
+        <p:nvSpPr>
+          <p:cNvPr id="3" name="Content Placeholder 2">
+            <a:extLst>
+              <a:ext uri="{FF2B5EF4-FFF2-40B4-BE49-F238E27FC236}">
+                <a16:creationId xmlns:a16="http://schemas.microsoft.com/office/drawing/2014/main" id="{6CEB1D19-E256-DE3A-0B7B-F23CB4D76927}"/>
+              </a:ext>
+            </a:extLst>
+          </p:cNvPr>
+          <p:cNvSpPr>
+            <a:spLocks noGrp="1"/>
+          </p:cNvSpPr>
+          <p:nvPr>
+            <p:ph idx="1"/>
+          </p:nvPr>
+        </p:nvSpPr>
+        <p:spPr/>
+        <p:txBody>
+          <a:bodyPr/>
+          <a:lstStyle/>
+          <a:p>
+            <a:r>
+              <a:rPr lang="en-PH" dirty="0"/>
+              <a:t>Cite SPP and Ma’am </a:t>
+            </a:r>
+            <a:r>
+              <a:rPr lang="en-PH" dirty="0" err="1"/>
+              <a:t>Ianne</a:t>
+            </a:r>
+            <a:endParaRPr lang="en-PH" dirty="0"/>
+          </a:p>
+          <a:p>
+            <a:r>
+              <a:rPr lang="en-PH" dirty="0"/>
+              <a:t>Ask ma’am </a:t>
+            </a:r>
+            <a:r>
+              <a:rPr lang="en-PH" dirty="0" err="1"/>
+              <a:t>Ianne</a:t>
+            </a:r>
+            <a:r>
+              <a:rPr lang="en-PH" dirty="0"/>
+              <a:t> to help review, middle author</a:t>
+            </a:r>
+          </a:p>
+          <a:p>
+            <a:r>
+              <a:rPr lang="en-PH" dirty="0"/>
+              <a:t>March 15, 2025 deadline to submit</a:t>
+            </a:r>
+          </a:p>
+        </p:txBody>
+      </p:sp>
+      <p:sp>
+        <p:nvSpPr>
+          <p:cNvPr id="4" name="Slide Number Placeholder 3">
+            <a:extLst>
+              <a:ext uri="{FF2B5EF4-FFF2-40B4-BE49-F238E27FC236}">
+                <a16:creationId xmlns:a16="http://schemas.microsoft.com/office/drawing/2014/main" id="{A2B9503D-2FB8-DB47-55C4-2453AEE9B111}"/>
+              </a:ext>
+            </a:extLst>
+          </p:cNvPr>
+          <p:cNvSpPr>
+            <a:spLocks noGrp="1"/>
+          </p:cNvSpPr>
+          <p:nvPr>
+            <p:ph type="sldNum" sz="quarter" idx="12"/>
+          </p:nvPr>
+        </p:nvSpPr>
+        <p:spPr/>
+        <p:txBody>
+          <a:bodyPr/>
+          <a:lstStyle/>
+          <a:p>
+            <a:fld id="{32177519-FDB5-46C8-A273-662D2447F0A4}" type="slidenum">
+              <a:rPr lang="en-PH" smtClean="0"/>
+              <a:t>9</a:t>
+            </a:fld>
+            <a:endParaRPr lang="en-PH"/>
+          </a:p>
+        </p:txBody>
+      </p:sp>
+      <p:sp>
+        <p:nvSpPr>
+          <p:cNvPr id="5" name="Footer Placeholder 4">
+            <a:extLst>
+              <a:ext uri="{FF2B5EF4-FFF2-40B4-BE49-F238E27FC236}">
+                <a16:creationId xmlns:a16="http://schemas.microsoft.com/office/drawing/2014/main" id="{2912BCBF-B0FD-8A89-BC28-5EFF8AFA24DC}"/>
+              </a:ext>
+            </a:extLst>
+          </p:cNvPr>
+          <p:cNvSpPr>
+            <a:spLocks noGrp="1"/>
+          </p:cNvSpPr>
+          <p:nvPr>
+            <p:ph type="ftr" sz="quarter" idx="3"/>
+          </p:nvPr>
+        </p:nvSpPr>
+        <p:spPr/>
+        <p:txBody>
+          <a:bodyPr/>
+          <a:lstStyle/>
+          <a:p>
+            <a:endParaRPr lang="en-PH" dirty="0"/>
+          </a:p>
+        </p:txBody>
+      </p:sp>
+      <p:sp>
+        <p:nvSpPr>
+          <p:cNvPr id="6" name="Date Placeholder 5">
+            <a:extLst>
+              <a:ext uri="{FF2B5EF4-FFF2-40B4-BE49-F238E27FC236}">
+                <a16:creationId xmlns:a16="http://schemas.microsoft.com/office/drawing/2014/main" id="{1838C877-8395-C760-E7F8-20D8BA893993}"/>
+              </a:ext>
+            </a:extLst>
+          </p:cNvPr>
+          <p:cNvSpPr>
+            <a:spLocks noGrp="1"/>
+          </p:cNvSpPr>
+          <p:nvPr>
+            <p:ph type="dt" sz="half" idx="2"/>
+          </p:nvPr>
+        </p:nvSpPr>
+        <p:spPr/>
+        <p:txBody>
+          <a:bodyPr/>
+          <a:lstStyle/>
+          <a:p>
+            <a:r>
+              <a:rPr lang="en-US"/>
+              <a:t>2025.02.06</a:t>
+            </a:r>
+            <a:endParaRPr lang="en-PH" dirty="0"/>
+          </a:p>
+        </p:txBody>
+      </p:sp>
+    </p:spTree>
+    <p:extLst>
+      <p:ext uri="{BB962C8B-B14F-4D97-AF65-F5344CB8AC3E}">
+        <p14:creationId xmlns:p14="http://schemas.microsoft.com/office/powerpoint/2010/main" val="1786857458"/>
       </p:ext>
     </p:extLst>
   </p:cSld>

--- a/documents/202425s2-RM-Slides-Sy.pptx
+++ b/documents/202425s2-RM-Slides-Sy.pptx
@@ -5,7 +5,7 @@
     <p:sldMasterId id="2147483657" r:id="rId1"/>
   </p:sldMasterIdLst>
   <p:notesMasterIdLst>
-    <p:notesMasterId r:id="rId11"/>
+    <p:notesMasterId r:id="rId15"/>
   </p:notesMasterIdLst>
   <p:sldIdLst>
     <p:sldId id="256" r:id="rId2"/>
@@ -17,6 +17,10 @@
     <p:sldId id="303" r:id="rId8"/>
     <p:sldId id="304" r:id="rId9"/>
     <p:sldId id="305" r:id="rId10"/>
+    <p:sldId id="306" r:id="rId11"/>
+    <p:sldId id="307" r:id="rId12"/>
+    <p:sldId id="308" r:id="rId13"/>
+    <p:sldId id="309" r:id="rId14"/>
   </p:sldIdLst>
   <p:sldSz cx="12192000" cy="6858000"/>
   <p:notesSz cx="6858000" cy="9144000"/>
@@ -6170,7 +6174,7 @@
           <a:p>
             <a:fld id="{B2B8B589-3DCF-4CC3-8CB1-8F263020D954}" type="datetimeFigureOut">
               <a:rPr lang="en-PH" smtClean="0"/>
-              <a:t>02/06/2025</a:t>
+              <a:t>03/25/2025</a:t>
             </a:fld>
             <a:endParaRPr lang="en-PH"/>
           </a:p>
@@ -6854,7 +6858,7 @@
           <a:p>
             <a:fld id="{843CB0FE-86D9-4EF0-AD61-3F5691C83FED}" type="datetimeFigureOut">
               <a:rPr lang="en-PH" smtClean="0"/>
-              <a:t>02/06/2025</a:t>
+              <a:t>03/25/2025</a:t>
             </a:fld>
             <a:endParaRPr lang="en-PH"/>
           </a:p>
@@ -12757,6 +12761,817 @@
     <p:extLst>
       <p:ext uri="{BB962C8B-B14F-4D97-AF65-F5344CB8AC3E}">
         <p14:creationId xmlns:p14="http://schemas.microsoft.com/office/powerpoint/2010/main" val="4269614947"/>
+      </p:ext>
+    </p:extLst>
+  </p:cSld>
+  <p:clrMapOvr>
+    <a:masterClrMapping/>
+  </p:clrMapOvr>
+  <mc:AlternateContent xmlns:mc="http://schemas.openxmlformats.org/markup-compatibility/2006" xmlns:p14="http://schemas.microsoft.com/office/powerpoint/2010/main">
+    <mc:Choice Requires="p14">
+      <p:transition p14:dur="200">
+        <p:fade/>
+      </p:transition>
+    </mc:Choice>
+    <mc:Fallback xmlns="">
+      <p:transition>
+        <p:fade/>
+      </p:transition>
+    </mc:Fallback>
+  </mc:AlternateContent>
+</p:sld>
+</file>
+
+<file path=ppt/slides/slide10.xml><?xml version="1.0" encoding="utf-8"?>
+<p:sld xmlns:a="http://schemas.openxmlformats.org/drawingml/2006/main" xmlns:r="http://schemas.openxmlformats.org/officeDocument/2006/relationships" xmlns:p="http://schemas.openxmlformats.org/presentationml/2006/main">
+  <p:cSld>
+    <p:spTree>
+      <p:nvGrpSpPr>
+        <p:cNvPr id="1" name=""/>
+        <p:cNvGrpSpPr/>
+        <p:nvPr/>
+      </p:nvGrpSpPr>
+      <p:grpSpPr>
+        <a:xfrm>
+          <a:off x="0" y="0"/>
+          <a:ext cx="0" cy="0"/>
+          <a:chOff x="0" y="0"/>
+          <a:chExt cx="0" cy="0"/>
+        </a:xfrm>
+      </p:grpSpPr>
+      <p:sp>
+        <p:nvSpPr>
+          <p:cNvPr id="2" name="Title 1">
+            <a:extLst>
+              <a:ext uri="{FF2B5EF4-FFF2-40B4-BE49-F238E27FC236}">
+                <a16:creationId xmlns:a16="http://schemas.microsoft.com/office/drawing/2014/main" id="{A339FC02-472F-8A7F-3446-0775C7130BC6}"/>
+              </a:ext>
+            </a:extLst>
+          </p:cNvPr>
+          <p:cNvSpPr>
+            <a:spLocks noGrp="1"/>
+          </p:cNvSpPr>
+          <p:nvPr>
+            <p:ph type="title"/>
+          </p:nvPr>
+        </p:nvSpPr>
+        <p:spPr/>
+        <p:txBody>
+          <a:bodyPr/>
+          <a:lstStyle/>
+          <a:p>
+            <a:r>
+              <a:rPr lang="en-PH" dirty="0"/>
+              <a:t>March 25, 2025</a:t>
+            </a:r>
+          </a:p>
+        </p:txBody>
+      </p:sp>
+      <p:sp>
+        <p:nvSpPr>
+          <p:cNvPr id="3" name="Slide Number Placeholder 2">
+            <a:extLst>
+              <a:ext uri="{FF2B5EF4-FFF2-40B4-BE49-F238E27FC236}">
+                <a16:creationId xmlns:a16="http://schemas.microsoft.com/office/drawing/2014/main" id="{80F18471-FA10-B507-9220-184DBD7D0E09}"/>
+              </a:ext>
+            </a:extLst>
+          </p:cNvPr>
+          <p:cNvSpPr>
+            <a:spLocks noGrp="1"/>
+          </p:cNvSpPr>
+          <p:nvPr>
+            <p:ph type="sldNum" sz="quarter" idx="12"/>
+          </p:nvPr>
+        </p:nvSpPr>
+        <p:spPr/>
+        <p:txBody>
+          <a:bodyPr/>
+          <a:lstStyle/>
+          <a:p>
+            <a:fld id="{32177519-FDB5-46C8-A273-662D2447F0A4}" type="slidenum">
+              <a:rPr lang="en-PH" smtClean="0"/>
+              <a:t>10</a:t>
+            </a:fld>
+            <a:endParaRPr lang="en-PH"/>
+          </a:p>
+        </p:txBody>
+      </p:sp>
+      <p:sp>
+        <p:nvSpPr>
+          <p:cNvPr id="4" name="Footer Placeholder 3">
+            <a:extLst>
+              <a:ext uri="{FF2B5EF4-FFF2-40B4-BE49-F238E27FC236}">
+                <a16:creationId xmlns:a16="http://schemas.microsoft.com/office/drawing/2014/main" id="{EDC7B8EF-9552-A9D7-2A07-25F0F97ECA7B}"/>
+              </a:ext>
+            </a:extLst>
+          </p:cNvPr>
+          <p:cNvSpPr>
+            <a:spLocks noGrp="1"/>
+          </p:cNvSpPr>
+          <p:nvPr>
+            <p:ph type="ftr" sz="quarter" idx="3"/>
+          </p:nvPr>
+        </p:nvSpPr>
+        <p:spPr/>
+        <p:txBody>
+          <a:bodyPr/>
+          <a:lstStyle/>
+          <a:p>
+            <a:endParaRPr lang="en-PH" dirty="0"/>
+          </a:p>
+        </p:txBody>
+      </p:sp>
+      <p:sp>
+        <p:nvSpPr>
+          <p:cNvPr id="5" name="Date Placeholder 4">
+            <a:extLst>
+              <a:ext uri="{FF2B5EF4-FFF2-40B4-BE49-F238E27FC236}">
+                <a16:creationId xmlns:a16="http://schemas.microsoft.com/office/drawing/2014/main" id="{C7E9F992-F492-5D4D-1DB0-22A85DE406B0}"/>
+              </a:ext>
+            </a:extLst>
+          </p:cNvPr>
+          <p:cNvSpPr>
+            <a:spLocks noGrp="1"/>
+          </p:cNvSpPr>
+          <p:nvPr>
+            <p:ph type="dt" sz="half" idx="2"/>
+          </p:nvPr>
+        </p:nvSpPr>
+        <p:spPr/>
+        <p:txBody>
+          <a:bodyPr/>
+          <a:lstStyle/>
+          <a:p>
+            <a:r>
+              <a:rPr lang="en-US"/>
+              <a:t>2024.12.12</a:t>
+            </a:r>
+            <a:endParaRPr lang="en-PH" dirty="0"/>
+          </a:p>
+        </p:txBody>
+      </p:sp>
+      <p:sp>
+        <p:nvSpPr>
+          <p:cNvPr id="6" name="Text Placeholder 5">
+            <a:extLst>
+              <a:ext uri="{FF2B5EF4-FFF2-40B4-BE49-F238E27FC236}">
+                <a16:creationId xmlns:a16="http://schemas.microsoft.com/office/drawing/2014/main" id="{F276459B-B61F-85BC-4C41-04FEB4A8FE4F}"/>
+              </a:ext>
+            </a:extLst>
+          </p:cNvPr>
+          <p:cNvSpPr>
+            <a:spLocks noGrp="1"/>
+          </p:cNvSpPr>
+          <p:nvPr>
+            <p:ph type="body" sz="quarter" idx="13"/>
+          </p:nvPr>
+        </p:nvSpPr>
+        <p:spPr/>
+        <p:txBody>
+          <a:bodyPr/>
+          <a:lstStyle/>
+          <a:p>
+            <a:r>
+              <a:rPr lang="en-PH" dirty="0"/>
+              <a:t>Potential new fitting function to keep comparability but has better interpretability</a:t>
+            </a:r>
+          </a:p>
+        </p:txBody>
+      </p:sp>
+    </p:spTree>
+    <p:extLst>
+      <p:ext uri="{BB962C8B-B14F-4D97-AF65-F5344CB8AC3E}">
+        <p14:creationId xmlns:p14="http://schemas.microsoft.com/office/powerpoint/2010/main" val="442974637"/>
+      </p:ext>
+    </p:extLst>
+  </p:cSld>
+  <p:clrMapOvr>
+    <a:masterClrMapping/>
+  </p:clrMapOvr>
+  <mc:AlternateContent xmlns:mc="http://schemas.openxmlformats.org/markup-compatibility/2006" xmlns:p14="http://schemas.microsoft.com/office/powerpoint/2010/main">
+    <mc:Choice Requires="p14">
+      <p:transition p14:dur="200">
+        <p:fade/>
+      </p:transition>
+    </mc:Choice>
+    <mc:Fallback xmlns="">
+      <p:transition>
+        <p:fade/>
+      </p:transition>
+    </mc:Fallback>
+  </mc:AlternateContent>
+</p:sld>
+</file>
+
+<file path=ppt/slides/slide11.xml><?xml version="1.0" encoding="utf-8"?>
+<p:sld xmlns:a="http://schemas.openxmlformats.org/drawingml/2006/main" xmlns:r="http://schemas.openxmlformats.org/officeDocument/2006/relationships" xmlns:p="http://schemas.openxmlformats.org/presentationml/2006/main">
+  <p:cSld>
+    <p:spTree>
+      <p:nvGrpSpPr>
+        <p:cNvPr id="1" name=""/>
+        <p:cNvGrpSpPr/>
+        <p:nvPr/>
+      </p:nvGrpSpPr>
+      <p:grpSpPr>
+        <a:xfrm>
+          <a:off x="0" y="0"/>
+          <a:ext cx="0" cy="0"/>
+          <a:chOff x="0" y="0"/>
+          <a:chExt cx="0" cy="0"/>
+        </a:xfrm>
+      </p:grpSpPr>
+      <p:sp>
+        <p:nvSpPr>
+          <p:cNvPr id="7" name="Title 6">
+            <a:extLst>
+              <a:ext uri="{FF2B5EF4-FFF2-40B4-BE49-F238E27FC236}">
+                <a16:creationId xmlns:a16="http://schemas.microsoft.com/office/drawing/2014/main" id="{1E52AFAE-3FFB-1A49-4CDF-325CCBF313CA}"/>
+              </a:ext>
+            </a:extLst>
+          </p:cNvPr>
+          <p:cNvSpPr>
+            <a:spLocks noGrp="1"/>
+          </p:cNvSpPr>
+          <p:nvPr>
+            <p:ph type="title"/>
+          </p:nvPr>
+        </p:nvSpPr>
+        <p:spPr>
+          <a:xfrm>
+            <a:off x="283265" y="694620"/>
+            <a:ext cx="9983415" cy="776288"/>
+          </a:xfrm>
+        </p:spPr>
+        <p:txBody>
+          <a:bodyPr anchor="ctr">
+            <a:normAutofit/>
+          </a:bodyPr>
+          <a:lstStyle/>
+          <a:p>
+            <a:r>
+              <a:rPr lang="en-PH" sz="3400"/>
+              <a:t>Generalized logistic function/Richard’s growth curve</a:t>
+            </a:r>
+          </a:p>
+        </p:txBody>
+      </p:sp>
+      <p:pic>
+        <p:nvPicPr>
+          <p:cNvPr id="39" name="Picture 38" descr="A screenshot of a computer&#10;&#10;AI-generated content may be incorrect.">
+            <a:extLst>
+              <a:ext uri="{FF2B5EF4-FFF2-40B4-BE49-F238E27FC236}">
+                <a16:creationId xmlns:a16="http://schemas.microsoft.com/office/drawing/2014/main" id="{28A3406F-1F4D-57A9-F0FA-68ACE34C6EED}"/>
+              </a:ext>
+            </a:extLst>
+          </p:cNvPr>
+          <p:cNvPicPr>
+            <a:picLocks noChangeAspect="1"/>
+          </p:cNvPicPr>
+          <p:nvPr/>
+        </p:nvPicPr>
+        <p:blipFill>
+          <a:blip r:embed="rId2"/>
+          <a:stretch>
+            <a:fillRect/>
+          </a:stretch>
+        </p:blipFill>
+        <p:spPr>
+          <a:xfrm>
+            <a:off x="471216" y="1733384"/>
+            <a:ext cx="11249568" cy="4443579"/>
+          </a:xfrm>
+          <a:prstGeom prst="rect">
+            <a:avLst/>
+          </a:prstGeom>
+          <a:noFill/>
+        </p:spPr>
+      </p:pic>
+      <p:sp>
+        <p:nvSpPr>
+          <p:cNvPr id="3" name="Slide Number Placeholder 2">
+            <a:extLst>
+              <a:ext uri="{FF2B5EF4-FFF2-40B4-BE49-F238E27FC236}">
+                <a16:creationId xmlns:a16="http://schemas.microsoft.com/office/drawing/2014/main" id="{723CE273-DC28-FD8C-CBCF-64B2E2335677}"/>
+              </a:ext>
+            </a:extLst>
+          </p:cNvPr>
+          <p:cNvSpPr>
+            <a:spLocks noGrp="1"/>
+          </p:cNvSpPr>
+          <p:nvPr>
+            <p:ph type="sldNum" sz="quarter" idx="12"/>
+          </p:nvPr>
+        </p:nvSpPr>
+        <p:spPr>
+          <a:xfrm>
+            <a:off x="11356219" y="6451565"/>
+            <a:ext cx="739019" cy="360000"/>
+          </a:xfrm>
+        </p:spPr>
+        <p:txBody>
+          <a:bodyPr>
+            <a:normAutofit/>
+          </a:bodyPr>
+          <a:lstStyle/>
+          <a:p>
+            <a:pPr>
+              <a:lnSpc>
+                <a:spcPct val="90000"/>
+              </a:lnSpc>
+              <a:spcAft>
+                <a:spcPts val="600"/>
+              </a:spcAft>
+            </a:pPr>
+            <a:fld id="{32177519-FDB5-46C8-A273-662D2447F0A4}" type="slidenum">
+              <a:rPr lang="en-PH" smtClean="0"/>
+              <a:pPr>
+                <a:lnSpc>
+                  <a:spcPct val="90000"/>
+                </a:lnSpc>
+                <a:spcAft>
+                  <a:spcPts val="600"/>
+                </a:spcAft>
+              </a:pPr>
+              <a:t>11</a:t>
+            </a:fld>
+            <a:endParaRPr lang="en-PH"/>
+          </a:p>
+        </p:txBody>
+      </p:sp>
+      <p:sp>
+        <p:nvSpPr>
+          <p:cNvPr id="1042" name="Footer Placeholder 4">
+            <a:extLst>
+              <a:ext uri="{FF2B5EF4-FFF2-40B4-BE49-F238E27FC236}">
+                <a16:creationId xmlns:a16="http://schemas.microsoft.com/office/drawing/2014/main" id="{F787579B-A397-BFE3-629A-142636CFD503}"/>
+              </a:ext>
+            </a:extLst>
+          </p:cNvPr>
+          <p:cNvSpPr>
+            <a:spLocks noGrp="1"/>
+          </p:cNvSpPr>
+          <p:nvPr>
+            <p:ph type="ftr" sz="quarter" idx="3"/>
+          </p:nvPr>
+        </p:nvSpPr>
+        <p:spPr>
+          <a:xfrm>
+            <a:off x="77411" y="6451565"/>
+            <a:ext cx="10096014" cy="360000"/>
+          </a:xfrm>
+        </p:spPr>
+        <p:txBody>
+          <a:bodyPr/>
+          <a:lstStyle/>
+          <a:p>
+            <a:pPr algn="l"/>
+            <a:r>
+              <a:rPr lang="en-PH" dirty="0"/>
+              <a:t>https://en.wikipedia.org/wiki/Logistic_function#Modeling_early_COVID-19_cases</a:t>
+            </a:r>
+          </a:p>
+        </p:txBody>
+      </p:sp>
+      <p:sp>
+        <p:nvSpPr>
+          <p:cNvPr id="5" name="Date Placeholder 4">
+            <a:extLst>
+              <a:ext uri="{FF2B5EF4-FFF2-40B4-BE49-F238E27FC236}">
+                <a16:creationId xmlns:a16="http://schemas.microsoft.com/office/drawing/2014/main" id="{2D9E44AE-B617-5898-34B1-9F0BDFD6FC87}"/>
+              </a:ext>
+            </a:extLst>
+          </p:cNvPr>
+          <p:cNvSpPr>
+            <a:spLocks noGrp="1"/>
+          </p:cNvSpPr>
+          <p:nvPr>
+            <p:ph type="dt" sz="half" idx="2"/>
+          </p:nvPr>
+        </p:nvSpPr>
+        <p:spPr>
+          <a:xfrm>
+            <a:off x="10220651" y="6451565"/>
+            <a:ext cx="1088342" cy="360000"/>
+          </a:xfrm>
+        </p:spPr>
+        <p:txBody>
+          <a:bodyPr anchor="ctr">
+            <a:normAutofit/>
+          </a:bodyPr>
+          <a:lstStyle/>
+          <a:p>
+            <a:pPr>
+              <a:spcAft>
+                <a:spcPts val="600"/>
+              </a:spcAft>
+            </a:pPr>
+            <a:r>
+              <a:rPr lang="en-US" dirty="0"/>
+              <a:t>2025.03.25</a:t>
+            </a:r>
+            <a:endParaRPr lang="en-PH" dirty="0"/>
+          </a:p>
+        </p:txBody>
+      </p:sp>
+    </p:spTree>
+    <p:extLst>
+      <p:ext uri="{BB962C8B-B14F-4D97-AF65-F5344CB8AC3E}">
+        <p14:creationId xmlns:p14="http://schemas.microsoft.com/office/powerpoint/2010/main" val="17239520"/>
+      </p:ext>
+    </p:extLst>
+  </p:cSld>
+  <p:clrMapOvr>
+    <a:masterClrMapping/>
+  </p:clrMapOvr>
+  <mc:AlternateContent xmlns:mc="http://schemas.openxmlformats.org/markup-compatibility/2006" xmlns:p14="http://schemas.microsoft.com/office/powerpoint/2010/main">
+    <mc:Choice Requires="p14">
+      <p:transition p14:dur="200">
+        <p:fade/>
+      </p:transition>
+    </mc:Choice>
+    <mc:Fallback xmlns="">
+      <p:transition>
+        <p:fade/>
+      </p:transition>
+    </mc:Fallback>
+  </mc:AlternateContent>
+</p:sld>
+</file>
+
+<file path=ppt/slides/slide12.xml><?xml version="1.0" encoding="utf-8"?>
+<p:sld xmlns:a="http://schemas.openxmlformats.org/drawingml/2006/main" xmlns:r="http://schemas.openxmlformats.org/officeDocument/2006/relationships" xmlns:p="http://schemas.openxmlformats.org/presentationml/2006/main">
+  <p:cSld>
+    <p:spTree>
+      <p:nvGrpSpPr>
+        <p:cNvPr id="1" name=""/>
+        <p:cNvGrpSpPr/>
+        <p:nvPr/>
+      </p:nvGrpSpPr>
+      <p:grpSpPr>
+        <a:xfrm>
+          <a:off x="0" y="0"/>
+          <a:ext cx="0" cy="0"/>
+          <a:chOff x="0" y="0"/>
+          <a:chExt cx="0" cy="0"/>
+        </a:xfrm>
+      </p:grpSpPr>
+      <p:sp>
+        <p:nvSpPr>
+          <p:cNvPr id="7" name="Title 6">
+            <a:extLst>
+              <a:ext uri="{FF2B5EF4-FFF2-40B4-BE49-F238E27FC236}">
+                <a16:creationId xmlns:a16="http://schemas.microsoft.com/office/drawing/2014/main" id="{93ED3EDE-E75D-77E6-AFA3-CAD266C2C510}"/>
+              </a:ext>
+            </a:extLst>
+          </p:cNvPr>
+          <p:cNvSpPr>
+            <a:spLocks noGrp="1"/>
+          </p:cNvSpPr>
+          <p:nvPr>
+            <p:ph type="title"/>
+          </p:nvPr>
+        </p:nvSpPr>
+        <p:spPr/>
+        <p:txBody>
+          <a:bodyPr/>
+          <a:lstStyle/>
+          <a:p>
+            <a:r>
+              <a:rPr lang="en-PH" dirty="0"/>
+              <a:t>Idea: </a:t>
+            </a:r>
+            <a:r>
+              <a:rPr lang="en-PH" dirty="0" err="1"/>
+              <a:t>DynamicalSystems.jl</a:t>
+            </a:r>
+            <a:endParaRPr lang="en-PH" dirty="0"/>
+          </a:p>
+        </p:txBody>
+      </p:sp>
+      <p:sp>
+        <p:nvSpPr>
+          <p:cNvPr id="8" name="Content Placeholder 7">
+            <a:extLst>
+              <a:ext uri="{FF2B5EF4-FFF2-40B4-BE49-F238E27FC236}">
+                <a16:creationId xmlns:a16="http://schemas.microsoft.com/office/drawing/2014/main" id="{D8F5CBCA-BF9B-B5E5-8436-2F260625EA95}"/>
+              </a:ext>
+            </a:extLst>
+          </p:cNvPr>
+          <p:cNvSpPr>
+            <a:spLocks noGrp="1"/>
+          </p:cNvSpPr>
+          <p:nvPr>
+            <p:ph idx="1"/>
+          </p:nvPr>
+        </p:nvSpPr>
+        <p:spPr/>
+        <p:txBody>
+          <a:bodyPr/>
+          <a:lstStyle/>
+          <a:p>
+            <a:r>
+              <a:rPr lang="en-PH" dirty="0"/>
+              <a:t>Not sure if I can apply built-in analysis to my system/data</a:t>
+            </a:r>
+          </a:p>
+          <a:p>
+            <a:r>
+              <a:rPr lang="en-PH" dirty="0"/>
+              <a:t>For observed/measured data: </a:t>
+            </a:r>
+            <a:r>
+              <a:rPr lang="en-PH" dirty="0" err="1"/>
+              <a:t>ComplexityMeasures.jl</a:t>
+            </a:r>
+            <a:endParaRPr lang="en-PH" dirty="0"/>
+          </a:p>
+          <a:p>
+            <a:pPr lvl="1"/>
+            <a:r>
+              <a:rPr lang="en-PH" dirty="0"/>
+              <a:t>Probabilities, info measures, complexity measures</a:t>
+            </a:r>
+          </a:p>
+          <a:p>
+            <a:r>
+              <a:rPr lang="en-PH" dirty="0"/>
+              <a:t>!! Don’t really understand docs</a:t>
+            </a:r>
+          </a:p>
+        </p:txBody>
+      </p:sp>
+      <p:sp>
+        <p:nvSpPr>
+          <p:cNvPr id="4" name="Slide Number Placeholder 3">
+            <a:extLst>
+              <a:ext uri="{FF2B5EF4-FFF2-40B4-BE49-F238E27FC236}">
+                <a16:creationId xmlns:a16="http://schemas.microsoft.com/office/drawing/2014/main" id="{F9AA4E32-7D5F-E4F3-A8F9-7D73E51C3553}"/>
+              </a:ext>
+            </a:extLst>
+          </p:cNvPr>
+          <p:cNvSpPr>
+            <a:spLocks noGrp="1"/>
+          </p:cNvSpPr>
+          <p:nvPr>
+            <p:ph type="sldNum" sz="quarter" idx="12"/>
+          </p:nvPr>
+        </p:nvSpPr>
+        <p:spPr/>
+        <p:txBody>
+          <a:bodyPr/>
+          <a:lstStyle/>
+          <a:p>
+            <a:fld id="{32177519-FDB5-46C8-A273-662D2447F0A4}" type="slidenum">
+              <a:rPr lang="en-PH" smtClean="0"/>
+              <a:t>12</a:t>
+            </a:fld>
+            <a:endParaRPr lang="en-PH"/>
+          </a:p>
+        </p:txBody>
+      </p:sp>
+      <p:sp>
+        <p:nvSpPr>
+          <p:cNvPr id="5" name="Footer Placeholder 4">
+            <a:extLst>
+              <a:ext uri="{FF2B5EF4-FFF2-40B4-BE49-F238E27FC236}">
+                <a16:creationId xmlns:a16="http://schemas.microsoft.com/office/drawing/2014/main" id="{535997C4-EA05-DD95-B0C8-BB1F22813B04}"/>
+              </a:ext>
+            </a:extLst>
+          </p:cNvPr>
+          <p:cNvSpPr>
+            <a:spLocks noGrp="1"/>
+          </p:cNvSpPr>
+          <p:nvPr>
+            <p:ph type="ftr" sz="quarter" idx="3"/>
+          </p:nvPr>
+        </p:nvSpPr>
+        <p:spPr/>
+        <p:txBody>
+          <a:bodyPr/>
+          <a:lstStyle/>
+          <a:p>
+            <a:endParaRPr lang="en-PH" dirty="0"/>
+          </a:p>
+        </p:txBody>
+      </p:sp>
+      <p:sp>
+        <p:nvSpPr>
+          <p:cNvPr id="6" name="Date Placeholder 5">
+            <a:extLst>
+              <a:ext uri="{FF2B5EF4-FFF2-40B4-BE49-F238E27FC236}">
+                <a16:creationId xmlns:a16="http://schemas.microsoft.com/office/drawing/2014/main" id="{CAAD6A9A-EF93-AF51-DE80-E2857B95A1E5}"/>
+              </a:ext>
+            </a:extLst>
+          </p:cNvPr>
+          <p:cNvSpPr>
+            <a:spLocks noGrp="1"/>
+          </p:cNvSpPr>
+          <p:nvPr>
+            <p:ph type="dt" sz="half" idx="2"/>
+          </p:nvPr>
+        </p:nvSpPr>
+        <p:spPr/>
+        <p:txBody>
+          <a:bodyPr/>
+          <a:lstStyle/>
+          <a:p>
+            <a:r>
+              <a:rPr lang="en-US"/>
+              <a:t>2024.09.19</a:t>
+            </a:r>
+            <a:endParaRPr lang="en-PH" dirty="0"/>
+          </a:p>
+        </p:txBody>
+      </p:sp>
+    </p:spTree>
+    <p:extLst>
+      <p:ext uri="{BB962C8B-B14F-4D97-AF65-F5344CB8AC3E}">
+        <p14:creationId xmlns:p14="http://schemas.microsoft.com/office/powerpoint/2010/main" val="3935084230"/>
+      </p:ext>
+    </p:extLst>
+  </p:cSld>
+  <p:clrMapOvr>
+    <a:masterClrMapping/>
+  </p:clrMapOvr>
+  <mc:AlternateContent xmlns:mc="http://schemas.openxmlformats.org/markup-compatibility/2006" xmlns:p14="http://schemas.microsoft.com/office/powerpoint/2010/main">
+    <mc:Choice Requires="p14">
+      <p:transition p14:dur="200">
+        <p:fade/>
+      </p:transition>
+    </mc:Choice>
+    <mc:Fallback xmlns="">
+      <p:transition>
+        <p:fade/>
+      </p:transition>
+    </mc:Fallback>
+  </mc:AlternateContent>
+</p:sld>
+</file>
+
+<file path=ppt/slides/slide13.xml><?xml version="1.0" encoding="utf-8"?>
+<p:sld xmlns:a="http://schemas.openxmlformats.org/drawingml/2006/main" xmlns:r="http://schemas.openxmlformats.org/officeDocument/2006/relationships" xmlns:p="http://schemas.openxmlformats.org/presentationml/2006/main">
+  <p:cSld>
+    <p:spTree>
+      <p:nvGrpSpPr>
+        <p:cNvPr id="1" name=""/>
+        <p:cNvGrpSpPr/>
+        <p:nvPr/>
+      </p:nvGrpSpPr>
+      <p:grpSpPr>
+        <a:xfrm>
+          <a:off x="0" y="0"/>
+          <a:ext cx="0" cy="0"/>
+          <a:chOff x="0" y="0"/>
+          <a:chExt cx="0" cy="0"/>
+        </a:xfrm>
+      </p:grpSpPr>
+      <p:sp>
+        <p:nvSpPr>
+          <p:cNvPr id="2" name="Slide Number Placeholder 1">
+            <a:extLst>
+              <a:ext uri="{FF2B5EF4-FFF2-40B4-BE49-F238E27FC236}">
+                <a16:creationId xmlns:a16="http://schemas.microsoft.com/office/drawing/2014/main" id="{E5C96A32-5CB6-7D4F-A24C-1D615F71ED4D}"/>
+              </a:ext>
+            </a:extLst>
+          </p:cNvPr>
+          <p:cNvSpPr>
+            <a:spLocks noGrp="1"/>
+          </p:cNvSpPr>
+          <p:nvPr>
+            <p:ph type="sldNum" sz="quarter" idx="12"/>
+          </p:nvPr>
+        </p:nvSpPr>
+        <p:spPr/>
+        <p:txBody>
+          <a:bodyPr/>
+          <a:lstStyle/>
+          <a:p>
+            <a:fld id="{32177519-FDB5-46C8-A273-662D2447F0A4}" type="slidenum">
+              <a:rPr lang="en-PH" smtClean="0"/>
+              <a:t>13</a:t>
+            </a:fld>
+            <a:endParaRPr lang="en-PH"/>
+          </a:p>
+        </p:txBody>
+      </p:sp>
+      <p:sp>
+        <p:nvSpPr>
+          <p:cNvPr id="3" name="Footer Placeholder 2">
+            <a:extLst>
+              <a:ext uri="{FF2B5EF4-FFF2-40B4-BE49-F238E27FC236}">
+                <a16:creationId xmlns:a16="http://schemas.microsoft.com/office/drawing/2014/main" id="{44832668-14F9-74D1-9965-7D19D1B9B717}"/>
+              </a:ext>
+            </a:extLst>
+          </p:cNvPr>
+          <p:cNvSpPr>
+            <a:spLocks noGrp="1"/>
+          </p:cNvSpPr>
+          <p:nvPr>
+            <p:ph type="ftr" sz="quarter" idx="3"/>
+          </p:nvPr>
+        </p:nvSpPr>
+        <p:spPr/>
+        <p:txBody>
+          <a:bodyPr/>
+          <a:lstStyle/>
+          <a:p>
+            <a:endParaRPr lang="en-PH" dirty="0"/>
+          </a:p>
+        </p:txBody>
+      </p:sp>
+      <p:sp>
+        <p:nvSpPr>
+          <p:cNvPr id="4" name="Date Placeholder 3">
+            <a:extLst>
+              <a:ext uri="{FF2B5EF4-FFF2-40B4-BE49-F238E27FC236}">
+                <a16:creationId xmlns:a16="http://schemas.microsoft.com/office/drawing/2014/main" id="{553F2431-382C-D32C-866C-8AEF75F69B70}"/>
+              </a:ext>
+            </a:extLst>
+          </p:cNvPr>
+          <p:cNvSpPr>
+            <a:spLocks noGrp="1"/>
+          </p:cNvSpPr>
+          <p:nvPr>
+            <p:ph type="dt" sz="half" idx="2"/>
+          </p:nvPr>
+        </p:nvSpPr>
+        <p:spPr/>
+        <p:txBody>
+          <a:bodyPr/>
+          <a:lstStyle/>
+          <a:p>
+            <a:r>
+              <a:rPr lang="en-US"/>
+              <a:t>2024.09.19</a:t>
+            </a:r>
+            <a:endParaRPr lang="en-PH" dirty="0"/>
+          </a:p>
+        </p:txBody>
+      </p:sp>
+      <p:pic>
+        <p:nvPicPr>
+          <p:cNvPr id="14" name="Picture 13">
+            <a:extLst>
+              <a:ext uri="{FF2B5EF4-FFF2-40B4-BE49-F238E27FC236}">
+                <a16:creationId xmlns:a16="http://schemas.microsoft.com/office/drawing/2014/main" id="{72FB3AA3-0EC6-1861-874B-DBED4E92CB30}"/>
+              </a:ext>
+            </a:extLst>
+          </p:cNvPr>
+          <p:cNvPicPr>
+            <a:picLocks noChangeAspect="1"/>
+          </p:cNvPicPr>
+          <p:nvPr/>
+        </p:nvPicPr>
+        <p:blipFill>
+          <a:blip r:embed="rId2"/>
+          <a:stretch>
+            <a:fillRect/>
+          </a:stretch>
+        </p:blipFill>
+        <p:spPr>
+          <a:xfrm>
+            <a:off x="268898" y="1449000"/>
+            <a:ext cx="5614061" cy="3960000"/>
+          </a:xfrm>
+          <a:prstGeom prst="rect">
+            <a:avLst/>
+          </a:prstGeom>
+        </p:spPr>
+      </p:pic>
+      <p:pic>
+        <p:nvPicPr>
+          <p:cNvPr id="16" name="Picture 15">
+            <a:extLst>
+              <a:ext uri="{FF2B5EF4-FFF2-40B4-BE49-F238E27FC236}">
+                <a16:creationId xmlns:a16="http://schemas.microsoft.com/office/drawing/2014/main" id="{5DD7DD54-BCEC-2D61-7BD1-ABA0C9FF5B76}"/>
+              </a:ext>
+            </a:extLst>
+          </p:cNvPr>
+          <p:cNvPicPr>
+            <a:picLocks noChangeAspect="1"/>
+          </p:cNvPicPr>
+          <p:nvPr/>
+        </p:nvPicPr>
+        <p:blipFill>
+          <a:blip r:embed="rId3"/>
+          <a:stretch>
+            <a:fillRect/>
+          </a:stretch>
+        </p:blipFill>
+        <p:spPr>
+          <a:xfrm>
+            <a:off x="5922245" y="1449000"/>
+            <a:ext cx="5637033" cy="3960000"/>
+          </a:xfrm>
+          <a:prstGeom prst="rect">
+            <a:avLst/>
+          </a:prstGeom>
+        </p:spPr>
+      </p:pic>
+    </p:spTree>
+    <p:extLst>
+      <p:ext uri="{BB962C8B-B14F-4D97-AF65-F5344CB8AC3E}">
+        <p14:creationId xmlns:p14="http://schemas.microsoft.com/office/powerpoint/2010/main" val="631496217"/>
       </p:ext>
     </p:extLst>
   </p:cSld>

--- a/documents/202425s2-RM-Slides-Sy.pptx
+++ b/documents/202425s2-RM-Slides-Sy.pptx
@@ -5,7 +5,7 @@
     <p:sldMasterId id="2147483657" r:id="rId1"/>
   </p:sldMasterIdLst>
   <p:notesMasterIdLst>
-    <p:notesMasterId r:id="rId15"/>
+    <p:notesMasterId r:id="rId18"/>
   </p:notesMasterIdLst>
   <p:sldIdLst>
     <p:sldId id="256" r:id="rId2"/>
@@ -21,6 +21,9 @@
     <p:sldId id="307" r:id="rId12"/>
     <p:sldId id="308" r:id="rId13"/>
     <p:sldId id="309" r:id="rId14"/>
+    <p:sldId id="312" r:id="rId15"/>
+    <p:sldId id="310" r:id="rId16"/>
+    <p:sldId id="311" r:id="rId17"/>
   </p:sldIdLst>
   <p:sldSz cx="12192000" cy="6858000"/>
   <p:notesSz cx="6858000" cy="9144000"/>
@@ -6092,6 +6095,653 @@
 </dgm:styleDef>
 </file>
 
+<file path=ppt/ink/ink1.xml><?xml version="1.0" encoding="utf-8"?>
+<inkml:ink xmlns:inkml="http://www.w3.org/2003/InkML">
+  <inkml:definitions>
+    <inkml:context xml:id="ctx0">
+      <inkml:inkSource xml:id="inkSrc0">
+        <inkml:traceFormat>
+          <inkml:channel name="X" type="integer" min="-2.14748E9" max="2.14748E9" units="cm"/>
+          <inkml:channel name="Y" type="integer" min="-2.14748E9" max="2.14748E9" units="cm"/>
+          <inkml:channel name="F" type="integer" max="32767" units="dev"/>
+          <inkml:channel name="OA" type="integer" max="360" units="deg"/>
+          <inkml:channel name="OE" type="integer" max="90" units="deg"/>
+        </inkml:traceFormat>
+        <inkml:channelProperties>
+          <inkml:channelProperty channel="X" name="resolution" value="1000" units="1/cm"/>
+          <inkml:channelProperty channel="Y" name="resolution" value="1000" units="1/cm"/>
+          <inkml:channelProperty channel="F" name="resolution" value="0" units="1/dev"/>
+          <inkml:channelProperty channel="OA" name="resolution" value="1000" units="1/deg"/>
+          <inkml:channelProperty channel="OE" name="resolution" value="1000" units="1/deg"/>
+        </inkml:channelProperties>
+      </inkml:inkSource>
+      <inkml:timestamp xml:id="ts0" timeString="2025-04-03T08:33:36.460"/>
+    </inkml:context>
+    <inkml:brush xml:id="br0">
+      <inkml:brushProperty name="width" value="0.2" units="cm"/>
+      <inkml:brushProperty name="height" value="0.2" units="cm"/>
+    </inkml:brush>
+  </inkml:definitions>
+  <inkml:trace contextRef="#ctx0" brushRef="#br0">246 115 96 0 0,'-2'-7'0'0'0,"2"5"0"0"0,-1 0 0 0 0,1-1 0 0 0,-1 1 0 0 0,1 0 0 0 0,-1 0 0 0 0,0 0 0 0 0,0 0 0 0 0,0 1 0 0 0,0-1 0 0 0,0 0 0 0 0,0 0 0 0 0,-1 0 0 0 0,1 1 0 0 0,-3-3 0 0 0,-25-21 0 0 0,7 8 0 0 0,19 13 0 0 0,-1 1 0 0 0,0-1 0 0 0,0 1 0 0 0,0 0 0 0 0,0 1 0 0 0,-1-1 0 0 0,1 1 0 0 0,-6-3 0 0 0,7 4 0 0 0,0 0 0 0 0,0 0 0 0 0,1 0 0 0 0,-1 1 0 0 0,0-1 0 0 0,0 1 0 0 0,0-1 0 0 0,0 1 0 0 0,0 0 0 0 0,0 0 0 0 0,0 0 0 0 0,0 1 0 0 0,0-1 0 0 0,0 1 0 0 0,0 0 0 0 0,0-1 0 0 0,-4 3 0 0 0,3-1 0 0 0,0 0 0 0 0,0 1 0 0 0,1 0 0 0 0,-1-1 0 0 0,1 1 0 0 0,-1 0 0 0 0,1 0 0 0 0,0 1 0 0 0,0-1 0 0 0,1 1 0 0 0,-1 0 0 0 0,-2 5 0 0 0,0-1 0 0 0,1 0 0 0 0,1 0 0 0 0,-1 1 0 0 0,2 0 0 0 0,-1-1 0 0 0,-1 12 0 0 0,-3 55 0 0 0,6-64 0 0 0,1 12 0 0 0,1 0 0 0 0,5 29 0 0 0,-1-2 0 0 0,2 50 0 0 0,21 172 0 0 0,-17-191 0 0 0,4 21 0 0 0,7 33 5 0 0,-18-105-3 0 0,-3-3 3 0 0,1-3 0 0 0,-1-17 1 0 0,-3-1-5 0 0</inkml:trace>
+</inkml:ink>
+</file>
+
+<file path=ppt/ink/ink10.xml><?xml version="1.0" encoding="utf-8"?>
+<inkml:ink xmlns:inkml="http://www.w3.org/2003/InkML">
+  <inkml:definitions>
+    <inkml:context xml:id="ctx0">
+      <inkml:inkSource xml:id="inkSrc0">
+        <inkml:traceFormat>
+          <inkml:channel name="X" type="integer" min="-2.14748E9" max="2.14748E9" units="cm"/>
+          <inkml:channel name="Y" type="integer" min="-2.14748E9" max="2.14748E9" units="cm"/>
+          <inkml:channel name="F" type="integer" max="32767" units="dev"/>
+          <inkml:channel name="OA" type="integer" max="360" units="deg"/>
+          <inkml:channel name="OE" type="integer" max="90" units="deg"/>
+        </inkml:traceFormat>
+        <inkml:channelProperties>
+          <inkml:channelProperty channel="X" name="resolution" value="1000" units="1/cm"/>
+          <inkml:channelProperty channel="Y" name="resolution" value="1000" units="1/cm"/>
+          <inkml:channelProperty channel="F" name="resolution" value="0" units="1/dev"/>
+          <inkml:channelProperty channel="OA" name="resolution" value="1000" units="1/deg"/>
+          <inkml:channelProperty channel="OE" name="resolution" value="1000" units="1/deg"/>
+        </inkml:channelProperties>
+      </inkml:inkSource>
+      <inkml:timestamp xml:id="ts0" timeString="2025-04-03T08:33:41.748"/>
+    </inkml:context>
+    <inkml:brush xml:id="br0">
+      <inkml:brushProperty name="width" value="0.2" units="cm"/>
+      <inkml:brushProperty name="height" value="0.2" units="cm"/>
+    </inkml:brush>
+  </inkml:definitions>
+  <inkml:trace contextRef="#ctx0" brushRef="#br0">101 84 96 0 0,'0'0'23'0'0,"-5"5"-11"0"0,-16 18 6 0 0,19-21-16 0 0,0 1 0 0 0,0-1 0 0 0,1 0 0 0 0,-1 1 0 0 0,1-1 0 0 0,0 1 0 0 0,-1 0 0 0 0,0 4 0 0 0,-4 7 8 0 0,-6 14 26 0 0,-9 17 55 0 0,19-40-77 0 0,0 1-1 0 0,-1-1 1 0 0,2 1 0 0 0,-1-1 0 0 0,1 1-1 0 0,-2 9 1 0 0,-1-5 23 0 0,4-10-35 0 0,0 0 0 0 0,0 0-1 0 0,-1 1 1 0 0,1-1 0 0 0,0 0-1 0 0,0 0 1 0 0,0 0 0 0 0,0 0 0 0 0,0 1-1 0 0,-1-1 1 0 0,1 0 0 0 0,0 0-1 0 0,0 0 1 0 0,0 1 0 0 0,0-1-1 0 0,0 0 1 0 0,0 0 0 0 0,0 1-1 0 0,0-1 1 0 0,0 0 0 0 0,0 0 0 0 0,0 0-1 0 0,0 1 1 0 0,0-1 0 0 0,0 0-1 0 0,0 0 1 0 0,0 1 0 0 0,0-1-1 0 0,0 0 1 0 0,0 0 0 0 0,0 0 0 0 0,0 1-1 0 0,0-1 1 0 0,0 0 0 0 0,0 0-1 0 0,1 1 1 0 0,-1-1 0 0 0,0 0-1 0 0,0 0 1 0 0,0 0 0 0 0,0 0-1 0 0,1 1 1 0 0,-1-1 0 0 0,0 0 0 0 0,0 0-1 0 0,0 0 1 0 0,0 0 0 0 0,1 0-1 0 0,-1 0 1 0 0,0 0 0 0 0,0 1-1 0 0,1-1 1 0 0,-1 0 0 0 0,0 0-1 0 0,0 0 1 0 0,0 0 0 0 0,1 0 0 0 0,-1 0-1 0 0,0 0 1 0 0,0 0 0 0 0,1 0-1 0 0,-1 0 1 0 0,3 2 48 0 0,-3-1 38 0 0,3-5-47 0 0,17-18-2 0 0,-11 12-26 0 0,-1 0 0 0 0,14-20 0 0 0,22-40 42 0 0,-15 12 17 0 0,-26 54-63 0 0,-1-1 0 0 0,0 0 0 0 0,0 0 0 0 0,1-5 0 0 0,-2 7-3 0 0,-1 0 0 0 0,1 0 0 0 0,0 0 0 0 0,0 0 0 0 0,1 0 0 0 0,-1 0 0 0 0,0 0 1 0 0,1 1-1 0 0,0-1 0 0 0,0 0 0 0 0,0 1 0 0 0,0 0 0 0 0,0-1 0 0 0,4-2 0 0 0,-4 3 8 0 0,0 0-1 0 0,0 0 1 0 0,0 0-1 0 0,-1 0 1 0 0,3-4-1 0 0,-2 3 17 0 0,-2 5-5 0 0,0 0 1 0 0,0 1-1 0 0,1-1 1 0 0,-1 0 0 0 0,1 1-1 0 0,0-1 1 0 0,-1 0-1 0 0,1 0 1 0 0,2 5-1 0 0,0 0 2 0 0,0 3-15 0 0,0 0-1 0 0,-1 0 0 0 0,0 1 1 0 0,-1-1-1 0 0,0 1 0 0 0,-1 10 1 0 0,0 3 20 0 0,2 176 280 0 0,-1-139-69 0 0,8 61 0 0 0,-6-97-185 0 0,-2-8 33 0 0,1 0 0 0 0,1-1-1 0 0,1 1 1 0 0,6 21 0 0 0,-8-32-55 0 0,0 0 1 0 0,1 12-1 0 0,-2-12 29 0 0,0-1-1 0 0,0 0 1 0 0,4 11 0 0 0,-5-15-52 0 0,0 0 1 0 0,1 0-1 0 0,-1 0 1 0 0,0-1 0 0 0,0 1-1 0 0,0 0 1 0 0,0 0-1 0 0,0 0 1 0 0,0 0 0 0 0,0 0-1 0 0,0 0 1 0 0,0 0-1 0 0,-1 0 1 0 0,1 1 0 0 0,0-1-8 0 0,-1-1 1 0 0,1 1-1 0 0,0 0 1 0 0,0 0 0 0 0,0 0-1 0 0,0 0 1 0 0,0-1-1 0 0,0 1 1 0 0,0 0 0 0 0,0 0-1 0 0,0 0 1 0 0,0-1-1 0 0,0 1 1 0 0,0 0 0 0 0,1 0-1 0 0,-1 0 1 0 0,0-1-1 0 0,1 2 1 0 0,0-1 20 0 0,-1 0 0 0 0,1 0 1 0 0,-1 0-1 0 0,1 0 0 0 0,-1 0 1 0 0,1 0-1 0 0,-1 0 0 0 0,1 0 0 0 0,-1 0 1 0 0,0 0-1 0 0,0 0 0 0 0,0 0 1 0 0,1 0-1 0 0,-1 2 88 0 0,0 0 12 0 0,0 0-63 0 0</inkml:trace>
+</inkml:ink>
+</file>
+
+<file path=ppt/ink/ink11.xml><?xml version="1.0" encoding="utf-8"?>
+<inkml:ink xmlns:inkml="http://www.w3.org/2003/InkML">
+  <inkml:definitions>
+    <inkml:context xml:id="ctx0">
+      <inkml:inkSource xml:id="inkSrc0">
+        <inkml:traceFormat>
+          <inkml:channel name="X" type="integer" min="-2.14748E9" max="2.14748E9" units="cm"/>
+          <inkml:channel name="Y" type="integer" min="-2.14748E9" max="2.14748E9" units="cm"/>
+          <inkml:channel name="F" type="integer" max="32767" units="dev"/>
+          <inkml:channel name="OA" type="integer" max="360" units="deg"/>
+          <inkml:channel name="OE" type="integer" max="90" units="deg"/>
+        </inkml:traceFormat>
+        <inkml:channelProperties>
+          <inkml:channelProperty channel="X" name="resolution" value="1000" units="1/cm"/>
+          <inkml:channelProperty channel="Y" name="resolution" value="1000" units="1/cm"/>
+          <inkml:channelProperty channel="F" name="resolution" value="0" units="1/dev"/>
+          <inkml:channelProperty channel="OA" name="resolution" value="1000" units="1/deg"/>
+          <inkml:channelProperty channel="OE" name="resolution" value="1000" units="1/deg"/>
+        </inkml:channelProperties>
+      </inkml:inkSource>
+      <inkml:timestamp xml:id="ts0" timeString="2025-04-03T08:33:41.993"/>
+    </inkml:context>
+    <inkml:brush xml:id="br0">
+      <inkml:brushProperty name="width" value="0.2" units="cm"/>
+      <inkml:brushProperty name="height" value="0.2" units="cm"/>
+    </inkml:brush>
+  </inkml:definitions>
+  <inkml:trace contextRef="#ctx0" brushRef="#br0">1 76 3712 0 0,'27'-3'121'0'0,"12"-7"-36"0"0,-8 1-50 0 0,-20 6-12 0 0,0 0-1 0 0,0-1 1 0 0,14-7-1 0 0,-13 5 46 0 0,-1 1 1 0 0,18-5-1 0 0,-11 6 51 0 0,0 1 1 0 0,27-1 0 0 0,-41 4-89 0 0,0 0 0 0 0,0 0 0 0 0,-1 0 1 0 0,8 2-1 0 0,11 1 249 0 0,-14-3-51 0 0,-7 0-165 0 0</inkml:trace>
+</inkml:ink>
+</file>
+
+<file path=ppt/ink/ink12.xml><?xml version="1.0" encoding="utf-8"?>
+<inkml:ink xmlns:inkml="http://www.w3.org/2003/InkML">
+  <inkml:definitions>
+    <inkml:context xml:id="ctx0">
+      <inkml:inkSource xml:id="inkSrc0">
+        <inkml:traceFormat>
+          <inkml:channel name="X" type="integer" min="-2.14748E9" max="2.14748E9" units="cm"/>
+          <inkml:channel name="Y" type="integer" min="-2.14748E9" max="2.14748E9" units="cm"/>
+          <inkml:channel name="F" type="integer" max="32767" units="dev"/>
+          <inkml:channel name="OA" type="integer" max="360" units="deg"/>
+          <inkml:channel name="OE" type="integer" max="90" units="deg"/>
+        </inkml:traceFormat>
+        <inkml:channelProperties>
+          <inkml:channelProperty channel="X" name="resolution" value="1000" units="1/cm"/>
+          <inkml:channelProperty channel="Y" name="resolution" value="1000" units="1/cm"/>
+          <inkml:channelProperty channel="F" name="resolution" value="0" units="1/dev"/>
+          <inkml:channelProperty channel="OA" name="resolution" value="1000" units="1/deg"/>
+          <inkml:channelProperty channel="OE" name="resolution" value="1000" units="1/deg"/>
+        </inkml:channelProperties>
+      </inkml:inkSource>
+      <inkml:timestamp xml:id="ts0" timeString="2025-04-03T08:33:43.098"/>
+    </inkml:context>
+    <inkml:brush xml:id="br0">
+      <inkml:brushProperty name="width" value="0.2" units="cm"/>
+      <inkml:brushProperty name="height" value="0.2" units="cm"/>
+    </inkml:brush>
+  </inkml:definitions>
+  <inkml:trace contextRef="#ctx0" brushRef="#br0">0 61 96 0 0,'223'-43'0'0'0,"-193"35"0"0"0,5-1 0 0 0,-32 9 0 0 0,-1 0 0 0 0,1-1 0 0 0,0 1 0 0 0,0 0 0 0 0,-1 0 0 0 0,1 0 0 0 0,0 1 0 0 0,0-1 0 0 0,4 2 0 0 0,0-2 0 0 0,7 1 0 0 0,-12 2 0 0 0,-6 1 0 0 0,-6-1 0 0 0,3 1 0 0 0,3-2 0 0 0,1 0 0 0 0,-1 0 0 0 0,1 0 0 0 0,0 0 0 0 0,0 1 0 0 0,-5 3 0 0 0,7-3 0 0 0,-1 0 0 0 0,1-1 0 0 0,0 1 0 0 0,0 0 0 0 0,0 0 0 0 0,0 0 0 0 0,1 0 0 0 0,-1 0 0 0 0,1 4 0 0 0,-1 28 0 0 0,2-17 0 0 0,0-6 0 0 0,0 0 0 0 0,0 1 0 0 0,2-1 0 0 0,3 12 0 0 0,-2-9 0 0 0,3 31 0 0 0,-6-39 0 0 0,6 57 0 0 0,-5-52 0 0 0,0-1 0 0 0,1 1 0 0 0,6 15 0 0 0,1 6 0 0 0,-9-26 0 0 0,1 0 0 0 0,0-1 0 0 0,5 11 0 0 0,-4-11 0 0 0,-1-1 0 0 0,4 12 0 0 0,-5-12 0 0 0,0-1 0 0 0,1 1 0 0 0,0-1 0 0 0,0 1 0 0 0,3 3 0 0 0,-3 0 0 0 0,-2-8 0 0 0,0 0 0 0 0,0 1 0 0 0,0-1 0 0 0,0 0 0 0 0,0 1 0 0 0,0-1 0 0 0,0 0 0 0 0,0 1 0 0 0,0-1 0 0 0,0 0 0 0 0,0 1 0 0 0,1-1 0 0 0,-1 0 0 0 0,0 1 0 0 0,0-1 0 0 0,0 0 0 0 0,0 0 0 0 0,1 1 0 0 0,-1-1 0 0 0,0 0 0 0 0,0 0 0 0 0,1 1 0 0 0,-1-1 0 0 0,0 0 0 0 0,1 0 0 0 0,-1 0 0 0 0,0 1 0 0 0,0-1 0 0 0,1 0 0 0 0,-1 0 0 0 0,0 0 0 0 0,1 0 0 0 0,0 0 0 0 0,-1 0 0 0 0,0 0 0 0 0,0 0 0 0 0,0 0 0 0 0,0 0 0 0 0,1 0 0 0 0,-1 1 0 0 0,0-1 0 0 0,0 0 0 0 0,0 0 0 0 0,0 0 0 0 0,1 0 0 0 0,-1 0 0 0 0,0 0 0 0 0,0 0 0 0 0,0 0 0 0 0,0 0 0 0 0,0 1 0 0 0,0-1 0 0 0,1 0 0 0 0,-1 0 0 0 0,0 0 0 0 0,0 0 0 0 0,0 0 0 0 0,0 1 0 0 0,0-1 0 0 0,0 0 0 0 0,0 0 0 0 0,0 0 0 0 0,0 0 0 0 0,0 1 0 0 0,0-1 0 0 0,0 0 0 0 0,0 0 0 0 0,0 0 0 0 0,0 0 0 0 0,0 1 0 0 0,0-1 0 0 0,0 0 0 0 0,0 0 0 0 0,0 0 0 0 0,0 1 0 0 0,0 1 0 0 0,0 1 0 0 0</inkml:trace>
+</inkml:ink>
+</file>
+
+<file path=ppt/ink/ink13.xml><?xml version="1.0" encoding="utf-8"?>
+<inkml:ink xmlns:inkml="http://www.w3.org/2003/InkML">
+  <inkml:definitions>
+    <inkml:context xml:id="ctx0">
+      <inkml:inkSource xml:id="inkSrc0">
+        <inkml:traceFormat>
+          <inkml:channel name="X" type="integer" min="-2.14748E9" max="2.14748E9" units="cm"/>
+          <inkml:channel name="Y" type="integer" min="-2.14748E9" max="2.14748E9" units="cm"/>
+          <inkml:channel name="F" type="integer" max="32767" units="dev"/>
+          <inkml:channel name="OA" type="integer" max="360" units="deg"/>
+          <inkml:channel name="OE" type="integer" max="90" units="deg"/>
+        </inkml:traceFormat>
+        <inkml:channelProperties>
+          <inkml:channelProperty channel="X" name="resolution" value="1000" units="1/cm"/>
+          <inkml:channelProperty channel="Y" name="resolution" value="1000" units="1/cm"/>
+          <inkml:channelProperty channel="F" name="resolution" value="0" units="1/dev"/>
+          <inkml:channelProperty channel="OA" name="resolution" value="1000" units="1/deg"/>
+          <inkml:channelProperty channel="OE" name="resolution" value="1000" units="1/deg"/>
+        </inkml:channelProperties>
+      </inkml:inkSource>
+      <inkml:timestamp xml:id="ts0" timeString="2025-04-03T08:33:43.683"/>
+    </inkml:context>
+    <inkml:brush xml:id="br0">
+      <inkml:brushProperty name="width" value="0.2" units="cm"/>
+      <inkml:brushProperty name="height" value="0.2" units="cm"/>
+    </inkml:brush>
+  </inkml:definitions>
+  <inkml:trace contextRef="#ctx0" brushRef="#br0">0 50 96 0 0,'0'0'25'0'0,"5"0"5"0"0,64-14 74 0 0,54-7 284 0 0,-91 14-257 0 0,-26 5-27 0 0,0 0 0 0 0,1 1 0 0 0,-1 0 1 0 0,11-1-1 0 0,-19 3-93 0 0,1 0-1 0 0,0 0 1 0 0,0 0 0 0 0,0 0 0 0 0,0 1 0 0 0,0-1 0 0 0,0 0 0 0 0,0 0 0 0 0,0 0 0 0 0,-1 3 0 0 0,0-1-2 0 0,0-1 1 0 0,0 1-1 0 0,0-1 1 0 0,0 1 0 0 0,0-1-1 0 0,-5 3 1 0 0,5-4-7 0 0,0 1 1 0 0,1-1 0 0 0,-1 0 0 0 0,1 1 0 0 0,-1-1-1 0 0,1 1 1 0 0,-1-1 0 0 0,1 1 0 0 0,0 0-1 0 0,0-1 1 0 0,0 1 0 0 0,0 0 0 0 0,0 0-1 0 0,0 0 1 0 0,0 0 0 0 0,1 0 0 0 0,-1 0 0 0 0,0 3-1 0 0,0 2 1 0 0,1 1 1 0 0,0-1-1 0 0,0 0 0 0 0,0 1 0 0 0,1-1 0 0 0,0 0 0 0 0,1 1 0 0 0,-1-1 0 0 0,1 0 0 0 0,6 13 1 0 0,-4-12-4 0 0,0 1 0 0 0,-1-1 0 0 0,0 1 0 0 0,-1 0 0 0 0,0 1 0 0 0,2 12 1 0 0,5 29 1 0 0,-4-23 8 0 0,8 30-1 0 0,-8-38-5 0 0,-4-17-5 0 0,0 0 1 0 0,0 0 0 0 0,0 0 0 0 0,0 1-1 0 0,0 3 1 0 0,-1-5-1 0 0</inkml:trace>
+</inkml:ink>
+</file>
+
+<file path=ppt/ink/ink14.xml><?xml version="1.0" encoding="utf-8"?>
+<inkml:ink xmlns:inkml="http://www.w3.org/2003/InkML">
+  <inkml:definitions>
+    <inkml:context xml:id="ctx0">
+      <inkml:inkSource xml:id="inkSrc0">
+        <inkml:traceFormat>
+          <inkml:channel name="X" type="integer" min="-2.14748E9" max="2.14748E9" units="cm"/>
+          <inkml:channel name="Y" type="integer" min="-2.14748E9" max="2.14748E9" units="cm"/>
+          <inkml:channel name="F" type="integer" max="32767" units="dev"/>
+          <inkml:channel name="OA" type="integer" max="360" units="deg"/>
+          <inkml:channel name="OE" type="integer" max="90" units="deg"/>
+        </inkml:traceFormat>
+        <inkml:channelProperties>
+          <inkml:channelProperty channel="X" name="resolution" value="1000" units="1/cm"/>
+          <inkml:channelProperty channel="Y" name="resolution" value="1000" units="1/cm"/>
+          <inkml:channelProperty channel="F" name="resolution" value="0" units="1/dev"/>
+          <inkml:channelProperty channel="OA" name="resolution" value="1000" units="1/deg"/>
+          <inkml:channelProperty channel="OE" name="resolution" value="1000" units="1/deg"/>
+        </inkml:channelProperties>
+      </inkml:inkSource>
+      <inkml:timestamp xml:id="ts0" timeString="2025-04-03T08:33:43.931"/>
+    </inkml:context>
+    <inkml:brush xml:id="br0">
+      <inkml:brushProperty name="width" value="0.2" units="cm"/>
+      <inkml:brushProperty name="height" value="0.2" units="cm"/>
+    </inkml:brush>
+  </inkml:definitions>
+  <inkml:trace contextRef="#ctx0" brushRef="#br0">1 32 1704 0 0,'48'1'25'0'0,"-17"0"23"0"0,-1-1-1 0 0,53-8 1 0 0,-68 6-32 0 0,-7 1 6 0 0,-1-1 0 0 0,11-3 1 0 0,-15 4-7 0 0,1 0 1 0 0,-1 0 0 0 0,0 0 0 0 0,0 1-1 0 0,0-1 1 0 0,1 1 0 0 0,-1 0 0 0 0,5 0-1 0 0,-7 0-11 0 0,0 0-1 0 0,0-1 1 0 0,0 1-1 0 0,0 0 1 0 0,0 0 0 0 0,0-1-1 0 0,0 1 1 0 0,0 0-1 0 0,0-1 1 0 0,0 1-1 0 0,-1-1 1 0 0,1 1 0 0 0,1-2-1 0 0,5-2 12 0 0,-1 4 7 0 0</inkml:trace>
+</inkml:ink>
+</file>
+
+<file path=ppt/ink/ink15.xml><?xml version="1.0" encoding="utf-8"?>
+<inkml:ink xmlns:inkml="http://www.w3.org/2003/InkML">
+  <inkml:definitions>
+    <inkml:context xml:id="ctx0">
+      <inkml:inkSource xml:id="inkSrc0">
+        <inkml:traceFormat>
+          <inkml:channel name="X" type="integer" min="-2.14748E9" max="2.14748E9" units="cm"/>
+          <inkml:channel name="Y" type="integer" min="-2.14748E9" max="2.14748E9" units="cm"/>
+          <inkml:channel name="F" type="integer" max="32767" units="dev"/>
+          <inkml:channel name="OA" type="integer" max="360" units="deg"/>
+          <inkml:channel name="OE" type="integer" max="90" units="deg"/>
+        </inkml:traceFormat>
+        <inkml:channelProperties>
+          <inkml:channelProperty channel="X" name="resolution" value="1000" units="1/cm"/>
+          <inkml:channelProperty channel="Y" name="resolution" value="1000" units="1/cm"/>
+          <inkml:channelProperty channel="F" name="resolution" value="0" units="1/dev"/>
+          <inkml:channelProperty channel="OA" name="resolution" value="1000" units="1/deg"/>
+          <inkml:channelProperty channel="OE" name="resolution" value="1000" units="1/deg"/>
+        </inkml:channelProperties>
+      </inkml:inkSource>
+      <inkml:timestamp xml:id="ts0" timeString="2025-04-03T08:33:44.256"/>
+    </inkml:context>
+    <inkml:brush xml:id="br0">
+      <inkml:brushProperty name="width" value="0.2" units="cm"/>
+      <inkml:brushProperty name="height" value="0.2" units="cm"/>
+    </inkml:brush>
+  </inkml:definitions>
+  <inkml:trace contextRef="#ctx0" brushRef="#br0">1 1 2104 0 0,'0'0'496'0'0</inkml:trace>
+</inkml:ink>
+</file>
+
+<file path=ppt/ink/ink16.xml><?xml version="1.0" encoding="utf-8"?>
+<inkml:ink xmlns:inkml="http://www.w3.org/2003/InkML">
+  <inkml:definitions>
+    <inkml:context xml:id="ctx0">
+      <inkml:inkSource xml:id="inkSrc0">
+        <inkml:traceFormat>
+          <inkml:channel name="X" type="integer" min="-2.14748E9" max="2.14748E9" units="cm"/>
+          <inkml:channel name="Y" type="integer" min="-2.14748E9" max="2.14748E9" units="cm"/>
+          <inkml:channel name="F" type="integer" max="32767" units="dev"/>
+          <inkml:channel name="OA" type="integer" max="360" units="deg"/>
+          <inkml:channel name="OE" type="integer" max="90" units="deg"/>
+        </inkml:traceFormat>
+        <inkml:channelProperties>
+          <inkml:channelProperty channel="X" name="resolution" value="1000" units="1/cm"/>
+          <inkml:channelProperty channel="Y" name="resolution" value="1000" units="1/cm"/>
+          <inkml:channelProperty channel="F" name="resolution" value="0" units="1/dev"/>
+          <inkml:channelProperty channel="OA" name="resolution" value="1000" units="1/deg"/>
+          <inkml:channelProperty channel="OE" name="resolution" value="1000" units="1/deg"/>
+        </inkml:channelProperties>
+      </inkml:inkSource>
+      <inkml:timestamp xml:id="ts0" timeString="2025-04-03T08:33:44.471"/>
+    </inkml:context>
+    <inkml:brush xml:id="br0">
+      <inkml:brushProperty name="width" value="0.2" units="cm"/>
+      <inkml:brushProperty name="height" value="0.2" units="cm"/>
+    </inkml:brush>
+  </inkml:definitions>
+  <inkml:trace contextRef="#ctx0" brushRef="#br0">0 0 1600 0 0,'0'0'272'0'0,"10"25"-176"0"0,-8-20-40 0 0,1-2 8 0 0,0-1 0 0 0,1 3 0 0 0,1-5 96 0 0,-2 0 8 0 0,-2 0 8 0 0,2 0-8 0 0,0 0-80 0 0,-2 0 0 0 0,2 0 8 0 0</inkml:trace>
+</inkml:ink>
+</file>
+
+<file path=ppt/ink/ink17.xml><?xml version="1.0" encoding="utf-8"?>
+<inkml:ink xmlns:inkml="http://www.w3.org/2003/InkML">
+  <inkml:definitions>
+    <inkml:context xml:id="ctx0">
+      <inkml:inkSource xml:id="inkSrc0">
+        <inkml:traceFormat>
+          <inkml:channel name="X" type="integer" min="-2.14748E9" max="2.14748E9" units="cm"/>
+          <inkml:channel name="Y" type="integer" min="-2.14748E9" max="2.14748E9" units="cm"/>
+          <inkml:channel name="F" type="integer" max="32767" units="dev"/>
+          <inkml:channel name="OA" type="integer" max="360" units="deg"/>
+          <inkml:channel name="OE" type="integer" max="90" units="deg"/>
+        </inkml:traceFormat>
+        <inkml:channelProperties>
+          <inkml:channelProperty channel="X" name="resolution" value="1000" units="1/cm"/>
+          <inkml:channelProperty channel="Y" name="resolution" value="1000" units="1/cm"/>
+          <inkml:channelProperty channel="F" name="resolution" value="0" units="1/dev"/>
+          <inkml:channelProperty channel="OA" name="resolution" value="1000" units="1/deg"/>
+          <inkml:channelProperty channel="OE" name="resolution" value="1000" units="1/deg"/>
+        </inkml:channelProperties>
+      </inkml:inkSource>
+      <inkml:timestamp xml:id="ts0" timeString="2025-04-03T08:34:15.537"/>
+    </inkml:context>
+    <inkml:brush xml:id="br0">
+      <inkml:brushProperty name="width" value="0.2" units="cm"/>
+      <inkml:brushProperty name="height" value="0.2" units="cm"/>
+    </inkml:brush>
+  </inkml:definitions>
+  <inkml:trace contextRef="#ctx0" brushRef="#br0">341 278 96 0 0,'2'-3'0'0'0,"0"0"0"0"0,-1 0 0 0 0,1-1 0 0 0,-1 1 0 0 0,1 0 0 0 0,-1-1 0 0 0,0 1 0 0 0,0-1 0 0 0,-1 1 0 0 0,1-1 0 0 0,-1 1 0 0 0,1-5 0 0 0,-1 5 11 0 0,0-1 1 0 0,1 0-1 0 0,0 0 0 0 0,-1 1 0 0 0,3-5 1 0 0,-2 4 6 0 0,0 0 1 0 0,0 0 0 0 0,0-1 0 0 0,0-4-1 0 0,-1-8 106 0 0,-1 0 0 0 0,-1 0 0 0 0,-1 1-1 0 0,0-1 1 0 0,-6-16 0 0 0,8 29-51 0 0,0 1 0 0 0,0 0 0 0 0,0 0 1 0 0,-1 0-1 0 0,1-1 0 0 0,-1 2 0 0 0,0-1 0 0 0,0 0 0 0 0,0 0 0 0 0,0 1 1 0 0,0-1-1 0 0,-1 1 0 0 0,1-1 0 0 0,-1 1 0 0 0,1 0 0 0 0,-1 0 0 0 0,0 0 1 0 0,0 1-1 0 0,0-1 0 0 0,0 1 0 0 0,0-1 0 0 0,-1 1 0 0 0,1 0 1 0 0,0 0-1 0 0,0 0 0 0 0,-1 1 0 0 0,1-1 0 0 0,-4 1 0 0 0,1 0-72 0 0,1-1 0 0 0,0 2-1 0 0,-1-1 1 0 0,1 1 0 0 0,-1-1-1 0 0,1 1 1 0 0,0 1 0 0 0,0-1-1 0 0,-1 1 1 0 0,1 0 0 0 0,0 0-1 0 0,1 1 1 0 0,-7 3 0 0 0,-1 3 80 0 0,1 0 1 0 0,0 0-1 0 0,1 1 0 0 0,0 1 1 0 0,0 0-1 0 0,1 0 1 0 0,0 1-1 0 0,-11 21 1 0 0,10-13-4 0 0,2-4 42 0 0,-10 30 1 0 0,14-32 8 0 0,2-6 11 0 0,0 0 0 0 0,-1 0 0 0 0,-4 9 0 0 0,2-9-31 0 0,1 1 0 0 0,0 0 0 0 0,1 0 1 0 0,0 1-1 0 0,0-1 0 0 0,1 1 0 0 0,-2 17 0 0 0,-1 10 60 0 0,3-27-111 0 0,1 0 0 0 0,-1 1 0 0 0,2 12 0 0 0,7 49 268 0 0,-3-44-196 0 0,-2-13-48 0 0,2 0 0 0 0,0 0 0 0 0,0 0 0 0 0,13 25-1 0 0,-17-38-75 0 0,3 5 40 0 0,1-1-1 0 0,0 1 1 0 0,0 0 0 0 0,0-1-1 0 0,1 0 1 0 0,-1 0 0 0 0,2 0-1 0 0,9 9 1 0 0,-13-13-25 0 0,1 0 0 0 0,0 0 0 0 0,-1 0 1 0 0,1-1-1 0 0,0 1 0 0 0,0-1 0 0 0,0 1 0 0 0,0-1 0 0 0,0 0 0 0 0,0 0 1 0 0,0 0-1 0 0,0-1 0 0 0,0 1 0 0 0,1-1 0 0 0,-1 1 0 0 0,0-1 1 0 0,0 0-1 0 0,0 0 0 0 0,1-1 0 0 0,-1 1 0 0 0,0-1 0 0 0,0 0 1 0 0,6-1-1 0 0,-1-2 13 0 0,0 1 0 0 0,-1-1 0 0 0,1-1-1 0 0,-1 1 1 0 0,0-1 0 0 0,0 0 0 0 0,-1-1 0 0 0,10-10 0 0 0,-12 11-18 0 0,4-3 14 0 0,-1-1-1 0 0,0 0 1 0 0,0-1-1 0 0,-1 1 1 0 0,0-1-1 0 0,8-18 1 0 0,1-21 90 0 0,10-59 0 0 0,-20 55-35 0 0,-4 45-68 0 0,0 1 0 0 0,0-1 0 0 0,-2-7 0 0 0,2-10 19 0 0,-1 13-23 0 0,-1-1 0 0 0,-2-12 1 0 0,0-18 46 0 0,4 18 228 0 0,3 43-249 0 0,2 0-1 0 0,13 29 1 0 0,2 6 5 0 0,38 158 174 0 0,-17 3-52 0 0,-10 6 19 0 0,-26-176-125 0 0,16 146 144 0 0,-17-137-110 0 0,-2 74 0 0 0,-3-94-44 0 0,0-17-15 0 0,-1-1 0 0 0,0 0 1 0 0,-1 1-1 0 0,0-1 1 0 0,-1 0-1 0 0,-1 0 1 0 0,-1-1-1 0 0,-7 18 0 0 0,10-28-13 0 0,0-1 0 0 0,-1 1 0 0 0,1-1 0 0 0,-1 1 0 0 0,0-1 0 0 0,0 0 0 0 0,0 0 0 0 0,0-1 0 0 0,-1 1 0 0 0,-6 3 0 0 0,9-5-12 0 0,-1 0 1 0 0,1-1-1 0 0,-1 1 0 0 0,1-1 1 0 0,-1 0-1 0 0,0 0 1 0 0,1 1-1 0 0,-1-1 1 0 0,1 0-1 0 0,-1 0 1 0 0,0 0-1 0 0,1-1 0 0 0,-1 1 1 0 0,1 0-1 0 0,-1-1 1 0 0,-1 0-1 0 0,-3-1 19 0 0,0 0-1 0 0,0 0 0 0 0,-6-5 0 0 0,3 1-2 0 0,-1 0 0 0 0,1-1 0 0 0,1-1 0 0 0,0 0-1 0 0,0 0 1 0 0,0 0 0 0 0,1-1 0 0 0,0 0 0 0 0,1 0 0 0 0,0-1-1 0 0,-6-12 1 0 0,-2-8 22 0 0,1-1 1 0 0,-14-51-1 0 0,16 38 36 0 0,1 0 1 0 0,2 0-1 0 0,-3-83 0 0 0,11 112-58 0 0,1-1 0 0 0,0 0 0 0 0,1 1 0 0 0,1 0 0 0 0,1 0 0 0 0,0 0 0 0 0,9-22 0 0 0,2-1 45 0 0,12-25 69 0 0,-22 55-117 0 0,0-1 0 0 0,0 1 0 0 0,1-1 1 0 0,12-13-1 0 0,17-15 53 0 0,-15 15 9 0 0,42-36-1 0 0,-30 30-19 0 0,-26 21-51 0 0,1 1 0 0 0,0 0 1 0 0,0 1-1 0 0,0 0 0 0 0,1 0 0 0 0,-1 0 1 0 0,17-6-1 0 0,2 0 31 0 0,-18 7-14 0 0,-1 1-1 0 0,1 0 1 0 0,12-3 0 0 0,-1 1 64 0 0,-8 3 21 0 0,20-3 1 0 0,-23 5-57 0 0,-1 4-9 0 0</inkml:trace>
+</inkml:ink>
+</file>
+
+<file path=ppt/ink/ink18.xml><?xml version="1.0" encoding="utf-8"?>
+<inkml:ink xmlns:inkml="http://www.w3.org/2003/InkML">
+  <inkml:definitions>
+    <inkml:context xml:id="ctx0">
+      <inkml:inkSource xml:id="inkSrc0">
+        <inkml:traceFormat>
+          <inkml:channel name="X" type="integer" min="-2.14748E9" max="2.14748E9" units="cm"/>
+          <inkml:channel name="Y" type="integer" min="-2.14748E9" max="2.14748E9" units="cm"/>
+          <inkml:channel name="F" type="integer" max="32767" units="dev"/>
+          <inkml:channel name="OA" type="integer" max="360" units="deg"/>
+          <inkml:channel name="OE" type="integer" max="90" units="deg"/>
+        </inkml:traceFormat>
+        <inkml:channelProperties>
+          <inkml:channelProperty channel="X" name="resolution" value="1000" units="1/cm"/>
+          <inkml:channelProperty channel="Y" name="resolution" value="1000" units="1/cm"/>
+          <inkml:channelProperty channel="F" name="resolution" value="0" units="1/dev"/>
+          <inkml:channelProperty channel="OA" name="resolution" value="1000" units="1/deg"/>
+          <inkml:channelProperty channel="OE" name="resolution" value="1000" units="1/deg"/>
+        </inkml:channelProperties>
+      </inkml:inkSource>
+      <inkml:timestamp xml:id="ts0" timeString="2025-04-03T08:34:16.606"/>
+    </inkml:context>
+    <inkml:brush xml:id="br0">
+      <inkml:brushProperty name="width" value="0.2" units="cm"/>
+      <inkml:brushProperty name="height" value="0.2" units="cm"/>
+    </inkml:brush>
+  </inkml:definitions>
+  <inkml:trace contextRef="#ctx0" brushRef="#br0">0 7 96 0 0,'0'0'2971'0'0,"5"1"-2122"0"0,2 1-710 0 0,6 1 32 0 0,0 0 0 0 0,14 0 0 0 0,3-1 206 0 0,28 0 278 0 0,96-5 90 0 0,-134 2-495 0 0,29-6-1 0 0,1-1 340 0 0,-26 4-350 0 0,-16 4-135 0 0</inkml:trace>
+</inkml:ink>
+</file>
+
+<file path=ppt/ink/ink19.xml><?xml version="1.0" encoding="utf-8"?>
+<inkml:ink xmlns:inkml="http://www.w3.org/2003/InkML">
+  <inkml:definitions>
+    <inkml:context xml:id="ctx0">
+      <inkml:inkSource xml:id="inkSrc0">
+        <inkml:traceFormat>
+          <inkml:channel name="X" type="integer" min="-2.14748E9" max="2.14748E9" units="cm"/>
+          <inkml:channel name="Y" type="integer" min="-2.14748E9" max="2.14748E9" units="cm"/>
+          <inkml:channel name="F" type="integer" max="32767" units="dev"/>
+          <inkml:channel name="OA" type="integer" max="360" units="deg"/>
+          <inkml:channel name="OE" type="integer" max="90" units="deg"/>
+        </inkml:traceFormat>
+        <inkml:channelProperties>
+          <inkml:channelProperty channel="X" name="resolution" value="1000" units="1/cm"/>
+          <inkml:channelProperty channel="Y" name="resolution" value="1000" units="1/cm"/>
+          <inkml:channelProperty channel="F" name="resolution" value="0" units="1/dev"/>
+          <inkml:channelProperty channel="OA" name="resolution" value="1000" units="1/deg"/>
+          <inkml:channelProperty channel="OE" name="resolution" value="1000" units="1/deg"/>
+        </inkml:channelProperties>
+      </inkml:inkSource>
+      <inkml:timestamp xml:id="ts0" timeString="2025-04-03T08:34:16.803"/>
+    </inkml:context>
+    <inkml:brush xml:id="br0">
+      <inkml:brushProperty name="width" value="0.2" units="cm"/>
+      <inkml:brushProperty name="height" value="0.2" units="cm"/>
+    </inkml:brush>
+  </inkml:definitions>
+  <inkml:trace contextRef="#ctx0" brushRef="#br0">1 0 4720 0 0,'0'0'0'0'0,"35"4"0"0"0,-20-4 0 0 0,1 2 0 0 0,14 1 0 0 0,-2 0 0 0 0,-1-3 0 0 0,1-3 0 0 0,1 0 0 0 0,-5 1 0 0 0,-5 0 0 0 0</inkml:trace>
+</inkml:ink>
+</file>
+
+<file path=ppt/ink/ink2.xml><?xml version="1.0" encoding="utf-8"?>
+<inkml:ink xmlns:inkml="http://www.w3.org/2003/InkML">
+  <inkml:definitions>
+    <inkml:context xml:id="ctx0">
+      <inkml:inkSource xml:id="inkSrc0">
+        <inkml:traceFormat>
+          <inkml:channel name="X" type="integer" min="-2.14748E9" max="2.14748E9" units="cm"/>
+          <inkml:channel name="Y" type="integer" min="-2.14748E9" max="2.14748E9" units="cm"/>
+          <inkml:channel name="F" type="integer" max="32767" units="dev"/>
+          <inkml:channel name="OA" type="integer" max="360" units="deg"/>
+          <inkml:channel name="OE" type="integer" max="90" units="deg"/>
+        </inkml:traceFormat>
+        <inkml:channelProperties>
+          <inkml:channelProperty channel="X" name="resolution" value="1000" units="1/cm"/>
+          <inkml:channelProperty channel="Y" name="resolution" value="1000" units="1/cm"/>
+          <inkml:channelProperty channel="F" name="resolution" value="0" units="1/dev"/>
+          <inkml:channelProperty channel="OA" name="resolution" value="1000" units="1/deg"/>
+          <inkml:channelProperty channel="OE" name="resolution" value="1000" units="1/deg"/>
+        </inkml:channelProperties>
+      </inkml:inkSource>
+      <inkml:timestamp xml:id="ts0" timeString="2025-04-03T08:33:37"/>
+    </inkml:context>
+    <inkml:brush xml:id="br0">
+      <inkml:brushProperty name="width" value="0.2" units="cm"/>
+      <inkml:brushProperty name="height" value="0.2" units="cm"/>
+    </inkml:brush>
+  </inkml:definitions>
+  <inkml:trace contextRef="#ctx0" brushRef="#br0">1 102 488 0 0,'16'-4'0'0'0,"1"0"0"0"0,33-1 0 0 0,-20 2 0 0 0,132-16 1 0 0,-152 17 4 0 0,1 0-1 0 0,0-1 0 0 0,15-5 0 0 0,-15 3 3 0 0,0 2 0 0 0,23-5 0 0 0,79-5 23 0 0,-87 8 2 0 0,-21 4-20 0 0,0 0-1 0 0,1 0 1 0 0,-1 0 0 0 0,0 1 0 0 0,1 0 0 0 0,6 0 0 0 0,-3 1 9 0 0,0 0-1 0 0,0-1 1 0 0,0 0-1 0 0,14-2 1 0 0,-22 2-17 0 0,1-1 0 0 0,0 1 0 0 0,-1 0 1 0 0,1 1-1 0 0,-1-1 0 0 0,1 0 1 0 0,-1 0-1 0 0,1 1 0 0 0,-1-1 0 0 0,0 1 1 0 0,1-1-1 0 0,-1 1 0 0 0,1 0 1 0 0,-1-1-1 0 0,0 1 0 0 0,0 0 0 0 0,1 0 1 0 0,1 2-1 0 0,-1-1 0 0 0,0 0 1 0 0,0 1-1 0 0,0-1 1 0 0,-1 1-1 0 0,1-1 1 0 0,0 1-1 0 0,-1 0 1 0 0,2 3-1 0 0,-2-2 0 0 0,0 0 0 0 0,-1 1 1 0 0,1-1-1 0 0,-1 0 0 0 0,0 7 0 0 0,2 13 4 0 0,43 178 24 0 0,-39-175-28 0 0,2 0 0 0 0,0-1 0 0 0,2 0-1 0 0,0-1 1 0 0,17 28 0 0 0,-24-48-3 0 0,0 0-1 0 0,0-1 1 0 0,0 1-1 0 0,1-1 1 0 0,-1 0-1 0 0,1 0 1 0 0,0 0 0 0 0,0 0-1 0 0,1-1 1 0 0,-1 1-1 0 0,1-1 1 0 0,0-1-1 0 0,8 5 1 0 0,-11-7 0 0 0,1 1 0 0 0,-1 0 0 0 0,1-1 0 0 0,0 0 0 0 0,-1 0 0 0 0,1 0 0 0 0,4 0 0 0 0,-6-1-1 0 0,0 1 1 0 0,-1-1-1 0 0,1 0 0 0 0,0 0 1 0 0,-1 1-1 0 0,1-1 0 0 0,-1 0 1 0 0,1 0-1 0 0,-1 0 0 0 0,1 0 1 0 0,-1 1-1 0 0,1-1 0 0 0,-1 0 1 0 0,0 0-1 0 0,0 0 0 0 0,1 0 1 0 0,-1 0-1 0 0,0-2 0 0 0,2-4 2 0 0,3-5-1 0 0,-1-1 0 0 0,0 0 1 0 0,0 0-1 0 0,-1 0 0 0 0,-1-1 0 0 0,0 1 0 0 0,-1-1 0 0 0,-1-17 1 0 0,-5-46 11 0 0,4 58-11 0 0,-1 0 0 0 0,-1 0-1 0 0,-9-31 1 0 0,5 24-1 0 0,4 13 6 0 0,-1-1 1 0 0,-1 2-1 0 0,0-1 0 0 0,0 0 1 0 0,-1 1-1 0 0,-1 0 0 0 0,0 0 1 0 0,-1 1-1 0 0,0 0 0 0 0,-1 1 1 0 0,-18-19-1 0 0,7 16 32 0 0,18 12-23 0 0,1 1 1 0 0,0-1 0 0 0,-1 0-1 0 0,1 1 1 0 0,0-1-1 0 0,-1 1 1 0 0,1 0-1 0 0,-1-1 1 0 0,1 1-1 0 0,-1 0 1 0 0,1 0 0 0 0,0 0-1 0 0,-4 0 1 0 0,5 0-7 0 0,-1 1 1 0 0,0-1-1 0 0,1 1 0 0 0,-1-1 1 0 0,1 1-1 0 0,-1-1 1 0 0,1 1-1 0 0,-1-1 1 0 0,1 1-1 0 0,-1-1 1 0 0,1 1-1 0 0,0 0 1 0 0,-1-1-1 0 0,1 1 1 0 0,0-1-1 0 0,-1 1 1 0 0,1 0-1 0 0,0 0 0 0 0,0-1 1 0 0,0 1-1 0 0,0 0 1 0 0,-1-1-1 0 0,1 1 1 0 0,0 0-1 0 0,0 0 1 0 0,0-1-1 0 0,1 1 1 0 0,-1 0-1 0 0,0-1 1 0 0,0 1-1 0 0,1 1 1 0 0,-1 2 47 0 0,2 0 0 0 0,-1 0 0 0 0,0 0 0 0 0,3 4 0 0 0,1-3 70 0 0</inkml:trace>
+</inkml:ink>
+</file>
+
+<file path=ppt/ink/ink20.xml><?xml version="1.0" encoding="utf-8"?>
+<inkml:ink xmlns:inkml="http://www.w3.org/2003/InkML">
+  <inkml:definitions>
+    <inkml:context xml:id="ctx0">
+      <inkml:inkSource xml:id="inkSrc0">
+        <inkml:traceFormat>
+          <inkml:channel name="X" type="integer" min="-2.14748E9" max="2.14748E9" units="cm"/>
+          <inkml:channel name="Y" type="integer" min="-2.14748E9" max="2.14748E9" units="cm"/>
+          <inkml:channel name="F" type="integer" max="32767" units="dev"/>
+          <inkml:channel name="OA" type="integer" max="360" units="deg"/>
+          <inkml:channel name="OE" type="integer" max="90" units="deg"/>
+        </inkml:traceFormat>
+        <inkml:channelProperties>
+          <inkml:channelProperty channel="X" name="resolution" value="1000" units="1/cm"/>
+          <inkml:channelProperty channel="Y" name="resolution" value="1000" units="1/cm"/>
+          <inkml:channelProperty channel="F" name="resolution" value="0" units="1/dev"/>
+          <inkml:channelProperty channel="OA" name="resolution" value="1000" units="1/deg"/>
+          <inkml:channelProperty channel="OE" name="resolution" value="1000" units="1/deg"/>
+        </inkml:channelProperties>
+      </inkml:inkSource>
+      <inkml:timestamp xml:id="ts0" timeString="2025-04-03T08:34:29.949"/>
+    </inkml:context>
+    <inkml:brush xml:id="br0">
+      <inkml:brushProperty name="width" value="0.2" units="cm"/>
+      <inkml:brushProperty name="height" value="0.2" units="cm"/>
+    </inkml:brush>
+  </inkml:definitions>
+  <inkml:trace contextRef="#ctx0" brushRef="#br0">69 1514 96 0 0,'0'0'177'0'0,"2"-4"-154"0"0,0-2-2 0 0,0 1 0 0 0,-1-1 0 0 0,0 0 1 0 0,0 1-1 0 0,1-12 0 0 0,-2-35 174 0 0,0 24-116 0 0,-10-310 368 0 0,8 307-441 0 0,-3-99 7 0 0,-6-79 37 0 0,8 161 1 0 0,-10-45 71 0 0,0-17 13 0 0,-4-110 1259 0 0,16 213-1254 0 0,1-1 1 0 0,1-12-1 0 0,0 13-72 0 0,-1 0 0 0 0,0 0-1 0 0,-1-12 1 0 0,-1 8 7 0 0,1 6-10 0 0,0 1 0 0 0,0-1-1 0 0,1 1 1 0 0,0-1-1 0 0,-1 0 1 0 0,2 1 0 0 0,-1-1-1 0 0,2-7 1 0 0,-1 7 77 0 0,0 0 1 0 0,0 1-1 0 0,-1-1 0 0 0,0 0 1 0 0,1 0-1 0 0,-2 1 1 0 0,1-1-1 0 0,0 0 0 0 0,-3-7 1 0 0,3 11-130 0 0,0 1 1 0 0,0-1 0 0 0,0 1-1 0 0,0-1 1 0 0,0 1 0 0 0,0 0-1 0 0,0-1 1 0 0,0 1 0 0 0,0-1-1 0 0,1 1 1 0 0,-1-1 0 0 0,0 1-1 0 0,0-1 1 0 0,0 1 0 0 0,3-8 1709 0 0,14 9-293 0 0,-16 0-1377 0 0,-1 0 0 0 0,0 1 0 0 0,1-1-1 0 0,-1 0 1 0 0,0 0 0 0 0,0 1 0 0 0,0-1-1 0 0,0 0 1 0 0,0 1 0 0 0,-1 1 0 0 0,0 5 94 0 0,0 45 150 0 0,8 87-1 0 0,1-11 178 0 0,11 151 134 0 0,-10-175-408 0 0,2 19-8 0 0,0-6-29 0 0,-1-3 9 0 0,-8-107-158 0 0,16 91 162 0 0,-11-68-107 0 0,3 40 0 0 0,-7-40-20 0 0,0 12 34 0 0,-2-28-34 0 0,3 20 0 0 0,0-3 14 0 0,-4-25-45 0 0,1 1 1 0 0,0-1-1 0 0,3 9 0 0 0,-4-14-12 0 0,0-1-1 0 0,1 1 1 0 0,-1-1-1 0 0,0 1 1 0 0,0-1-1 0 0,0 0 0 0 0,0 1 1 0 0,0-1-1 0 0,0 1 1 0 0,-1-1-1 0 0,1 1 1 0 0,0-1-1 0 0,-1 0 1 0 0,0 3-1 0 0,-2 4 21 0 0,3-7-14 0 0,0 0 0 0 0,0 0 0 0 0,1 0 1 0 0,-1 0-1 0 0,0 0 0 0 0,1 0 0 0 0,-1 0 0 0 0,1 0 0 0 0,-1 0 0 0 0,1 0 0 0 0,-1 0 0 0 0,1 0 0 0 0,0 0 0 0 0,-1 0 0 0 0,1 0 0 0 0,0-1 0 0 0,0 1 0 0 0,-1 0 0 0 0,1-1 1 0 0,1 2-1 0 0,-1 17 2005 0 0,-8-27-1881 0 0,6-14 111 0 0,1 22-238 0 0,-2 0 4 0 0,1 0 21 0 0,-8 0 4 0 0,7 0-28 0 0,2 0 6 0 0,0-2-2 0 0,-1-14-5 0 0,-1 0 1 0 0,-5-22-1 0 0,0 4-2 0 0,-3-57 5 0 0,0 2 0 0 0,6 66-7 0 0,2 15-3 0 0,1 0 0 0 0,0-1-1 0 0,0 1 1 0 0,1-1 0 0 0,0-11 0 0 0,2-9 5 0 0,-1 20-3 0 0,-1 0 1 0 0,2 0-1 0 0,-1 0 1 0 0,5-13-1 0 0,0 4 5 0 0,1 0 0 0 0,1 0-1 0 0,1 1 1 0 0,1 0 0 0 0,0 1-1 0 0,20-24 1 0 0,-25 34-5 0 0,0 1 1 0 0,0 0-1 0 0,1 0 1 0 0,0 0-1 0 0,0 1 1 0 0,0 0-1 0 0,1 0 0 0 0,10-4 1 0 0,-11 6-1 0 0,-1 0 0 0 0,0 1 0 0 0,1 0 0 0 0,-1 0 0 0 0,1 0 0 0 0,-1 0 0 0 0,1 1-1 0 0,0 0 1 0 0,-1 0 0 0 0,1 1 0 0 0,-1 0 0 0 0,10 2 0 0 0,5 3 10 0 0,-1 1 1 0 0,0 1-1 0 0,-1 1 0 0 0,1 0 0 0 0,-2 2 0 0 0,1 0 0 0 0,16 14 1 0 0,-22-15-2 0 0,-1 1 0 0 0,0-1 0 0 0,0 2 0 0 0,10 14 1 0 0,-15-18-4 0 0,0 1 0 0 0,-1 1 0 0 0,0-1 0 0 0,0 1 0 0 0,-1 0 0 0 0,6 19 0 0 0,-5-9 15 0 0,-1 0 1 0 0,-1 0-1 0 0,0 1 1 0 0,-1-1-1 0 0,-2 31 1 0 0,-2-31-6 0 0,-1-2 0 0 0,0 1 0 0 0,-1 0 0 0 0,-1-1 0 0 0,-1 1 0 0 0,0-2 0 0 0,-2 1 0 0 0,0-1 0 0 0,-1 0 0 0 0,0 0 0 0 0,-2-1 0 0 0,0 0 0 0 0,-14 15 0 0 0,10-16 22 0 0,0-1 1 0 0,-2 0-1 0 0,1-1 1 0 0,-2-1-1 0 0,-28 16 0 0 0,39-25-14 0 0,0 1 0 0 0,0-2-1 0 0,0 1 1 0 0,0-1 0 0 0,-1 0-1 0 0,1 0 1 0 0,-1-1 0 0 0,1 0-1 0 0,-1 0 1 0 0,1-1-1 0 0,-1 0 1 0 0,0 0 0 0 0,1-1-1 0 0,-1 0 1 0 0,1 0 0 0 0,-1-1-1 0 0,-11-4 1 0 0,7 1 18 0 0</inkml:trace>
+</inkml:ink>
+</file>
+
+<file path=ppt/ink/ink21.xml><?xml version="1.0" encoding="utf-8"?>
+<inkml:ink xmlns:inkml="http://www.w3.org/2003/InkML">
+  <inkml:definitions>
+    <inkml:context xml:id="ctx0">
+      <inkml:inkSource xml:id="inkSrc0">
+        <inkml:traceFormat>
+          <inkml:channel name="X" type="integer" min="-2.14748E9" max="2.14748E9" units="cm"/>
+          <inkml:channel name="Y" type="integer" min="-2.14748E9" max="2.14748E9" units="cm"/>
+          <inkml:channel name="F" type="integer" max="32767" units="dev"/>
+        </inkml:traceFormat>
+        <inkml:channelProperties>
+          <inkml:channelProperty channel="X" name="resolution" value="1000" units="1/cm"/>
+          <inkml:channelProperty channel="Y" name="resolution" value="1000" units="1/cm"/>
+          <inkml:channelProperty channel="F" name="resolution" value="0" units="1/dev"/>
+        </inkml:channelProperties>
+      </inkml:inkSource>
+      <inkml:timestamp xml:id="ts0" timeString="2025-04-03T08:35:27.333"/>
+    </inkml:context>
+    <inkml:brush xml:id="br0">
+      <inkml:brushProperty name="width" value="0.05" units="cm"/>
+      <inkml:brushProperty name="height" value="0.05" units="cm"/>
+    </inkml:brush>
+  </inkml:definitions>
+  <inkml:trace contextRef="#ctx0" brushRef="#br0">0 1 24575,'0'0'-8191</inkml:trace>
+</inkml:ink>
+</file>
+
+<file path=ppt/ink/ink3.xml><?xml version="1.0" encoding="utf-8"?>
+<inkml:ink xmlns:inkml="http://www.w3.org/2003/InkML">
+  <inkml:definitions>
+    <inkml:context xml:id="ctx0">
+      <inkml:inkSource xml:id="inkSrc0">
+        <inkml:traceFormat>
+          <inkml:channel name="X" type="integer" min="-2.14748E9" max="2.14748E9" units="cm"/>
+          <inkml:channel name="Y" type="integer" min="-2.14748E9" max="2.14748E9" units="cm"/>
+          <inkml:channel name="F" type="integer" max="32767" units="dev"/>
+          <inkml:channel name="OA" type="integer" max="360" units="deg"/>
+          <inkml:channel name="OE" type="integer" max="90" units="deg"/>
+        </inkml:traceFormat>
+        <inkml:channelProperties>
+          <inkml:channelProperty channel="X" name="resolution" value="1000" units="1/cm"/>
+          <inkml:channelProperty channel="Y" name="resolution" value="1000" units="1/cm"/>
+          <inkml:channelProperty channel="F" name="resolution" value="0" units="1/dev"/>
+          <inkml:channelProperty channel="OA" name="resolution" value="1000" units="1/deg"/>
+          <inkml:channelProperty channel="OE" name="resolution" value="1000" units="1/deg"/>
+        </inkml:channelProperties>
+      </inkml:inkSource>
+      <inkml:timestamp xml:id="ts0" timeString="2025-04-03T08:33:37.309"/>
+    </inkml:context>
+    <inkml:brush xml:id="br0">
+      <inkml:brushProperty name="width" value="0.2" units="cm"/>
+      <inkml:brushProperty name="height" value="0.2" units="cm"/>
+    </inkml:brush>
+  </inkml:definitions>
+  <inkml:trace contextRef="#ctx0" brushRef="#br0">0 126 992 0 0,'17'35'22'0'0,"-10"-21"-7"0"0,0 0 0 0 0,-1 0 0 0 0,4 16-1 0 0,-3-10 33 0 0,9 25 0 0 0,-8-26 42 0 0,7 26 0 0 0,15 60 151 0 0,-19-69-89 0 0,-9-30 131 0 0,-4-9-228 0 0,2 1-46 0 0,-1 0 0 0 0,0 1 0 0 0,1-1 0 0 0,0 0 0 0 0,-1 0 0 0 0,1 1 0 0 0,0-1 0 0 0,0 0 0 0 0,0 0 0 0 0,0 1 0 0 0,0-1 0 0 0,0-2 0 0 0,1-5 7 0 0,-4-69 52 0 0,1-40 42 0 0,2 106-90 0 0,-2-18 1 0 0,1 20-7 0 0,0 1-1 0 0,1-1 1 0 0,1-17-1 0 0,0 21-4 0 0,0-1 0 0 0,1 1 0 0 0,-1-1 0 0 0,1 1 0 0 0,1 0 0 0 0,-1 0 0 0 0,5-8 0 0 0,2-5 9 0 0,-9 17-12 0 0,1-1-1 0 0,0 0 1 0 0,1 1-1 0 0,-1-1 0 0 0,0 1 1 0 0,1-1-1 0 0,0 1 0 0 0,-1 0 1 0 0,1-1-1 0 0,4-3 0 0 0,-3 4 0 0 0,-1 0-1 0 0,0 0 1 0 0,0 0-1 0 0,0-1 1 0 0,0 1-1 0 0,2-4 1 0 0,7-9 11 0 0,-4 9-2 0 0,-1 0 0 0 0,15-9 0 0 0,-7 7 3 0 0</inkml:trace>
+</inkml:ink>
+</file>
+
+<file path=ppt/ink/ink4.xml><?xml version="1.0" encoding="utf-8"?>
+<inkml:ink xmlns:inkml="http://www.w3.org/2003/InkML">
+  <inkml:definitions>
+    <inkml:context xml:id="ctx0">
+      <inkml:inkSource xml:id="inkSrc0">
+        <inkml:traceFormat>
+          <inkml:channel name="X" type="integer" min="-2.14748E9" max="2.14748E9" units="cm"/>
+          <inkml:channel name="Y" type="integer" min="-2.14748E9" max="2.14748E9" units="cm"/>
+          <inkml:channel name="F" type="integer" max="32767" units="dev"/>
+          <inkml:channel name="OA" type="integer" max="360" units="deg"/>
+          <inkml:channel name="OE" type="integer" max="90" units="deg"/>
+        </inkml:traceFormat>
+        <inkml:channelProperties>
+          <inkml:channelProperty channel="X" name="resolution" value="1000" units="1/cm"/>
+          <inkml:channelProperty channel="Y" name="resolution" value="1000" units="1/cm"/>
+          <inkml:channelProperty channel="F" name="resolution" value="0" units="1/dev"/>
+          <inkml:channelProperty channel="OA" name="resolution" value="1000" units="1/deg"/>
+          <inkml:channelProperty channel="OE" name="resolution" value="1000" units="1/deg"/>
+        </inkml:channelProperties>
+      </inkml:inkSource>
+      <inkml:timestamp xml:id="ts0" timeString="2025-04-03T08:33:38.373"/>
+    </inkml:context>
+    <inkml:brush xml:id="br0">
+      <inkml:brushProperty name="width" value="0.2" units="cm"/>
+      <inkml:brushProperty name="height" value="0.2" units="cm"/>
+    </inkml:brush>
+  </inkml:definitions>
+  <inkml:trace contextRef="#ctx0" brushRef="#br0">0 9 1296 0 0,'0'0'200'0'0,"4"5"-1"0"0,3 9-101 0 0,-1 0 0 0 0,0 0 0 0 0,-1 0 0 0 0,4 17 0 0 0,16 97 482 0 0,-18-85-26 0 0,16 58 0 0 0,11 33 14 0 0,-33-130-548 0 0,0 0 0 0 0,1 0 0 0 0,-1 0 0 0 0,1 0 0 0 0,0-1 0 0 0,0 1 0 0 0,3 4 0 0 0,0-5 57 0 0,-4-3-41 0 0,-2 0 23 0 0,0-10-8 0 0,-4-95-3 0 0,4 66-40 0 0,1 33-7 0 0,-1-117 29 0 0,3 102-23 0 0,1 0 0 0 0,10-33 0 0 0,-8 34-4 0 0,-2 11-2 0 0,0-1 1 0 0,1 1 0 0 0,0 0 0 0 0,0 1-1 0 0,7-12 1 0 0,32-37 5 0 0,-42 55-7 0 0,0 1 0 0 0,-1-1 0 0 0,1 1 0 0 0,0 0 0 0 0,0-1 0 0 0,1 1 0 0 0,-1 0 0 0 0,0 0 0 0 0,0 0 0 0 0,1-1 0 0 0,-1 1 0 0 0,0 1 0 0 0,1-1 0 0 0,-1 0 0 0 0,1 0 0 0 0,-1 0 0 0 0,1 1 0 0 0,0-1 0 0 0,-1 1 0 0 0,1-1 0 0 0,-1 1 0 0 0,1 0 0 0 0,0 0 0 0 0,1-1 0 0 0,1 1 0 0 0,0 0 0 0 0,0 1 0 0 0,0-1 0 0 0,-1 1 0 0 0,1-1 0 0 0,0 1 0 0 0,-1 0 0 0 0,1 1 0 0 0,5 2 0 0 0,-3-1 0 0 0,-1 1 0 0 0,0-1 0 0 0,0 1 0 0 0,0 1 0 0 0,6 7 0 0 0,0 0 0 0 0,-1 0 0 0 0,-1 0 0 0 0,0 1 0 0 0,-1 0 0 0 0,10 21 0 0 0,-4-5 0 0 0,-8-18 0 0 0,-1 0 0 0 0,0 1 0 0 0,6 23 0 0 0,0 8 0 0 0,-5-25 0 0 0,3 26 0 0 0,-6-13 1 0 0,-2-19 2 0 0,0 1-1 0 0,1-1 1 0 0,0 0-1 0 0,1 0 0 0 0,6 18 1 0 0,-3-25 39 0 0,-6-4-42 0 0,0-1 1 0 0,0 0 0 0 0,1 0-1 0 0,-1 0 1 0 0,0 0 0 0 0,0 0-1 0 0,0 0 1 0 0,0 0 0 0 0,0 0-1 0 0,1 0 1 0 0,-1 0 0 0 0,0 0-1 0 0,0 0 1 0 0,0 0-1 0 0,0 0 1 0 0,1 0 0 0 0,-1 0-1 0 0,0 0 1 0 0,0 0 0 0 0,0 0-1 0 0,0 0 1 0 0,0 0 0 0 0,1 0-1 0 0,-1 0 1 0 0,0-1 0 0 0,0 1-1 0 0,0 0 1 0 0,0 0 0 0 0,0 0-1 0 0,1 0 1 0 0,-1 0 0 0 0,0 0-1 0 0,0 0 1 0 0,0-1 0 0 0,0 1-1 0 0,0 0 1 0 0,0 0 0 0 0,0 0-1 0 0,0 0 1 0 0,0 0 0 0 0,0-1-1 0 0,1 1 1 0 0,-1 0 0 0 0,0 0-1 0 0,0 0 1 0 0,2-11 6 0 0,-1 1 0 0 0,1-15 1 0 0,0 0 7 0 0,4-33 7 0 0,-4 29-4 0 0,1 0-1 0 0,2 1 1 0 0,9-36-1 0 0,-7 41 5 0 0,0 3 10 0 0,12-29 1 0 0,-13 35-24 0 0,-1 3 12 0 0,10-17 0 0 0,-13 26-11 0 0,0-1 0 0 0,0 0 0 0 0,1 0 0 0 0,-1 1 0 0 0,1-1 0 0 0,-1 1 0 0 0,1 0 0 0 0,0 0 0 0 0,0 0 0 0 0,3-2 0 0 0,-2 2 9 0 0,0 0 0 0 0,1 0 0 0 0,-1 0 0 0 0,1 1 0 0 0,-1-1-1 0 0,1 1 1 0 0,7-1 0 0 0,-9 2-11 0 0,0 1 0 0 0,0-1 0 0 0,0 0 0 0 0,-1 1 0 0 0,1-1-1 0 0,0 1 1 0 0,0 0 0 0 0,-1 0 0 0 0,1 0 0 0 0,-1 0 0 0 0,1 1 0 0 0,-1-1 0 0 0,1 1 0 0 0,1 1-1 0 0,9 6 48 0 0,-9-7-36 0 0,-1 0 0 0 0,1 0 0 0 0,-1 1 0 0 0,1 0 0 0 0,-1 0 0 0 0,0 0 0 0 0,0 0 0 0 0,0 0 0 0 0,-1 1 0 0 0,4 4 0 0 0,3 10 36 0 0,12 21 30 0 0,-14-27-50 0 0,-1 1 0 0 0,0-1 0 0 0,-1 1 0 0 0,4 16 0 0 0,4 6 52 0 0,-1 2 63 0 0,7 40 0 0 0,-11-46-90 0 0,-1 3 14 0 0,-3-13 33 0 0,8 21 0 0 0,-11-40-89 0 0,0 0-1 0 0,0 0 1 0 0,0 0 0 0 0,0 0 0 0 0,0 0 0 0 0,0 0 0 0 0,4 3-1 0 0,-1-4 25 0 0</inkml:trace>
+</inkml:ink>
+</file>
+
+<file path=ppt/ink/ink5.xml><?xml version="1.0" encoding="utf-8"?>
+<inkml:ink xmlns:inkml="http://www.w3.org/2003/InkML">
+  <inkml:definitions>
+    <inkml:context xml:id="ctx0">
+      <inkml:inkSource xml:id="inkSrc0">
+        <inkml:traceFormat>
+          <inkml:channel name="X" type="integer" min="-2.14748E9" max="2.14748E9" units="cm"/>
+          <inkml:channel name="Y" type="integer" min="-2.14748E9" max="2.14748E9" units="cm"/>
+          <inkml:channel name="F" type="integer" max="32767" units="dev"/>
+          <inkml:channel name="OA" type="integer" max="360" units="deg"/>
+          <inkml:channel name="OE" type="integer" max="90" units="deg"/>
+        </inkml:traceFormat>
+        <inkml:channelProperties>
+          <inkml:channelProperty channel="X" name="resolution" value="1000" units="1/cm"/>
+          <inkml:channelProperty channel="Y" name="resolution" value="1000" units="1/cm"/>
+          <inkml:channelProperty channel="F" name="resolution" value="0" units="1/dev"/>
+          <inkml:channelProperty channel="OA" name="resolution" value="1000" units="1/deg"/>
+          <inkml:channelProperty channel="OE" name="resolution" value="1000" units="1/deg"/>
+        </inkml:channelProperties>
+      </inkml:inkSource>
+      <inkml:timestamp xml:id="ts0" timeString="2025-04-03T08:33:38.912"/>
+    </inkml:context>
+    <inkml:brush xml:id="br0">
+      <inkml:brushProperty name="width" value="0.2" units="cm"/>
+      <inkml:brushProperty name="height" value="0.2" units="cm"/>
+    </inkml:brush>
+  </inkml:definitions>
+  <inkml:trace contextRef="#ctx0" brushRef="#br0">0 13 2304 0 0,'6'0'65'0'0,"78"-6"159"0"0,-50 2-131 0 0,45 2 0 0 0,14 6 321 0 0,-78-3-357 0 0,-11-1-35 0 0,-1 0 0 0 0,0 0 1 0 0,1 0-1 0 0,-1 1 0 0 0,0-1 1 0 0,0 1-1 0 0,0 0 1 0 0,1 0-1 0 0,2 2 0 0 0,-4-2-3 0 0,8 2 129 0 0,-7-3-60 0 0</inkml:trace>
+</inkml:ink>
+</file>
+
+<file path=ppt/ink/ink6.xml><?xml version="1.0" encoding="utf-8"?>
+<inkml:ink xmlns:inkml="http://www.w3.org/2003/InkML">
+  <inkml:definitions>
+    <inkml:context xml:id="ctx0">
+      <inkml:inkSource xml:id="inkSrc0">
+        <inkml:traceFormat>
+          <inkml:channel name="X" type="integer" min="-2.14748E9" max="2.14748E9" units="cm"/>
+          <inkml:channel name="Y" type="integer" min="-2.14748E9" max="2.14748E9" units="cm"/>
+          <inkml:channel name="F" type="integer" max="32767" units="dev"/>
+          <inkml:channel name="OA" type="integer" max="360" units="deg"/>
+          <inkml:channel name="OE" type="integer" max="90" units="deg"/>
+        </inkml:traceFormat>
+        <inkml:channelProperties>
+          <inkml:channelProperty channel="X" name="resolution" value="1000" units="1/cm"/>
+          <inkml:channelProperty channel="Y" name="resolution" value="1000" units="1/cm"/>
+          <inkml:channelProperty channel="F" name="resolution" value="0" units="1/dev"/>
+          <inkml:channelProperty channel="OA" name="resolution" value="1000" units="1/deg"/>
+          <inkml:channelProperty channel="OE" name="resolution" value="1000" units="1/deg"/>
+        </inkml:channelProperties>
+      </inkml:inkSource>
+      <inkml:timestamp xml:id="ts0" timeString="2025-04-03T08:33:39.120"/>
+    </inkml:context>
+    <inkml:brush xml:id="br0">
+      <inkml:brushProperty name="width" value="0.2" units="cm"/>
+      <inkml:brushProperty name="height" value="0.2" units="cm"/>
+    </inkml:brush>
+  </inkml:definitions>
+  <inkml:trace contextRef="#ctx0" brushRef="#br0">0 0 992 0 0,'0'0'137'0'0,"4"5"-86"0"0,0-1-40 0 0,-1 1 0 0 0,0 0 0 0 0,0 0 0 0 0,0 0 0 0 0,-1 0 0 0 0,1 0-1 0 0,-1 1 1 0 0,0-1 0 0 0,1 10 0 0 0,25 112 253 0 0,-6-32-33 0 0,-19-88-173 0 0,0 1-1 0 0,1-2 1 0 0,-1 1-1 0 0,1 0 1 0 0,1-1-1 0 0,-1 0 1 0 0,1 0 0 0 0,8 8-1 0 0,-12-13-47 0 0,4 6 54 0 0,-2-1 0 0 0</inkml:trace>
+</inkml:ink>
+</file>
+
+<file path=ppt/ink/ink7.xml><?xml version="1.0" encoding="utf-8"?>
+<inkml:ink xmlns:inkml="http://www.w3.org/2003/InkML">
+  <inkml:definitions>
+    <inkml:context xml:id="ctx0">
+      <inkml:inkSource xml:id="inkSrc0">
+        <inkml:traceFormat>
+          <inkml:channel name="X" type="integer" min="-2.14748E9" max="2.14748E9" units="cm"/>
+          <inkml:channel name="Y" type="integer" min="-2.14748E9" max="2.14748E9" units="cm"/>
+          <inkml:channel name="F" type="integer" max="32767" units="dev"/>
+          <inkml:channel name="OA" type="integer" max="360" units="deg"/>
+          <inkml:channel name="OE" type="integer" max="90" units="deg"/>
+        </inkml:traceFormat>
+        <inkml:channelProperties>
+          <inkml:channelProperty channel="X" name="resolution" value="1000" units="1/cm"/>
+          <inkml:channelProperty channel="Y" name="resolution" value="1000" units="1/cm"/>
+          <inkml:channelProperty channel="F" name="resolution" value="0" units="1/dev"/>
+          <inkml:channelProperty channel="OA" name="resolution" value="1000" units="1/deg"/>
+          <inkml:channelProperty channel="OE" name="resolution" value="1000" units="1/deg"/>
+        </inkml:channelProperties>
+      </inkml:inkSource>
+      <inkml:timestamp xml:id="ts0" timeString="2025-04-03T08:33:39.999"/>
+    </inkml:context>
+    <inkml:brush xml:id="br0">
+      <inkml:brushProperty name="width" value="0.2" units="cm"/>
+      <inkml:brushProperty name="height" value="0.2" units="cm"/>
+    </inkml:brush>
+  </inkml:definitions>
+  <inkml:trace contextRef="#ctx0" brushRef="#br0">0 0 96 0 0,'34'113'58'0'0,"9"38"43"0"0,-13-33 124 0 0,-21-89-98 0 0,-7-24-93 0 0,0 0 1 0 0,-1 0-1 0 0,1 1 1 0 0,-1-1-1 0 0,0 0 1 0 0,0 7-1 0 0,-1-12-28 0 0,0 1 0 0 0,1 0 0 0 0,-1 0 0 0 0,0-1 0 0 0,1 1 0 0 0,-1 0 1 0 0,0 0-1 0 0,1-1 0 0 0,-1 1 0 0 0,1 0 0 0 0,-1-1 0 0 0,2 2 0 0 0,2 1-3 0 0,-4-3-3 0 0,0 0 1 0 0,0 0-1 0 0,0 0 1 0 0,0 0-1 0 0,0 0 0 0 0,0 0 1 0 0,1 0-1 0 0,-1 0 0 0 0,0 0 1 0 0,0 0-1 0 0,0 0 0 0 0,0 0 1 0 0,0 0-1 0 0,0 0 0 0 0,0 0 1 0 0,0 0-1 0 0,0 0 0 0 0,0-1 1 0 0,0 1-1 0 0,0 0 0 0 0,0 0 1 0 0,0 0-1 0 0,0 0 1 0 0,1 0-1 0 0,-1 0 0 0 0,0 0 1 0 0,0 0-1 0 0,0 0 0 0 0,0 0 1 0 0,0 0-1 0 0,0 0 0 0 0,0 0 1 0 0,0 0-1 0 0,0 0 0 0 0,0-1 1 0 0,0 1-1 0 0,0 0 0 0 0,0 0 1 0 0,0 0-1 0 0,0 0 1 0 0,0 0-1 0 0,0 0 0 0 0,0 0 1 0 0,0 0-1 0 0,0 0 0 0 0,0 0 1 0 0,0-1 11 0 0,2-6 4 0 0,4-11-10 0 0,0-2 1 0 0,-1 1 0 0 0,3-28 0 0 0,-3 13-2 0 0,-3 22-4 0 0,0 2 0 0 0,0-1 1 0 0,0 1 0 0 0,1-1 0 0 0,0 1 0 0 0,10-19 0 0 0,-9 21 2 0 0,0 1 1 0 0,10-12-1 0 0,-12 17-3 0 0,0 0-1 0 0,0-1 1 0 0,1 1-1 0 0,-1 0 1 0 0,1 1-1 0 0,-1-1 1 0 0,1 0-1 0 0,-1 1 1 0 0,1-1 0 0 0,0 1-1 0 0,3-1 1 0 0,-5 2-1 0 0,2-2 0 0 0,1 1 0 0 0,0 0 0 0 0,0 0 0 0 0,0 0 0 0 0,0 0 0 0 0,0 1 0 0 0,0 0 0 0 0,1 0 1 0 0,-1 0-1 0 0,0 0 0 0 0,0 0 0 0 0,5 2 0 0 0,-3 0 0 0 0,-2-1 0 0 0,-1 0 0 0 0,0 0 0 0 0,1 0 0 0 0,-1 1-1 0 0,0-1 1 0 0,0 1 0 0 0,0 0 0 0 0,0 0 0 0 0,0 0 0 0 0,0 0 0 0 0,4 5 0 0 0,-1 0-3 0 0,0 0-1 0 0,-1 1 1 0 0,5 8 0 0 0,-8-12 2 0 0,0 0 0 0 0,-1 0 0 0 0,1 0 0 0 0,-1 0 0 0 0,0 0 0 0 0,0 1 0 0 0,-1-1 0 0 0,1 0 0 0 0,-1 6 0 0 0,0 13-1 0 0,-1 1-1 0 0,-2-1 1 0 0,-8 38 0 0 0,8-47 0 0 0,0-1 0 0 0,-2 0 1 0 0,-10 23-1 0 0,-42 59 2 0 0,54-92 0 0 0,1 1 0 0 0,-1 1 0 0 0,0-1 0 0 0,-1 0 0 0 0,1-1 0 0 0,-1 1 0 0 0,-4 3 0 0 0,7-6 0 0 0,-1 0 0 0 0,1 0 0 0 0,0-1 0 0 0,-1 1 0 0 0,1-1 0 0 0,-1 1 0 0 0,1-1 0 0 0,-1 1 0 0 0,1-1 0 0 0,0 0 0 0 0,-1 0 0 0 0,1 0 0 0 0,-1 0 0 0 0,1 0 0 0 0,-1 0 0 0 0,1 0 0 0 0,-1 0 0 0 0,1-1 0 0 0,-1 1 0 0 0,1-1 0 0 0,0 1 0 0 0,-1-1 0 0 0,1 1 0 0 0,-1-1 0 0 0,1 0 0 0 0,-2-1 0 0 0,-2-1 5 0 0,0-1 1 0 0,0 0-1 0 0,0 0 0 0 0,0 0 0 0 0,1-1 1 0 0,0 1-1 0 0,-5-8 0 0 0,0-2 29 0 0,-11-22 1 0 0,8 12 14 0 0</inkml:trace>
+</inkml:ink>
+</file>
+
+<file path=ppt/ink/ink8.xml><?xml version="1.0" encoding="utf-8"?>
+<inkml:ink xmlns:inkml="http://www.w3.org/2003/InkML">
+  <inkml:definitions>
+    <inkml:context xml:id="ctx0">
+      <inkml:inkSource xml:id="inkSrc0">
+        <inkml:traceFormat>
+          <inkml:channel name="X" type="integer" min="-2.14748E9" max="2.14748E9" units="cm"/>
+          <inkml:channel name="Y" type="integer" min="-2.14748E9" max="2.14748E9" units="cm"/>
+          <inkml:channel name="F" type="integer" max="32767" units="dev"/>
+          <inkml:channel name="OA" type="integer" max="360" units="deg"/>
+          <inkml:channel name="OE" type="integer" max="90" units="deg"/>
+        </inkml:traceFormat>
+        <inkml:channelProperties>
+          <inkml:channelProperty channel="X" name="resolution" value="1000" units="1/cm"/>
+          <inkml:channelProperty channel="Y" name="resolution" value="1000" units="1/cm"/>
+          <inkml:channelProperty channel="F" name="resolution" value="0" units="1/dev"/>
+          <inkml:channelProperty channel="OA" name="resolution" value="1000" units="1/deg"/>
+          <inkml:channelProperty channel="OE" name="resolution" value="1000" units="1/deg"/>
+        </inkml:channelProperties>
+      </inkml:inkSource>
+      <inkml:timestamp xml:id="ts0" timeString="2025-04-03T08:33:40.587"/>
+    </inkml:context>
+    <inkml:brush xml:id="br0">
+      <inkml:brushProperty name="width" value="0.2" units="cm"/>
+      <inkml:brushProperty name="height" value="0.2" units="cm"/>
+    </inkml:brush>
+  </inkml:definitions>
+  <inkml:trace contextRef="#ctx0" brushRef="#br0">1 24 96 0 0,'0'0'232'0'0,"44"0"0"0"0,-23-3 0 0 0,8 6 8 0 0,-1-6-136 0 0,0-2 0 0 0,2 1 8 0 0,-2 4-8 0 0,-2-3 248 0 0,-3-1 8 0 0,-7-1-8 0 0</inkml:trace>
+</inkml:ink>
+</file>
+
+<file path=ppt/ink/ink9.xml><?xml version="1.0" encoding="utf-8"?>
+<inkml:ink xmlns:inkml="http://www.w3.org/2003/InkML">
+  <inkml:definitions>
+    <inkml:context xml:id="ctx0">
+      <inkml:inkSource xml:id="inkSrc0">
+        <inkml:traceFormat>
+          <inkml:channel name="X" type="integer" min="-2.14748E9" max="2.14748E9" units="cm"/>
+          <inkml:channel name="Y" type="integer" min="-2.14748E9" max="2.14748E9" units="cm"/>
+          <inkml:channel name="F" type="integer" max="32767" units="dev"/>
+          <inkml:channel name="OA" type="integer" max="360" units="deg"/>
+          <inkml:channel name="OE" type="integer" max="90" units="deg"/>
+        </inkml:traceFormat>
+        <inkml:channelProperties>
+          <inkml:channelProperty channel="X" name="resolution" value="1000" units="1/cm"/>
+          <inkml:channelProperty channel="Y" name="resolution" value="1000" units="1/cm"/>
+          <inkml:channelProperty channel="F" name="resolution" value="0" units="1/dev"/>
+          <inkml:channelProperty channel="OA" name="resolution" value="1000" units="1/deg"/>
+          <inkml:channelProperty channel="OE" name="resolution" value="1000" units="1/deg"/>
+        </inkml:channelProperties>
+      </inkml:inkSource>
+      <inkml:timestamp xml:id="ts0" timeString="2025-04-03T08:33:40.771"/>
+    </inkml:context>
+    <inkml:brush xml:id="br0">
+      <inkml:brushProperty name="width" value="0.2" units="cm"/>
+      <inkml:brushProperty name="height" value="0.2" units="cm"/>
+    </inkml:brush>
+  </inkml:definitions>
+  <inkml:trace contextRef="#ctx0" brushRef="#br0">1 2 2808 0 0,'0'0'24'0'0,"34"0"16"0"0,-23 0-8 0 0,26-2 8 0 0,8 2-24 0 0,-3 5 8 0 0,-5-4 8 0 0</inkml:trace>
+</inkml:ink>
+</file>
+
 <file path=ppt/notesMasters/notesMaster1.xml><?xml version="1.0" encoding="utf-8"?>
 <p:notesMaster xmlns:a="http://schemas.openxmlformats.org/drawingml/2006/main" xmlns:r="http://schemas.openxmlformats.org/officeDocument/2006/relationships" xmlns:p="http://schemas.openxmlformats.org/presentationml/2006/main">
   <p:cSld>
@@ -6174,7 +6824,7 @@
           <a:p>
             <a:fld id="{B2B8B589-3DCF-4CC3-8CB1-8F263020D954}" type="datetimeFigureOut">
               <a:rPr lang="en-PH" smtClean="0"/>
-              <a:t>03/25/2025</a:t>
+              <a:t>04/03/2025</a:t>
             </a:fld>
             <a:endParaRPr lang="en-PH"/>
           </a:p>
@@ -6858,7 +7508,7 @@
           <a:p>
             <a:fld id="{843CB0FE-86D9-4EF0-AD61-3F5691C83FED}" type="datetimeFigureOut">
               <a:rPr lang="en-PH" smtClean="0"/>
-              <a:t>03/25/2025</a:t>
+              <a:t>04/03/2025</a:t>
             </a:fld>
             <a:endParaRPr lang="en-PH"/>
           </a:p>
@@ -13572,6 +14222,1778 @@
     <p:extLst>
       <p:ext uri="{BB962C8B-B14F-4D97-AF65-F5344CB8AC3E}">
         <p14:creationId xmlns:p14="http://schemas.microsoft.com/office/powerpoint/2010/main" val="631496217"/>
+      </p:ext>
+    </p:extLst>
+  </p:cSld>
+  <p:clrMapOvr>
+    <a:masterClrMapping/>
+  </p:clrMapOvr>
+  <mc:AlternateContent xmlns:mc="http://schemas.openxmlformats.org/markup-compatibility/2006" xmlns:p14="http://schemas.microsoft.com/office/powerpoint/2010/main">
+    <mc:Choice Requires="p14">
+      <p:transition p14:dur="200">
+        <p:fade/>
+      </p:transition>
+    </mc:Choice>
+    <mc:Fallback xmlns="">
+      <p:transition>
+        <p:fade/>
+      </p:transition>
+    </mc:Fallback>
+  </mc:AlternateContent>
+</p:sld>
+</file>
+
+<file path=ppt/slides/slide14.xml><?xml version="1.0" encoding="utf-8"?>
+<p:sld xmlns:a="http://schemas.openxmlformats.org/drawingml/2006/main" xmlns:r="http://schemas.openxmlformats.org/officeDocument/2006/relationships" xmlns:p="http://schemas.openxmlformats.org/presentationml/2006/main">
+  <p:cSld>
+    <p:spTree>
+      <p:nvGrpSpPr>
+        <p:cNvPr id="1" name=""/>
+        <p:cNvGrpSpPr/>
+        <p:nvPr/>
+      </p:nvGrpSpPr>
+      <p:grpSpPr>
+        <a:xfrm>
+          <a:off x="0" y="0"/>
+          <a:ext cx="0" cy="0"/>
+          <a:chOff x="0" y="0"/>
+          <a:chExt cx="0" cy="0"/>
+        </a:xfrm>
+      </p:grpSpPr>
+      <p:sp>
+        <p:nvSpPr>
+          <p:cNvPr id="2" name="Title 1">
+            <a:extLst>
+              <a:ext uri="{FF2B5EF4-FFF2-40B4-BE49-F238E27FC236}">
+                <a16:creationId xmlns:a16="http://schemas.microsoft.com/office/drawing/2014/main" id="{34F57E84-1EEC-EC77-8E23-A77431005101}"/>
+              </a:ext>
+            </a:extLst>
+          </p:cNvPr>
+          <p:cNvSpPr>
+            <a:spLocks noGrp="1"/>
+          </p:cNvSpPr>
+          <p:nvPr>
+            <p:ph type="title"/>
+          </p:nvPr>
+        </p:nvSpPr>
+        <p:spPr/>
+        <p:txBody>
+          <a:bodyPr/>
+          <a:lstStyle/>
+          <a:p>
+            <a:r>
+              <a:rPr lang="en-PH" dirty="0"/>
+              <a:t>April 3, 2025</a:t>
+            </a:r>
+          </a:p>
+        </p:txBody>
+      </p:sp>
+      <p:sp>
+        <p:nvSpPr>
+          <p:cNvPr id="3" name="Slide Number Placeholder 2">
+            <a:extLst>
+              <a:ext uri="{FF2B5EF4-FFF2-40B4-BE49-F238E27FC236}">
+                <a16:creationId xmlns:a16="http://schemas.microsoft.com/office/drawing/2014/main" id="{129F3D72-91D5-588F-2C99-2A23A436791F}"/>
+              </a:ext>
+            </a:extLst>
+          </p:cNvPr>
+          <p:cNvSpPr>
+            <a:spLocks noGrp="1"/>
+          </p:cNvSpPr>
+          <p:nvPr>
+            <p:ph type="sldNum" sz="quarter" idx="12"/>
+          </p:nvPr>
+        </p:nvSpPr>
+        <p:spPr/>
+        <p:txBody>
+          <a:bodyPr/>
+          <a:lstStyle/>
+          <a:p>
+            <a:fld id="{32177519-FDB5-46C8-A273-662D2447F0A4}" type="slidenum">
+              <a:rPr lang="en-PH" smtClean="0"/>
+              <a:t>14</a:t>
+            </a:fld>
+            <a:endParaRPr lang="en-PH"/>
+          </a:p>
+        </p:txBody>
+      </p:sp>
+      <p:sp>
+        <p:nvSpPr>
+          <p:cNvPr id="4" name="Footer Placeholder 3">
+            <a:extLst>
+              <a:ext uri="{FF2B5EF4-FFF2-40B4-BE49-F238E27FC236}">
+                <a16:creationId xmlns:a16="http://schemas.microsoft.com/office/drawing/2014/main" id="{91539F11-8757-5F7E-8CCD-86F4B8976097}"/>
+              </a:ext>
+            </a:extLst>
+          </p:cNvPr>
+          <p:cNvSpPr>
+            <a:spLocks noGrp="1"/>
+          </p:cNvSpPr>
+          <p:nvPr>
+            <p:ph type="ftr" sz="quarter" idx="3"/>
+          </p:nvPr>
+        </p:nvSpPr>
+        <p:spPr/>
+        <p:txBody>
+          <a:bodyPr/>
+          <a:lstStyle/>
+          <a:p>
+            <a:endParaRPr lang="en-PH" dirty="0"/>
+          </a:p>
+        </p:txBody>
+      </p:sp>
+      <p:sp>
+        <p:nvSpPr>
+          <p:cNvPr id="5" name="Date Placeholder 4">
+            <a:extLst>
+              <a:ext uri="{FF2B5EF4-FFF2-40B4-BE49-F238E27FC236}">
+                <a16:creationId xmlns:a16="http://schemas.microsoft.com/office/drawing/2014/main" id="{A78B71F5-986B-4611-0644-0BDF93C3DC95}"/>
+              </a:ext>
+            </a:extLst>
+          </p:cNvPr>
+          <p:cNvSpPr>
+            <a:spLocks noGrp="1"/>
+          </p:cNvSpPr>
+          <p:nvPr>
+            <p:ph type="dt" sz="half" idx="2"/>
+          </p:nvPr>
+        </p:nvSpPr>
+        <p:spPr/>
+        <p:txBody>
+          <a:bodyPr/>
+          <a:lstStyle/>
+          <a:p>
+            <a:r>
+              <a:rPr lang="en-US"/>
+              <a:t>2024.12.12</a:t>
+            </a:r>
+            <a:endParaRPr lang="en-PH" dirty="0"/>
+          </a:p>
+        </p:txBody>
+      </p:sp>
+      <p:sp>
+        <p:nvSpPr>
+          <p:cNvPr id="6" name="Text Placeholder 5">
+            <a:extLst>
+              <a:ext uri="{FF2B5EF4-FFF2-40B4-BE49-F238E27FC236}">
+                <a16:creationId xmlns:a16="http://schemas.microsoft.com/office/drawing/2014/main" id="{B7666758-DE1F-27B6-480E-94909CBF970A}"/>
+              </a:ext>
+            </a:extLst>
+          </p:cNvPr>
+          <p:cNvSpPr>
+            <a:spLocks noGrp="1"/>
+          </p:cNvSpPr>
+          <p:nvPr>
+            <p:ph type="body" sz="quarter" idx="13"/>
+          </p:nvPr>
+        </p:nvSpPr>
+        <p:spPr/>
+        <p:txBody>
+          <a:bodyPr/>
+          <a:lstStyle/>
+          <a:p>
+            <a:r>
+              <a:rPr lang="en-PH" dirty="0"/>
+              <a:t>Next paper ideas (modified gain from Pritchard)</a:t>
+            </a:r>
+          </a:p>
+          <a:p>
+            <a:r>
+              <a:rPr lang="en-PH" dirty="0"/>
+              <a:t>New comparison with Nitta using derived gain values</a:t>
+            </a:r>
+          </a:p>
+        </p:txBody>
+      </p:sp>
+    </p:spTree>
+    <p:extLst>
+      <p:ext uri="{BB962C8B-B14F-4D97-AF65-F5344CB8AC3E}">
+        <p14:creationId xmlns:p14="http://schemas.microsoft.com/office/powerpoint/2010/main" val="1375197548"/>
+      </p:ext>
+    </p:extLst>
+  </p:cSld>
+  <p:clrMapOvr>
+    <a:masterClrMapping/>
+  </p:clrMapOvr>
+  <mc:AlternateContent xmlns:mc="http://schemas.openxmlformats.org/markup-compatibility/2006" xmlns:p14="http://schemas.microsoft.com/office/powerpoint/2010/main">
+    <mc:Choice Requires="p14">
+      <p:transition p14:dur="200">
+        <p:fade/>
+      </p:transition>
+    </mc:Choice>
+    <mc:Fallback xmlns="">
+      <p:transition>
+        <p:fade/>
+      </p:transition>
+    </mc:Fallback>
+  </mc:AlternateContent>
+</p:sld>
+</file>
+
+<file path=ppt/slides/slide15.xml><?xml version="1.0" encoding="utf-8"?>
+<p:sld xmlns:a="http://schemas.openxmlformats.org/drawingml/2006/main" xmlns:r="http://schemas.openxmlformats.org/officeDocument/2006/relationships" xmlns:p="http://schemas.openxmlformats.org/presentationml/2006/main">
+  <p:cSld>
+    <p:spTree>
+      <p:nvGrpSpPr>
+        <p:cNvPr id="1" name=""/>
+        <p:cNvGrpSpPr/>
+        <p:nvPr/>
+      </p:nvGrpSpPr>
+      <p:grpSpPr>
+        <a:xfrm>
+          <a:off x="0" y="0"/>
+          <a:ext cx="0" cy="0"/>
+          <a:chOff x="0" y="0"/>
+          <a:chExt cx="0" cy="0"/>
+        </a:xfrm>
+      </p:grpSpPr>
+      <p:sp>
+        <p:nvSpPr>
+          <p:cNvPr id="2" name="Title 1">
+            <a:extLst>
+              <a:ext uri="{FF2B5EF4-FFF2-40B4-BE49-F238E27FC236}">
+                <a16:creationId xmlns:a16="http://schemas.microsoft.com/office/drawing/2014/main" id="{24869EC1-1A5E-674C-992A-67641791AB4A}"/>
+              </a:ext>
+            </a:extLst>
+          </p:cNvPr>
+          <p:cNvSpPr>
+            <a:spLocks noGrp="1"/>
+          </p:cNvSpPr>
+          <p:nvPr>
+            <p:ph type="title"/>
+          </p:nvPr>
+        </p:nvSpPr>
+        <p:spPr/>
+        <p:txBody>
+          <a:bodyPr/>
+          <a:lstStyle/>
+          <a:p>
+            <a:r>
+              <a:rPr lang="en-PH" dirty="0"/>
+              <a:t>Future paper idea</a:t>
+            </a:r>
+          </a:p>
+        </p:txBody>
+      </p:sp>
+      <p:sp>
+        <p:nvSpPr>
+          <p:cNvPr id="3" name="Content Placeholder 2">
+            <a:extLst>
+              <a:ext uri="{FF2B5EF4-FFF2-40B4-BE49-F238E27FC236}">
+                <a16:creationId xmlns:a16="http://schemas.microsoft.com/office/drawing/2014/main" id="{3DE33BE8-A95A-0651-BDC7-BA1501BD52E8}"/>
+              </a:ext>
+            </a:extLst>
+          </p:cNvPr>
+          <p:cNvSpPr>
+            <a:spLocks noGrp="1"/>
+          </p:cNvSpPr>
+          <p:nvPr>
+            <p:ph idx="1"/>
+          </p:nvPr>
+        </p:nvSpPr>
+        <p:spPr/>
+        <p:txBody>
+          <a:bodyPr/>
+          <a:lstStyle/>
+          <a:p>
+            <a:r>
+              <a:rPr lang="en-PH" dirty="0"/>
+              <a:t>Modification on existing models and gain values</a:t>
+            </a:r>
+          </a:p>
+          <a:p>
+            <a:r>
+              <a:rPr lang="en-PH" dirty="0"/>
+              <a:t>Modified </a:t>
+            </a:r>
+            <a:r>
+              <a:rPr lang="en-PH" dirty="0" err="1"/>
+              <a:t>pritchard</a:t>
+            </a:r>
+            <a:endParaRPr lang="en-PH" dirty="0"/>
+          </a:p>
+        </p:txBody>
+      </p:sp>
+      <p:sp>
+        <p:nvSpPr>
+          <p:cNvPr id="4" name="Slide Number Placeholder 3">
+            <a:extLst>
+              <a:ext uri="{FF2B5EF4-FFF2-40B4-BE49-F238E27FC236}">
+                <a16:creationId xmlns:a16="http://schemas.microsoft.com/office/drawing/2014/main" id="{083215AF-115A-501D-0007-25DF4145F42F}"/>
+              </a:ext>
+            </a:extLst>
+          </p:cNvPr>
+          <p:cNvSpPr>
+            <a:spLocks noGrp="1"/>
+          </p:cNvSpPr>
+          <p:nvPr>
+            <p:ph type="sldNum" sz="quarter" idx="12"/>
+          </p:nvPr>
+        </p:nvSpPr>
+        <p:spPr/>
+        <p:txBody>
+          <a:bodyPr/>
+          <a:lstStyle/>
+          <a:p>
+            <a:fld id="{32177519-FDB5-46C8-A273-662D2447F0A4}" type="slidenum">
+              <a:rPr lang="en-PH" smtClean="0"/>
+              <a:t>15</a:t>
+            </a:fld>
+            <a:endParaRPr lang="en-PH"/>
+          </a:p>
+        </p:txBody>
+      </p:sp>
+      <p:sp>
+        <p:nvSpPr>
+          <p:cNvPr id="5" name="Footer Placeholder 4">
+            <a:extLst>
+              <a:ext uri="{FF2B5EF4-FFF2-40B4-BE49-F238E27FC236}">
+                <a16:creationId xmlns:a16="http://schemas.microsoft.com/office/drawing/2014/main" id="{03A59CED-E507-9F74-9712-24C92B753B59}"/>
+              </a:ext>
+            </a:extLst>
+          </p:cNvPr>
+          <p:cNvSpPr>
+            <a:spLocks noGrp="1"/>
+          </p:cNvSpPr>
+          <p:nvPr>
+            <p:ph type="ftr" sz="quarter" idx="3"/>
+          </p:nvPr>
+        </p:nvSpPr>
+        <p:spPr/>
+        <p:txBody>
+          <a:bodyPr/>
+          <a:lstStyle/>
+          <a:p>
+            <a:endParaRPr lang="en-PH" dirty="0"/>
+          </a:p>
+        </p:txBody>
+      </p:sp>
+      <p:sp>
+        <p:nvSpPr>
+          <p:cNvPr id="6" name="Date Placeholder 5">
+            <a:extLst>
+              <a:ext uri="{FF2B5EF4-FFF2-40B4-BE49-F238E27FC236}">
+                <a16:creationId xmlns:a16="http://schemas.microsoft.com/office/drawing/2014/main" id="{722B5594-D0E3-7DA0-CBF7-CF442D445B40}"/>
+              </a:ext>
+            </a:extLst>
+          </p:cNvPr>
+          <p:cNvSpPr>
+            <a:spLocks noGrp="1"/>
+          </p:cNvSpPr>
+          <p:nvPr>
+            <p:ph type="dt" sz="half" idx="2"/>
+          </p:nvPr>
+        </p:nvSpPr>
+        <p:spPr/>
+        <p:txBody>
+          <a:bodyPr/>
+          <a:lstStyle/>
+          <a:p>
+            <a:r>
+              <a:rPr lang="en-US"/>
+              <a:t>2025.02.06</a:t>
+            </a:r>
+            <a:endParaRPr lang="en-PH" dirty="0"/>
+          </a:p>
+        </p:txBody>
+      </p:sp>
+      <p:pic>
+        <p:nvPicPr>
+          <p:cNvPr id="8" name="Picture 7" descr="A white board with blue scribbles on it&#10;&#10;AI-generated content may be incorrect.">
+            <a:extLst>
+              <a:ext uri="{FF2B5EF4-FFF2-40B4-BE49-F238E27FC236}">
+                <a16:creationId xmlns:a16="http://schemas.microsoft.com/office/drawing/2014/main" id="{EEC7A836-DCA6-B620-DE66-8F90733BB0D5}"/>
+              </a:ext>
+            </a:extLst>
+          </p:cNvPr>
+          <p:cNvPicPr>
+            <a:picLocks noChangeAspect="1"/>
+          </p:cNvPicPr>
+          <p:nvPr/>
+        </p:nvPicPr>
+        <p:blipFill>
+          <a:blip r:embed="rId2">
+            <a:extLst>
+              <a:ext uri="{28A0092B-C50C-407E-A947-70E740481C1C}">
+                <a14:useLocalDpi xmlns:a14="http://schemas.microsoft.com/office/drawing/2010/main" val="0"/>
+              </a:ext>
+            </a:extLst>
+          </a:blip>
+          <a:stretch>
+            <a:fillRect/>
+          </a:stretch>
+        </p:blipFill>
+        <p:spPr>
+          <a:xfrm>
+            <a:off x="5968904" y="2308466"/>
+            <a:ext cx="5340089" cy="4005798"/>
+          </a:xfrm>
+          <a:prstGeom prst="rect">
+            <a:avLst/>
+          </a:prstGeom>
+        </p:spPr>
+      </p:pic>
+    </p:spTree>
+    <p:extLst>
+      <p:ext uri="{BB962C8B-B14F-4D97-AF65-F5344CB8AC3E}">
+        <p14:creationId xmlns:p14="http://schemas.microsoft.com/office/powerpoint/2010/main" val="3749590678"/>
+      </p:ext>
+    </p:extLst>
+  </p:cSld>
+  <p:clrMapOvr>
+    <a:masterClrMapping/>
+  </p:clrMapOvr>
+  <mc:AlternateContent xmlns:mc="http://schemas.openxmlformats.org/markup-compatibility/2006" xmlns:p14="http://schemas.microsoft.com/office/powerpoint/2010/main">
+    <mc:Choice Requires="p14">
+      <p:transition p14:dur="200">
+        <p:fade/>
+      </p:transition>
+    </mc:Choice>
+    <mc:Fallback xmlns="">
+      <p:transition>
+        <p:fade/>
+      </p:transition>
+    </mc:Fallback>
+  </mc:AlternateContent>
+</p:sld>
+</file>
+
+<file path=ppt/slides/slide16.xml><?xml version="1.0" encoding="utf-8"?>
+<p:sld xmlns:a="http://schemas.openxmlformats.org/drawingml/2006/main" xmlns:r="http://schemas.openxmlformats.org/officeDocument/2006/relationships" xmlns:p="http://schemas.openxmlformats.org/presentationml/2006/main">
+  <p:cSld>
+    <p:spTree>
+      <p:nvGrpSpPr>
+        <p:cNvPr id="1" name=""/>
+        <p:cNvGrpSpPr/>
+        <p:nvPr/>
+      </p:nvGrpSpPr>
+      <p:grpSpPr>
+        <a:xfrm>
+          <a:off x="0" y="0"/>
+          <a:ext cx="0" cy="0"/>
+          <a:chOff x="0" y="0"/>
+          <a:chExt cx="0" cy="0"/>
+        </a:xfrm>
+      </p:grpSpPr>
+      <p:sp>
+        <p:nvSpPr>
+          <p:cNvPr id="4" name="Slide Number Placeholder 3">
+            <a:extLst>
+              <a:ext uri="{FF2B5EF4-FFF2-40B4-BE49-F238E27FC236}">
+                <a16:creationId xmlns:a16="http://schemas.microsoft.com/office/drawing/2014/main" id="{64232C94-439C-10DF-887D-A01FEB111A37}"/>
+              </a:ext>
+            </a:extLst>
+          </p:cNvPr>
+          <p:cNvSpPr>
+            <a:spLocks noGrp="1"/>
+          </p:cNvSpPr>
+          <p:nvPr>
+            <p:ph type="sldNum" sz="quarter" idx="12"/>
+          </p:nvPr>
+        </p:nvSpPr>
+        <p:spPr/>
+        <p:txBody>
+          <a:bodyPr/>
+          <a:lstStyle/>
+          <a:p>
+            <a:fld id="{32177519-FDB5-46C8-A273-662D2447F0A4}" type="slidenum">
+              <a:rPr lang="en-PH" smtClean="0"/>
+              <a:t>16</a:t>
+            </a:fld>
+            <a:endParaRPr lang="en-PH"/>
+          </a:p>
+        </p:txBody>
+      </p:sp>
+      <p:sp>
+        <p:nvSpPr>
+          <p:cNvPr id="5" name="Footer Placeholder 4">
+            <a:extLst>
+              <a:ext uri="{FF2B5EF4-FFF2-40B4-BE49-F238E27FC236}">
+                <a16:creationId xmlns:a16="http://schemas.microsoft.com/office/drawing/2014/main" id="{4C493E3B-54E6-0E96-76BB-51786EF3E324}"/>
+              </a:ext>
+            </a:extLst>
+          </p:cNvPr>
+          <p:cNvSpPr>
+            <a:spLocks noGrp="1"/>
+          </p:cNvSpPr>
+          <p:nvPr>
+            <p:ph type="ftr" sz="quarter" idx="3"/>
+          </p:nvPr>
+        </p:nvSpPr>
+        <p:spPr/>
+        <p:txBody>
+          <a:bodyPr/>
+          <a:lstStyle/>
+          <a:p>
+            <a:endParaRPr lang="en-PH" dirty="0"/>
+          </a:p>
+        </p:txBody>
+      </p:sp>
+      <p:sp>
+        <p:nvSpPr>
+          <p:cNvPr id="6" name="Date Placeholder 5">
+            <a:extLst>
+              <a:ext uri="{FF2B5EF4-FFF2-40B4-BE49-F238E27FC236}">
+                <a16:creationId xmlns:a16="http://schemas.microsoft.com/office/drawing/2014/main" id="{9C774862-22A5-3004-5FDE-3E9D9BFE33A2}"/>
+              </a:ext>
+            </a:extLst>
+          </p:cNvPr>
+          <p:cNvSpPr>
+            <a:spLocks noGrp="1"/>
+          </p:cNvSpPr>
+          <p:nvPr>
+            <p:ph type="dt" sz="half" idx="2"/>
+          </p:nvPr>
+        </p:nvSpPr>
+        <p:spPr/>
+        <p:txBody>
+          <a:bodyPr/>
+          <a:lstStyle/>
+          <a:p>
+            <a:r>
+              <a:rPr lang="en-US"/>
+              <a:t>2025.02.06</a:t>
+            </a:r>
+            <a:endParaRPr lang="en-PH" dirty="0"/>
+          </a:p>
+        </p:txBody>
+      </p:sp>
+      <p:pic>
+        <p:nvPicPr>
+          <p:cNvPr id="12" name="Content Placeholder 11" descr="A white board with writing on it&#10;&#10;AI-generated content may be incorrect.">
+            <a:extLst>
+              <a:ext uri="{FF2B5EF4-FFF2-40B4-BE49-F238E27FC236}">
+                <a16:creationId xmlns:a16="http://schemas.microsoft.com/office/drawing/2014/main" id="{50956510-99E7-D179-6EE2-99AA4C7D2792}"/>
+              </a:ext>
+            </a:extLst>
+          </p:cNvPr>
+          <p:cNvPicPr>
+            <a:picLocks noGrp="1" noChangeAspect="1"/>
+          </p:cNvPicPr>
+          <p:nvPr>
+            <p:ph idx="4294967295"/>
+          </p:nvPr>
+        </p:nvPicPr>
+        <p:blipFill>
+          <a:blip r:embed="rId2">
+            <a:extLst>
+              <a:ext uri="{28A0092B-C50C-407E-A947-70E740481C1C}">
+                <a14:useLocalDpi xmlns:a14="http://schemas.microsoft.com/office/drawing/2010/main" val="0"/>
+              </a:ext>
+            </a:extLst>
+          </a:blip>
+          <a:stretch>
+            <a:fillRect/>
+          </a:stretch>
+        </p:blipFill>
+        <p:spPr>
+          <a:xfrm>
+            <a:off x="190752" y="425071"/>
+            <a:ext cx="7898559" cy="5923078"/>
+          </a:xfrm>
+        </p:spPr>
+      </p:pic>
+      <p:grpSp>
+        <p:nvGrpSpPr>
+          <p:cNvPr id="19" name="Group 18">
+            <a:extLst>
+              <a:ext uri="{FF2B5EF4-FFF2-40B4-BE49-F238E27FC236}">
+                <a16:creationId xmlns:a16="http://schemas.microsoft.com/office/drawing/2014/main" id="{8921BB28-FD13-9B97-983E-329C3A33D62C}"/>
+              </a:ext>
+            </a:extLst>
+          </p:cNvPr>
+          <p:cNvGrpSpPr/>
+          <p:nvPr/>
+        </p:nvGrpSpPr>
+        <p:grpSpPr>
+          <a:xfrm>
+            <a:off x="8301772" y="857415"/>
+            <a:ext cx="459000" cy="415080"/>
+            <a:chOff x="8301772" y="857415"/>
+            <a:chExt cx="459000" cy="415080"/>
+          </a:xfrm>
+        </p:grpSpPr>
+        <mc:AlternateContent xmlns:mc="http://schemas.openxmlformats.org/markup-compatibility/2006">
+          <mc:Choice xmlns:p14="http://schemas.microsoft.com/office/powerpoint/2010/main" Requires="p14">
+            <p:contentPart p14:bwMode="auto" r:id="rId3">
+              <p14:nvContentPartPr>
+                <p14:cNvPr id="15" name="Ink 14">
+                  <a:extLst>
+                    <a:ext uri="{FF2B5EF4-FFF2-40B4-BE49-F238E27FC236}">
+                      <a16:creationId xmlns:a16="http://schemas.microsoft.com/office/drawing/2014/main" id="{D4BF2575-7D6F-B3DE-FC8F-A10098F02F82}"/>
+                    </a:ext>
+                  </a:extLst>
+                </p14:cNvPr>
+                <p14:cNvContentPartPr/>
+                <p14:nvPr/>
+              </p14:nvContentPartPr>
+              <p14:xfrm>
+                <a:off x="8414452" y="857415"/>
+                <a:ext cx="88920" cy="410400"/>
+              </p14:xfrm>
+            </p:contentPart>
+          </mc:Choice>
+          <mc:Fallback>
+            <p:pic>
+              <p:nvPicPr>
+                <p:cNvPr id="15" name="Ink 14">
+                  <a:extLst>
+                    <a:ext uri="{FF2B5EF4-FFF2-40B4-BE49-F238E27FC236}">
+                      <a16:creationId xmlns:a16="http://schemas.microsoft.com/office/drawing/2014/main" id="{D4BF2575-7D6F-B3DE-FC8F-A10098F02F82}"/>
+                    </a:ext>
+                  </a:extLst>
+                </p:cNvPr>
+                <p:cNvPicPr/>
+                <p:nvPr/>
+              </p:nvPicPr>
+              <p:blipFill>
+                <a:blip r:embed="rId4"/>
+                <a:stretch>
+                  <a:fillRect/>
+                </a:stretch>
+              </p:blipFill>
+              <p:spPr>
+                <a:xfrm>
+                  <a:off x="8378452" y="821415"/>
+                  <a:ext cx="160560" cy="482040"/>
+                </a:xfrm>
+                <a:prstGeom prst="rect">
+                  <a:avLst/>
+                </a:prstGeom>
+              </p:spPr>
+            </p:pic>
+          </mc:Fallback>
+        </mc:AlternateContent>
+        <mc:AlternateContent xmlns:mc="http://schemas.openxmlformats.org/markup-compatibility/2006">
+          <mc:Choice xmlns:p14="http://schemas.microsoft.com/office/powerpoint/2010/main" Requires="p14">
+            <p:contentPart p14:bwMode="auto" r:id="rId5">
+              <p14:nvContentPartPr>
+                <p14:cNvPr id="16" name="Ink 15">
+                  <a:extLst>
+                    <a:ext uri="{FF2B5EF4-FFF2-40B4-BE49-F238E27FC236}">
+                      <a16:creationId xmlns:a16="http://schemas.microsoft.com/office/drawing/2014/main" id="{0D7A5E19-5F8F-D7FD-ECBC-47BA3C85296B}"/>
+                    </a:ext>
+                  </a:extLst>
+                </p14:cNvPr>
+                <p14:cNvContentPartPr/>
+                <p14:nvPr/>
+              </p14:nvContentPartPr>
+              <p14:xfrm>
+                <a:off x="8301772" y="1073415"/>
+                <a:ext cx="331560" cy="199080"/>
+              </p14:xfrm>
+            </p:contentPart>
+          </mc:Choice>
+          <mc:Fallback>
+            <p:pic>
+              <p:nvPicPr>
+                <p:cNvPr id="16" name="Ink 15">
+                  <a:extLst>
+                    <a:ext uri="{FF2B5EF4-FFF2-40B4-BE49-F238E27FC236}">
+                      <a16:creationId xmlns:a16="http://schemas.microsoft.com/office/drawing/2014/main" id="{0D7A5E19-5F8F-D7FD-ECBC-47BA3C85296B}"/>
+                    </a:ext>
+                  </a:extLst>
+                </p:cNvPr>
+                <p:cNvPicPr/>
+                <p:nvPr/>
+              </p:nvPicPr>
+              <p:blipFill>
+                <a:blip r:embed="rId6"/>
+                <a:stretch>
+                  <a:fillRect/>
+                </a:stretch>
+              </p:blipFill>
+              <p:spPr>
+                <a:xfrm>
+                  <a:off x="8266132" y="1037775"/>
+                  <a:ext cx="403200" cy="270720"/>
+                </a:xfrm>
+                <a:prstGeom prst="rect">
+                  <a:avLst/>
+                </a:prstGeom>
+              </p:spPr>
+            </p:pic>
+          </mc:Fallback>
+        </mc:AlternateContent>
+        <mc:AlternateContent xmlns:mc="http://schemas.openxmlformats.org/markup-compatibility/2006">
+          <mc:Choice xmlns:p14="http://schemas.microsoft.com/office/powerpoint/2010/main" Requires="p14">
+            <p:contentPart p14:bwMode="auto" r:id="rId7">
+              <p14:nvContentPartPr>
+                <p14:cNvPr id="17" name="Ink 16">
+                  <a:extLst>
+                    <a:ext uri="{FF2B5EF4-FFF2-40B4-BE49-F238E27FC236}">
+                      <a16:creationId xmlns:a16="http://schemas.microsoft.com/office/drawing/2014/main" id="{82ECE4DC-8E9C-9CA6-26B6-059869AEA83B}"/>
+                    </a:ext>
+                  </a:extLst>
+                </p14:cNvPr>
+                <p14:cNvContentPartPr/>
+                <p14:nvPr/>
+              </p14:nvContentPartPr>
+              <p14:xfrm>
+                <a:off x="8671492" y="1037055"/>
+                <a:ext cx="89280" cy="183600"/>
+              </p14:xfrm>
+            </p:contentPart>
+          </mc:Choice>
+          <mc:Fallback>
+            <p:pic>
+              <p:nvPicPr>
+                <p:cNvPr id="17" name="Ink 16">
+                  <a:extLst>
+                    <a:ext uri="{FF2B5EF4-FFF2-40B4-BE49-F238E27FC236}">
+                      <a16:creationId xmlns:a16="http://schemas.microsoft.com/office/drawing/2014/main" id="{82ECE4DC-8E9C-9CA6-26B6-059869AEA83B}"/>
+                    </a:ext>
+                  </a:extLst>
+                </p:cNvPr>
+                <p:cNvPicPr/>
+                <p:nvPr/>
+              </p:nvPicPr>
+              <p:blipFill>
+                <a:blip r:embed="rId8"/>
+                <a:stretch>
+                  <a:fillRect/>
+                </a:stretch>
+              </p:blipFill>
+              <p:spPr>
+                <a:xfrm>
+                  <a:off x="8635492" y="1001415"/>
+                  <a:ext cx="160920" cy="255240"/>
+                </a:xfrm>
+                <a:prstGeom prst="rect">
+                  <a:avLst/>
+                </a:prstGeom>
+              </p:spPr>
+            </p:pic>
+          </mc:Fallback>
+        </mc:AlternateContent>
+      </p:grpSp>
+      <p:grpSp>
+        <p:nvGrpSpPr>
+          <p:cNvPr id="35" name="Group 34">
+            <a:extLst>
+              <a:ext uri="{FF2B5EF4-FFF2-40B4-BE49-F238E27FC236}">
+                <a16:creationId xmlns:a16="http://schemas.microsoft.com/office/drawing/2014/main" id="{7A3C9346-03EF-D0FF-0EE9-05550697A1FA}"/>
+              </a:ext>
+            </a:extLst>
+          </p:cNvPr>
+          <p:cNvGrpSpPr/>
+          <p:nvPr/>
+        </p:nvGrpSpPr>
+        <p:grpSpPr>
+          <a:xfrm>
+            <a:off x="9065332" y="1000695"/>
+            <a:ext cx="964800" cy="227520"/>
+            <a:chOff x="9065332" y="1000695"/>
+            <a:chExt cx="964800" cy="227520"/>
+          </a:xfrm>
+        </p:grpSpPr>
+        <mc:AlternateContent xmlns:mc="http://schemas.openxmlformats.org/markup-compatibility/2006">
+          <mc:Choice xmlns:p14="http://schemas.microsoft.com/office/powerpoint/2010/main" Requires="p14">
+            <p:contentPart p14:bwMode="auto" r:id="rId9">
+              <p14:nvContentPartPr>
+                <p14:cNvPr id="18" name="Ink 17">
+                  <a:extLst>
+                    <a:ext uri="{FF2B5EF4-FFF2-40B4-BE49-F238E27FC236}">
+                      <a16:creationId xmlns:a16="http://schemas.microsoft.com/office/drawing/2014/main" id="{9FDE7C28-88FF-9534-DC3E-26F4501C1A7D}"/>
+                    </a:ext>
+                  </a:extLst>
+                </p14:cNvPr>
+                <p14:cNvContentPartPr/>
+                <p14:nvPr/>
+              </p14:nvContentPartPr>
+              <p14:xfrm>
+                <a:off x="9065332" y="1012935"/>
+                <a:ext cx="335160" cy="196560"/>
+              </p14:xfrm>
+            </p:contentPart>
+          </mc:Choice>
+          <mc:Fallback>
+            <p:pic>
+              <p:nvPicPr>
+                <p:cNvPr id="18" name="Ink 17">
+                  <a:extLst>
+                    <a:ext uri="{FF2B5EF4-FFF2-40B4-BE49-F238E27FC236}">
+                      <a16:creationId xmlns:a16="http://schemas.microsoft.com/office/drawing/2014/main" id="{9FDE7C28-88FF-9534-DC3E-26F4501C1A7D}"/>
+                    </a:ext>
+                  </a:extLst>
+                </p:cNvPr>
+                <p:cNvPicPr/>
+                <p:nvPr/>
+              </p:nvPicPr>
+              <p:blipFill>
+                <a:blip r:embed="rId10"/>
+                <a:stretch>
+                  <a:fillRect/>
+                </a:stretch>
+              </p:blipFill>
+              <p:spPr>
+                <a:xfrm>
+                  <a:off x="9029332" y="976935"/>
+                  <a:ext cx="406800" cy="268200"/>
+                </a:xfrm>
+                <a:prstGeom prst="rect">
+                  <a:avLst/>
+                </a:prstGeom>
+              </p:spPr>
+            </p:pic>
+          </mc:Fallback>
+        </mc:AlternateContent>
+        <mc:AlternateContent xmlns:mc="http://schemas.openxmlformats.org/markup-compatibility/2006">
+          <mc:Choice xmlns:p14="http://schemas.microsoft.com/office/powerpoint/2010/main" Requires="p14">
+            <p:contentPart p14:bwMode="auto" r:id="rId11">
+              <p14:nvContentPartPr>
+                <p14:cNvPr id="20" name="Ink 19">
+                  <a:extLst>
+                    <a:ext uri="{FF2B5EF4-FFF2-40B4-BE49-F238E27FC236}">
+                      <a16:creationId xmlns:a16="http://schemas.microsoft.com/office/drawing/2014/main" id="{20FAAF2F-F735-1779-C2BF-54C01A8A307E}"/>
+                    </a:ext>
+                  </a:extLst>
+                </p14:cNvPr>
+                <p14:cNvContentPartPr/>
+                <p14:nvPr/>
+              </p14:nvContentPartPr>
+              <p14:xfrm>
+                <a:off x="9564652" y="1050735"/>
+                <a:ext cx="130680" cy="6480"/>
+              </p14:xfrm>
+            </p:contentPart>
+          </mc:Choice>
+          <mc:Fallback>
+            <p:pic>
+              <p:nvPicPr>
+                <p:cNvPr id="20" name="Ink 19">
+                  <a:extLst>
+                    <a:ext uri="{FF2B5EF4-FFF2-40B4-BE49-F238E27FC236}">
+                      <a16:creationId xmlns:a16="http://schemas.microsoft.com/office/drawing/2014/main" id="{20FAAF2F-F735-1779-C2BF-54C01A8A307E}"/>
+                    </a:ext>
+                  </a:extLst>
+                </p:cNvPr>
+                <p:cNvPicPr/>
+                <p:nvPr/>
+              </p:nvPicPr>
+              <p:blipFill>
+                <a:blip r:embed="rId12"/>
+                <a:stretch>
+                  <a:fillRect/>
+                </a:stretch>
+              </p:blipFill>
+              <p:spPr>
+                <a:xfrm>
+                  <a:off x="9528652" y="1015095"/>
+                  <a:ext cx="202320" cy="78120"/>
+                </a:xfrm>
+                <a:prstGeom prst="rect">
+                  <a:avLst/>
+                </a:prstGeom>
+              </p:spPr>
+            </p:pic>
+          </mc:Fallback>
+        </mc:AlternateContent>
+        <mc:AlternateContent xmlns:mc="http://schemas.openxmlformats.org/markup-compatibility/2006">
+          <mc:Choice xmlns:p14="http://schemas.microsoft.com/office/powerpoint/2010/main" Requires="p14">
+            <p:contentPart p14:bwMode="auto" r:id="rId13">
+              <p14:nvContentPartPr>
+                <p14:cNvPr id="21" name="Ink 20">
+                  <a:extLst>
+                    <a:ext uri="{FF2B5EF4-FFF2-40B4-BE49-F238E27FC236}">
+                      <a16:creationId xmlns:a16="http://schemas.microsoft.com/office/drawing/2014/main" id="{A36B54D8-20B6-7D8A-C3E0-4C0CB8B72067}"/>
+                    </a:ext>
+                  </a:extLst>
+                </p14:cNvPr>
+                <p14:cNvContentPartPr/>
+                <p14:nvPr/>
+              </p14:nvContentPartPr>
+              <p14:xfrm>
+                <a:off x="9612892" y="1000695"/>
+                <a:ext cx="48600" cy="132840"/>
+              </p14:xfrm>
+            </p:contentPart>
+          </mc:Choice>
+          <mc:Fallback>
+            <p:pic>
+              <p:nvPicPr>
+                <p:cNvPr id="21" name="Ink 20">
+                  <a:extLst>
+                    <a:ext uri="{FF2B5EF4-FFF2-40B4-BE49-F238E27FC236}">
+                      <a16:creationId xmlns:a16="http://schemas.microsoft.com/office/drawing/2014/main" id="{A36B54D8-20B6-7D8A-C3E0-4C0CB8B72067}"/>
+                    </a:ext>
+                  </a:extLst>
+                </p:cNvPr>
+                <p:cNvPicPr/>
+                <p:nvPr/>
+              </p:nvPicPr>
+              <p:blipFill>
+                <a:blip r:embed="rId14"/>
+                <a:stretch>
+                  <a:fillRect/>
+                </a:stretch>
+              </p:blipFill>
+              <p:spPr>
+                <a:xfrm>
+                  <a:off x="9576892" y="964695"/>
+                  <a:ext cx="120240" cy="204480"/>
+                </a:xfrm>
+                <a:prstGeom prst="rect">
+                  <a:avLst/>
+                </a:prstGeom>
+              </p:spPr>
+            </p:pic>
+          </mc:Fallback>
+        </mc:AlternateContent>
+        <mc:AlternateContent xmlns:mc="http://schemas.openxmlformats.org/markup-compatibility/2006">
+          <mc:Choice xmlns:p14="http://schemas.microsoft.com/office/powerpoint/2010/main" Requires="p14">
+            <p:contentPart p14:bwMode="auto" r:id="rId15">
+              <p14:nvContentPartPr>
+                <p14:cNvPr id="22" name="Ink 21">
+                  <a:extLst>
+                    <a:ext uri="{FF2B5EF4-FFF2-40B4-BE49-F238E27FC236}">
+                      <a16:creationId xmlns:a16="http://schemas.microsoft.com/office/drawing/2014/main" id="{BCD3B364-6144-6556-7FBA-937D7A0E5B6B}"/>
+                    </a:ext>
+                  </a:extLst>
+                </p14:cNvPr>
+                <p14:cNvContentPartPr/>
+                <p14:nvPr/>
+              </p14:nvContentPartPr>
+              <p14:xfrm>
+                <a:off x="9887212" y="1005375"/>
+                <a:ext cx="142920" cy="222840"/>
+              </p14:xfrm>
+            </p:contentPart>
+          </mc:Choice>
+          <mc:Fallback>
+            <p:pic>
+              <p:nvPicPr>
+                <p:cNvPr id="22" name="Ink 21">
+                  <a:extLst>
+                    <a:ext uri="{FF2B5EF4-FFF2-40B4-BE49-F238E27FC236}">
+                      <a16:creationId xmlns:a16="http://schemas.microsoft.com/office/drawing/2014/main" id="{BCD3B364-6144-6556-7FBA-937D7A0E5B6B}"/>
+                    </a:ext>
+                  </a:extLst>
+                </p:cNvPr>
+                <p:cNvPicPr/>
+                <p:nvPr/>
+              </p:nvPicPr>
+              <p:blipFill>
+                <a:blip r:embed="rId16"/>
+                <a:stretch>
+                  <a:fillRect/>
+                </a:stretch>
+              </p:blipFill>
+              <p:spPr>
+                <a:xfrm>
+                  <a:off x="9851212" y="969375"/>
+                  <a:ext cx="214560" cy="294480"/>
+                </a:xfrm>
+                <a:prstGeom prst="rect">
+                  <a:avLst/>
+                </a:prstGeom>
+              </p:spPr>
+            </p:pic>
+          </mc:Fallback>
+        </mc:AlternateContent>
+      </p:grpSp>
+      <p:grpSp>
+        <p:nvGrpSpPr>
+          <p:cNvPr id="34" name="Group 33">
+            <a:extLst>
+              <a:ext uri="{FF2B5EF4-FFF2-40B4-BE49-F238E27FC236}">
+                <a16:creationId xmlns:a16="http://schemas.microsoft.com/office/drawing/2014/main" id="{5FE258ED-0F46-F661-F50A-73F49EFE7687}"/>
+              </a:ext>
+            </a:extLst>
+          </p:cNvPr>
+          <p:cNvGrpSpPr/>
+          <p:nvPr/>
+        </p:nvGrpSpPr>
+        <p:grpSpPr>
+          <a:xfrm>
+            <a:off x="10248652" y="1068015"/>
+            <a:ext cx="98640" cy="60840"/>
+            <a:chOff x="10248652" y="1068015"/>
+            <a:chExt cx="98640" cy="60840"/>
+          </a:xfrm>
+        </p:grpSpPr>
+        <mc:AlternateContent xmlns:mc="http://schemas.openxmlformats.org/markup-compatibility/2006">
+          <mc:Choice xmlns:p14="http://schemas.microsoft.com/office/powerpoint/2010/main" Requires="p14">
+            <p:contentPart p14:bwMode="auto" r:id="rId17">
+              <p14:nvContentPartPr>
+                <p14:cNvPr id="23" name="Ink 22">
+                  <a:extLst>
+                    <a:ext uri="{FF2B5EF4-FFF2-40B4-BE49-F238E27FC236}">
+                      <a16:creationId xmlns:a16="http://schemas.microsoft.com/office/drawing/2014/main" id="{1B5F8883-C6E3-901B-DEB5-244B76FBBFDE}"/>
+                    </a:ext>
+                  </a:extLst>
+                </p14:cNvPr>
+                <p14:cNvContentPartPr/>
+                <p14:nvPr/>
+              </p14:nvContentPartPr>
+              <p14:xfrm>
+                <a:off x="10248652" y="1068015"/>
+                <a:ext cx="98640" cy="9000"/>
+              </p14:xfrm>
+            </p:contentPart>
+          </mc:Choice>
+          <mc:Fallback>
+            <p:pic>
+              <p:nvPicPr>
+                <p:cNvPr id="23" name="Ink 22">
+                  <a:extLst>
+                    <a:ext uri="{FF2B5EF4-FFF2-40B4-BE49-F238E27FC236}">
+                      <a16:creationId xmlns:a16="http://schemas.microsoft.com/office/drawing/2014/main" id="{1B5F8883-C6E3-901B-DEB5-244B76FBBFDE}"/>
+                    </a:ext>
+                  </a:extLst>
+                </p:cNvPr>
+                <p:cNvPicPr/>
+                <p:nvPr/>
+              </p:nvPicPr>
+              <p:blipFill>
+                <a:blip r:embed="rId18"/>
+                <a:stretch>
+                  <a:fillRect/>
+                </a:stretch>
+              </p:blipFill>
+              <p:spPr>
+                <a:xfrm>
+                  <a:off x="10213012" y="1032015"/>
+                  <a:ext cx="170280" cy="80640"/>
+                </a:xfrm>
+                <a:prstGeom prst="rect">
+                  <a:avLst/>
+                </a:prstGeom>
+              </p:spPr>
+            </p:pic>
+          </mc:Fallback>
+        </mc:AlternateContent>
+        <mc:AlternateContent xmlns:mc="http://schemas.openxmlformats.org/markup-compatibility/2006">
+          <mc:Choice xmlns:p14="http://schemas.microsoft.com/office/powerpoint/2010/main" Requires="p14">
+            <p:contentPart p14:bwMode="auto" r:id="rId19">
+              <p14:nvContentPartPr>
+                <p14:cNvPr id="24" name="Ink 23">
+                  <a:extLst>
+                    <a:ext uri="{FF2B5EF4-FFF2-40B4-BE49-F238E27FC236}">
+                      <a16:creationId xmlns:a16="http://schemas.microsoft.com/office/drawing/2014/main" id="{33896427-D997-0B69-7249-69D1258C4D16}"/>
+                    </a:ext>
+                  </a:extLst>
+                </p14:cNvPr>
+                <p14:cNvContentPartPr/>
+                <p14:nvPr/>
+              </p14:nvContentPartPr>
+              <p14:xfrm>
+                <a:off x="10270972" y="1126335"/>
+                <a:ext cx="74880" cy="2520"/>
+              </p14:xfrm>
+            </p:contentPart>
+          </mc:Choice>
+          <mc:Fallback>
+            <p:pic>
+              <p:nvPicPr>
+                <p:cNvPr id="24" name="Ink 23">
+                  <a:extLst>
+                    <a:ext uri="{FF2B5EF4-FFF2-40B4-BE49-F238E27FC236}">
+                      <a16:creationId xmlns:a16="http://schemas.microsoft.com/office/drawing/2014/main" id="{33896427-D997-0B69-7249-69D1258C4D16}"/>
+                    </a:ext>
+                  </a:extLst>
+                </p:cNvPr>
+                <p:cNvPicPr/>
+                <p:nvPr/>
+              </p:nvPicPr>
+              <p:blipFill>
+                <a:blip r:embed="rId20"/>
+                <a:stretch>
+                  <a:fillRect/>
+                </a:stretch>
+              </p:blipFill>
+              <p:spPr>
+                <a:xfrm>
+                  <a:off x="10235332" y="1090335"/>
+                  <a:ext cx="146520" cy="74160"/>
+                </a:xfrm>
+                <a:prstGeom prst="rect">
+                  <a:avLst/>
+                </a:prstGeom>
+              </p:spPr>
+            </p:pic>
+          </mc:Fallback>
+        </mc:AlternateContent>
+      </p:grpSp>
+      <p:grpSp>
+        <p:nvGrpSpPr>
+          <p:cNvPr id="33" name="Group 32">
+            <a:extLst>
+              <a:ext uri="{FF2B5EF4-FFF2-40B4-BE49-F238E27FC236}">
+                <a16:creationId xmlns:a16="http://schemas.microsoft.com/office/drawing/2014/main" id="{6598B996-150A-66F1-2306-E079588F020C}"/>
+              </a:ext>
+            </a:extLst>
+          </p:cNvPr>
+          <p:cNvGrpSpPr/>
+          <p:nvPr/>
+        </p:nvGrpSpPr>
+        <p:grpSpPr>
+          <a:xfrm>
+            <a:off x="10616572" y="936975"/>
+            <a:ext cx="172080" cy="280800"/>
+            <a:chOff x="10616572" y="936975"/>
+            <a:chExt cx="172080" cy="280800"/>
+          </a:xfrm>
+        </p:grpSpPr>
+        <mc:AlternateContent xmlns:mc="http://schemas.openxmlformats.org/markup-compatibility/2006">
+          <mc:Choice xmlns:p14="http://schemas.microsoft.com/office/powerpoint/2010/main" Requires="p14">
+            <p:contentPart p14:bwMode="auto" r:id="rId21">
+              <p14:nvContentPartPr>
+                <p14:cNvPr id="25" name="Ink 24">
+                  <a:extLst>
+                    <a:ext uri="{FF2B5EF4-FFF2-40B4-BE49-F238E27FC236}">
+                      <a16:creationId xmlns:a16="http://schemas.microsoft.com/office/drawing/2014/main" id="{EA631220-D01A-4280-6037-FE576DFA15EE}"/>
+                    </a:ext>
+                  </a:extLst>
+                </p14:cNvPr>
+                <p14:cNvContentPartPr/>
+                <p14:nvPr/>
+              </p14:nvContentPartPr>
+              <p14:xfrm>
+                <a:off x="10616572" y="936975"/>
+                <a:ext cx="99720" cy="277560"/>
+              </p14:xfrm>
+            </p:contentPart>
+          </mc:Choice>
+          <mc:Fallback>
+            <p:pic>
+              <p:nvPicPr>
+                <p:cNvPr id="25" name="Ink 24">
+                  <a:extLst>
+                    <a:ext uri="{FF2B5EF4-FFF2-40B4-BE49-F238E27FC236}">
+                      <a16:creationId xmlns:a16="http://schemas.microsoft.com/office/drawing/2014/main" id="{EA631220-D01A-4280-6037-FE576DFA15EE}"/>
+                    </a:ext>
+                  </a:extLst>
+                </p:cNvPr>
+                <p:cNvPicPr/>
+                <p:nvPr/>
+              </p:nvPicPr>
+              <p:blipFill>
+                <a:blip r:embed="rId22"/>
+                <a:stretch>
+                  <a:fillRect/>
+                </a:stretch>
+              </p:blipFill>
+              <p:spPr>
+                <a:xfrm>
+                  <a:off x="10580932" y="901335"/>
+                  <a:ext cx="171360" cy="349200"/>
+                </a:xfrm>
+                <a:prstGeom prst="rect">
+                  <a:avLst/>
+                </a:prstGeom>
+              </p:spPr>
+            </p:pic>
+          </mc:Fallback>
+        </mc:AlternateContent>
+        <mc:AlternateContent xmlns:mc="http://schemas.openxmlformats.org/markup-compatibility/2006">
+          <mc:Choice xmlns:p14="http://schemas.microsoft.com/office/powerpoint/2010/main" Requires="p14">
+            <p:contentPart p14:bwMode="auto" r:id="rId23">
+              <p14:nvContentPartPr>
+                <p14:cNvPr id="26" name="Ink 25">
+                  <a:extLst>
+                    <a:ext uri="{FF2B5EF4-FFF2-40B4-BE49-F238E27FC236}">
+                      <a16:creationId xmlns:a16="http://schemas.microsoft.com/office/drawing/2014/main" id="{543CD036-5D2C-2189-3091-1376097CD27E}"/>
+                    </a:ext>
+                  </a:extLst>
+                </p14:cNvPr>
+                <p14:cNvContentPartPr/>
+                <p14:nvPr/>
+              </p14:nvContentPartPr>
+              <p14:xfrm>
+                <a:off x="10663732" y="1190415"/>
+                <a:ext cx="124920" cy="27360"/>
+              </p14:xfrm>
+            </p:contentPart>
+          </mc:Choice>
+          <mc:Fallback>
+            <p:pic>
+              <p:nvPicPr>
+                <p:cNvPr id="26" name="Ink 25">
+                  <a:extLst>
+                    <a:ext uri="{FF2B5EF4-FFF2-40B4-BE49-F238E27FC236}">
+                      <a16:creationId xmlns:a16="http://schemas.microsoft.com/office/drawing/2014/main" id="{543CD036-5D2C-2189-3091-1376097CD27E}"/>
+                    </a:ext>
+                  </a:extLst>
+                </p:cNvPr>
+                <p:cNvPicPr/>
+                <p:nvPr/>
+              </p:nvPicPr>
+              <p:blipFill>
+                <a:blip r:embed="rId24"/>
+                <a:stretch>
+                  <a:fillRect/>
+                </a:stretch>
+              </p:blipFill>
+              <p:spPr>
+                <a:xfrm>
+                  <a:off x="10628092" y="1154775"/>
+                  <a:ext cx="196560" cy="99000"/>
+                </a:xfrm>
+                <a:prstGeom prst="rect">
+                  <a:avLst/>
+                </a:prstGeom>
+              </p:spPr>
+            </p:pic>
+          </mc:Fallback>
+        </mc:AlternateContent>
+      </p:grpSp>
+      <p:grpSp>
+        <p:nvGrpSpPr>
+          <p:cNvPr id="32" name="Group 31">
+            <a:extLst>
+              <a:ext uri="{FF2B5EF4-FFF2-40B4-BE49-F238E27FC236}">
+                <a16:creationId xmlns:a16="http://schemas.microsoft.com/office/drawing/2014/main" id="{80452AC0-F269-4F24-0769-8BB52609C2D6}"/>
+              </a:ext>
+            </a:extLst>
+          </p:cNvPr>
+          <p:cNvGrpSpPr/>
+          <p:nvPr/>
+        </p:nvGrpSpPr>
+        <p:grpSpPr>
+          <a:xfrm>
+            <a:off x="8585452" y="513255"/>
+            <a:ext cx="538200" cy="200520"/>
+            <a:chOff x="8585452" y="513255"/>
+            <a:chExt cx="538200" cy="200520"/>
+          </a:xfrm>
+        </p:grpSpPr>
+        <mc:AlternateContent xmlns:mc="http://schemas.openxmlformats.org/markup-compatibility/2006">
+          <mc:Choice xmlns:p14="http://schemas.microsoft.com/office/powerpoint/2010/main" Requires="p14">
+            <p:contentPart p14:bwMode="auto" r:id="rId25">
+              <p14:nvContentPartPr>
+                <p14:cNvPr id="27" name="Ink 26">
+                  <a:extLst>
+                    <a:ext uri="{FF2B5EF4-FFF2-40B4-BE49-F238E27FC236}">
+                      <a16:creationId xmlns:a16="http://schemas.microsoft.com/office/drawing/2014/main" id="{D6186A16-8A61-DD48-BB89-9D83922BB53C}"/>
+                    </a:ext>
+                  </a:extLst>
+                </p14:cNvPr>
+                <p14:cNvContentPartPr/>
+                <p14:nvPr/>
+              </p14:nvContentPartPr>
+              <p14:xfrm>
+                <a:off x="8585452" y="516855"/>
+                <a:ext cx="140760" cy="196920"/>
+              </p14:xfrm>
+            </p:contentPart>
+          </mc:Choice>
+          <mc:Fallback>
+            <p:pic>
+              <p:nvPicPr>
+                <p:cNvPr id="27" name="Ink 26">
+                  <a:extLst>
+                    <a:ext uri="{FF2B5EF4-FFF2-40B4-BE49-F238E27FC236}">
+                      <a16:creationId xmlns:a16="http://schemas.microsoft.com/office/drawing/2014/main" id="{D6186A16-8A61-DD48-BB89-9D83922BB53C}"/>
+                    </a:ext>
+                  </a:extLst>
+                </p:cNvPr>
+                <p:cNvPicPr/>
+                <p:nvPr/>
+              </p:nvPicPr>
+              <p:blipFill>
+                <a:blip r:embed="rId26"/>
+                <a:stretch>
+                  <a:fillRect/>
+                </a:stretch>
+              </p:blipFill>
+              <p:spPr>
+                <a:xfrm>
+                  <a:off x="8549452" y="480855"/>
+                  <a:ext cx="212400" cy="268560"/>
+                </a:xfrm>
+                <a:prstGeom prst="rect">
+                  <a:avLst/>
+                </a:prstGeom>
+              </p:spPr>
+            </p:pic>
+          </mc:Fallback>
+        </mc:AlternateContent>
+        <mc:AlternateContent xmlns:mc="http://schemas.openxmlformats.org/markup-compatibility/2006">
+          <mc:Choice xmlns:p14="http://schemas.microsoft.com/office/powerpoint/2010/main" Requires="p14">
+            <p:contentPart p14:bwMode="auto" r:id="rId27">
+              <p14:nvContentPartPr>
+                <p14:cNvPr id="28" name="Ink 27">
+                  <a:extLst>
+                    <a:ext uri="{FF2B5EF4-FFF2-40B4-BE49-F238E27FC236}">
+                      <a16:creationId xmlns:a16="http://schemas.microsoft.com/office/drawing/2014/main" id="{58A6C5AB-0352-9749-43C5-F1B3C55EF09C}"/>
+                    </a:ext>
+                  </a:extLst>
+                </p14:cNvPr>
+                <p14:cNvContentPartPr/>
+                <p14:nvPr/>
+              </p14:nvContentPartPr>
+              <p14:xfrm>
+                <a:off x="8795332" y="516495"/>
+                <a:ext cx="104400" cy="151560"/>
+              </p14:xfrm>
+            </p:contentPart>
+          </mc:Choice>
+          <mc:Fallback>
+            <p:pic>
+              <p:nvPicPr>
+                <p:cNvPr id="28" name="Ink 27">
+                  <a:extLst>
+                    <a:ext uri="{FF2B5EF4-FFF2-40B4-BE49-F238E27FC236}">
+                      <a16:creationId xmlns:a16="http://schemas.microsoft.com/office/drawing/2014/main" id="{58A6C5AB-0352-9749-43C5-F1B3C55EF09C}"/>
+                    </a:ext>
+                  </a:extLst>
+                </p:cNvPr>
+                <p:cNvPicPr/>
+                <p:nvPr/>
+              </p:nvPicPr>
+              <p:blipFill>
+                <a:blip r:embed="rId28"/>
+                <a:stretch>
+                  <a:fillRect/>
+                </a:stretch>
+              </p:blipFill>
+              <p:spPr>
+                <a:xfrm>
+                  <a:off x="8759332" y="480495"/>
+                  <a:ext cx="176040" cy="223200"/>
+                </a:xfrm>
+                <a:prstGeom prst="rect">
+                  <a:avLst/>
+                </a:prstGeom>
+              </p:spPr>
+            </p:pic>
+          </mc:Fallback>
+        </mc:AlternateContent>
+        <mc:AlternateContent xmlns:mc="http://schemas.openxmlformats.org/markup-compatibility/2006">
+          <mc:Choice xmlns:p14="http://schemas.microsoft.com/office/powerpoint/2010/main" Requires="p14">
+            <p:contentPart p14:bwMode="auto" r:id="rId29">
+              <p14:nvContentPartPr>
+                <p14:cNvPr id="29" name="Ink 28">
+                  <a:extLst>
+                    <a:ext uri="{FF2B5EF4-FFF2-40B4-BE49-F238E27FC236}">
+                      <a16:creationId xmlns:a16="http://schemas.microsoft.com/office/drawing/2014/main" id="{BB8DED4D-36BD-839C-5409-6B143BF40897}"/>
+                    </a:ext>
+                  </a:extLst>
+                </p14:cNvPr>
+                <p14:cNvContentPartPr/>
+                <p14:nvPr/>
+              </p14:nvContentPartPr>
+              <p14:xfrm>
+                <a:off x="8850412" y="671655"/>
+                <a:ext cx="108720" cy="12240"/>
+              </p14:xfrm>
+            </p:contentPart>
+          </mc:Choice>
+          <mc:Fallback>
+            <p:pic>
+              <p:nvPicPr>
+                <p:cNvPr id="29" name="Ink 28">
+                  <a:extLst>
+                    <a:ext uri="{FF2B5EF4-FFF2-40B4-BE49-F238E27FC236}">
+                      <a16:creationId xmlns:a16="http://schemas.microsoft.com/office/drawing/2014/main" id="{BB8DED4D-36BD-839C-5409-6B143BF40897}"/>
+                    </a:ext>
+                  </a:extLst>
+                </p:cNvPr>
+                <p:cNvPicPr/>
+                <p:nvPr/>
+              </p:nvPicPr>
+              <p:blipFill>
+                <a:blip r:embed="rId30"/>
+                <a:stretch>
+                  <a:fillRect/>
+                </a:stretch>
+              </p:blipFill>
+              <p:spPr>
+                <a:xfrm>
+                  <a:off x="8814772" y="636015"/>
+                  <a:ext cx="180360" cy="83880"/>
+                </a:xfrm>
+                <a:prstGeom prst="rect">
+                  <a:avLst/>
+                </a:prstGeom>
+              </p:spPr>
+            </p:pic>
+          </mc:Fallback>
+        </mc:AlternateContent>
+        <mc:AlternateContent xmlns:mc="http://schemas.openxmlformats.org/markup-compatibility/2006">
+          <mc:Choice xmlns:p14="http://schemas.microsoft.com/office/powerpoint/2010/main" Requires="p14">
+            <p:contentPart p14:bwMode="auto" r:id="rId31">
+              <p14:nvContentPartPr>
+                <p14:cNvPr id="30" name="Ink 29">
+                  <a:extLst>
+                    <a:ext uri="{FF2B5EF4-FFF2-40B4-BE49-F238E27FC236}">
+                      <a16:creationId xmlns:a16="http://schemas.microsoft.com/office/drawing/2014/main" id="{676F5BD6-7180-E4E2-3870-81703247D298}"/>
+                    </a:ext>
+                  </a:extLst>
+                </p14:cNvPr>
+                <p14:cNvContentPartPr/>
+                <p14:nvPr/>
+              </p14:nvContentPartPr>
+              <p14:xfrm>
+                <a:off x="9079012" y="513255"/>
+                <a:ext cx="360" cy="360"/>
+              </p14:xfrm>
+            </p:contentPart>
+          </mc:Choice>
+          <mc:Fallback>
+            <p:pic>
+              <p:nvPicPr>
+                <p:cNvPr id="30" name="Ink 29">
+                  <a:extLst>
+                    <a:ext uri="{FF2B5EF4-FFF2-40B4-BE49-F238E27FC236}">
+                      <a16:creationId xmlns:a16="http://schemas.microsoft.com/office/drawing/2014/main" id="{676F5BD6-7180-E4E2-3870-81703247D298}"/>
+                    </a:ext>
+                  </a:extLst>
+                </p:cNvPr>
+                <p:cNvPicPr/>
+                <p:nvPr/>
+              </p:nvPicPr>
+              <p:blipFill>
+                <a:blip r:embed="rId32"/>
+                <a:stretch>
+                  <a:fillRect/>
+                </a:stretch>
+              </p:blipFill>
+              <p:spPr>
+                <a:xfrm>
+                  <a:off x="9043372" y="477615"/>
+                  <a:ext cx="72000" cy="72000"/>
+                </a:xfrm>
+                <a:prstGeom prst="rect">
+                  <a:avLst/>
+                </a:prstGeom>
+              </p:spPr>
+            </p:pic>
+          </mc:Fallback>
+        </mc:AlternateContent>
+        <mc:AlternateContent xmlns:mc="http://schemas.openxmlformats.org/markup-compatibility/2006">
+          <mc:Choice xmlns:p14="http://schemas.microsoft.com/office/powerpoint/2010/main" Requires="p14">
+            <p:contentPart p14:bwMode="auto" r:id="rId33">
+              <p14:nvContentPartPr>
+                <p14:cNvPr id="31" name="Ink 30">
+                  <a:extLst>
+                    <a:ext uri="{FF2B5EF4-FFF2-40B4-BE49-F238E27FC236}">
+                      <a16:creationId xmlns:a16="http://schemas.microsoft.com/office/drawing/2014/main" id="{EBE92F31-ACF8-F6EA-2014-7BC435ECC01C}"/>
+                    </a:ext>
+                  </a:extLst>
+                </p14:cNvPr>
+                <p14:cNvContentPartPr/>
+                <p14:nvPr/>
+              </p14:nvContentPartPr>
+              <p14:xfrm>
+                <a:off x="9108532" y="619455"/>
+                <a:ext cx="15120" cy="14760"/>
+              </p14:xfrm>
+            </p:contentPart>
+          </mc:Choice>
+          <mc:Fallback>
+            <p:pic>
+              <p:nvPicPr>
+                <p:cNvPr id="31" name="Ink 30">
+                  <a:extLst>
+                    <a:ext uri="{FF2B5EF4-FFF2-40B4-BE49-F238E27FC236}">
+                      <a16:creationId xmlns:a16="http://schemas.microsoft.com/office/drawing/2014/main" id="{EBE92F31-ACF8-F6EA-2014-7BC435ECC01C}"/>
+                    </a:ext>
+                  </a:extLst>
+                </p:cNvPr>
+                <p:cNvPicPr/>
+                <p:nvPr/>
+              </p:nvPicPr>
+              <p:blipFill>
+                <a:blip r:embed="rId34"/>
+                <a:stretch>
+                  <a:fillRect/>
+                </a:stretch>
+              </p:blipFill>
+              <p:spPr>
+                <a:xfrm>
+                  <a:off x="9072532" y="583455"/>
+                  <a:ext cx="86760" cy="86400"/>
+                </a:xfrm>
+                <a:prstGeom prst="rect">
+                  <a:avLst/>
+                </a:prstGeom>
+              </p:spPr>
+            </p:pic>
+          </mc:Fallback>
+        </mc:AlternateContent>
+      </p:grpSp>
+      <p:grpSp>
+        <p:nvGrpSpPr>
+          <p:cNvPr id="41" name="Group 40">
+            <a:extLst>
+              <a:ext uri="{FF2B5EF4-FFF2-40B4-BE49-F238E27FC236}">
+                <a16:creationId xmlns:a16="http://schemas.microsoft.com/office/drawing/2014/main" id="{AA2C3887-FD60-E972-7D91-3A7C97F9D14D}"/>
+              </a:ext>
+            </a:extLst>
+          </p:cNvPr>
+          <p:cNvGrpSpPr/>
+          <p:nvPr/>
+        </p:nvGrpSpPr>
+        <p:grpSpPr>
+          <a:xfrm>
+            <a:off x="8489332" y="1835535"/>
+            <a:ext cx="576000" cy="586800"/>
+            <a:chOff x="8489332" y="1835535"/>
+            <a:chExt cx="576000" cy="586800"/>
+          </a:xfrm>
+        </p:grpSpPr>
+        <mc:AlternateContent xmlns:mc="http://schemas.openxmlformats.org/markup-compatibility/2006">
+          <mc:Choice xmlns:p14="http://schemas.microsoft.com/office/powerpoint/2010/main" Requires="p14">
+            <p:contentPart p14:bwMode="auto" r:id="rId35">
+              <p14:nvContentPartPr>
+                <p14:cNvPr id="38" name="Ink 37">
+                  <a:extLst>
+                    <a:ext uri="{FF2B5EF4-FFF2-40B4-BE49-F238E27FC236}">
+                      <a16:creationId xmlns:a16="http://schemas.microsoft.com/office/drawing/2014/main" id="{9718DA86-6957-B9C4-5E71-737AAE2078FD}"/>
+                    </a:ext>
+                  </a:extLst>
+                </p14:cNvPr>
+                <p14:cNvContentPartPr/>
+                <p14:nvPr/>
+              </p14:nvContentPartPr>
+              <p14:xfrm>
+                <a:off x="8489332" y="1835535"/>
+                <a:ext cx="259920" cy="586800"/>
+              </p14:xfrm>
+            </p:contentPart>
+          </mc:Choice>
+          <mc:Fallback>
+            <p:pic>
+              <p:nvPicPr>
+                <p:cNvPr id="38" name="Ink 37">
+                  <a:extLst>
+                    <a:ext uri="{FF2B5EF4-FFF2-40B4-BE49-F238E27FC236}">
+                      <a16:creationId xmlns:a16="http://schemas.microsoft.com/office/drawing/2014/main" id="{9718DA86-6957-B9C4-5E71-737AAE2078FD}"/>
+                    </a:ext>
+                  </a:extLst>
+                </p:cNvPr>
+                <p:cNvPicPr/>
+                <p:nvPr/>
+              </p:nvPicPr>
+              <p:blipFill>
+                <a:blip r:embed="rId36"/>
+                <a:stretch>
+                  <a:fillRect/>
+                </a:stretch>
+              </p:blipFill>
+              <p:spPr>
+                <a:xfrm>
+                  <a:off x="8453692" y="1799535"/>
+                  <a:ext cx="331560" cy="658440"/>
+                </a:xfrm>
+                <a:prstGeom prst="rect">
+                  <a:avLst/>
+                </a:prstGeom>
+              </p:spPr>
+            </p:pic>
+          </mc:Fallback>
+        </mc:AlternateContent>
+        <mc:AlternateContent xmlns:mc="http://schemas.openxmlformats.org/markup-compatibility/2006">
+          <mc:Choice xmlns:p14="http://schemas.microsoft.com/office/powerpoint/2010/main" Requires="p14">
+            <p:contentPart p14:bwMode="auto" r:id="rId37">
+              <p14:nvContentPartPr>
+                <p14:cNvPr id="39" name="Ink 38">
+                  <a:extLst>
+                    <a:ext uri="{FF2B5EF4-FFF2-40B4-BE49-F238E27FC236}">
+                      <a16:creationId xmlns:a16="http://schemas.microsoft.com/office/drawing/2014/main" id="{74AE5522-6B75-7D47-54B5-2BD314748769}"/>
+                    </a:ext>
+                  </a:extLst>
+                </p14:cNvPr>
+                <p14:cNvContentPartPr/>
+                <p14:nvPr/>
+              </p14:nvContentPartPr>
+              <p14:xfrm>
+                <a:off x="8900092" y="1968375"/>
+                <a:ext cx="165240" cy="8640"/>
+              </p14:xfrm>
+            </p:contentPart>
+          </mc:Choice>
+          <mc:Fallback>
+            <p:pic>
+              <p:nvPicPr>
+                <p:cNvPr id="39" name="Ink 38">
+                  <a:extLst>
+                    <a:ext uri="{FF2B5EF4-FFF2-40B4-BE49-F238E27FC236}">
+                      <a16:creationId xmlns:a16="http://schemas.microsoft.com/office/drawing/2014/main" id="{74AE5522-6B75-7D47-54B5-2BD314748769}"/>
+                    </a:ext>
+                  </a:extLst>
+                </p:cNvPr>
+                <p:cNvPicPr/>
+                <p:nvPr/>
+              </p:nvPicPr>
+              <p:blipFill>
+                <a:blip r:embed="rId38"/>
+                <a:stretch>
+                  <a:fillRect/>
+                </a:stretch>
+              </p:blipFill>
+              <p:spPr>
+                <a:xfrm>
+                  <a:off x="8864092" y="1932375"/>
+                  <a:ext cx="236880" cy="80280"/>
+                </a:xfrm>
+                <a:prstGeom prst="rect">
+                  <a:avLst/>
+                </a:prstGeom>
+              </p:spPr>
+            </p:pic>
+          </mc:Fallback>
+        </mc:AlternateContent>
+        <mc:AlternateContent xmlns:mc="http://schemas.openxmlformats.org/markup-compatibility/2006">
+          <mc:Choice xmlns:p14="http://schemas.microsoft.com/office/powerpoint/2010/main" Requires="p14">
+            <p:contentPart p14:bwMode="auto" r:id="rId39">
+              <p14:nvContentPartPr>
+                <p14:cNvPr id="40" name="Ink 39">
+                  <a:extLst>
+                    <a:ext uri="{FF2B5EF4-FFF2-40B4-BE49-F238E27FC236}">
+                      <a16:creationId xmlns:a16="http://schemas.microsoft.com/office/drawing/2014/main" id="{F5A5DBEA-8E2A-CACE-E19B-14B4BE0BDF4D}"/>
+                    </a:ext>
+                  </a:extLst>
+                </p14:cNvPr>
+                <p14:cNvContentPartPr/>
+                <p14:nvPr/>
+              </p14:nvContentPartPr>
+              <p14:xfrm>
+                <a:off x="8928532" y="2077095"/>
+                <a:ext cx="90720" cy="4680"/>
+              </p14:xfrm>
+            </p:contentPart>
+          </mc:Choice>
+          <mc:Fallback>
+            <p:pic>
+              <p:nvPicPr>
+                <p:cNvPr id="40" name="Ink 39">
+                  <a:extLst>
+                    <a:ext uri="{FF2B5EF4-FFF2-40B4-BE49-F238E27FC236}">
+                      <a16:creationId xmlns:a16="http://schemas.microsoft.com/office/drawing/2014/main" id="{F5A5DBEA-8E2A-CACE-E19B-14B4BE0BDF4D}"/>
+                    </a:ext>
+                  </a:extLst>
+                </p:cNvPr>
+                <p:cNvPicPr/>
+                <p:nvPr/>
+              </p:nvPicPr>
+              <p:blipFill>
+                <a:blip r:embed="rId40"/>
+                <a:stretch>
+                  <a:fillRect/>
+                </a:stretch>
+              </p:blipFill>
+              <p:spPr>
+                <a:xfrm>
+                  <a:off x="8892892" y="2041095"/>
+                  <a:ext cx="162360" cy="76320"/>
+                </a:xfrm>
+                <a:prstGeom prst="rect">
+                  <a:avLst/>
+                </a:prstGeom>
+              </p:spPr>
+            </p:pic>
+          </mc:Fallback>
+        </mc:AlternateContent>
+      </p:grpSp>
+      <mc:AlternateContent xmlns:mc="http://schemas.openxmlformats.org/markup-compatibility/2006">
+        <mc:Choice xmlns:p14="http://schemas.microsoft.com/office/powerpoint/2010/main" Requires="p14">
+          <p:contentPart p14:bwMode="auto" r:id="rId41">
+            <p14:nvContentPartPr>
+              <p14:cNvPr id="43" name="Ink 42">
+                <a:extLst>
+                  <a:ext uri="{FF2B5EF4-FFF2-40B4-BE49-F238E27FC236}">
+                    <a16:creationId xmlns:a16="http://schemas.microsoft.com/office/drawing/2014/main" id="{CB49400B-E098-129B-0994-B1B1B3434AB0}"/>
+                  </a:ext>
+                </a:extLst>
+              </p14:cNvPr>
+              <p14:cNvContentPartPr/>
+              <p14:nvPr/>
+            </p14:nvContentPartPr>
+            <p14:xfrm>
+              <a:off x="9489772" y="1824375"/>
+              <a:ext cx="223200" cy="595080"/>
+            </p14:xfrm>
+          </p:contentPart>
+        </mc:Choice>
+        <mc:Fallback>
+          <p:pic>
+            <p:nvPicPr>
+              <p:cNvPr id="43" name="Ink 42">
+                <a:extLst>
+                  <a:ext uri="{FF2B5EF4-FFF2-40B4-BE49-F238E27FC236}">
+                    <a16:creationId xmlns:a16="http://schemas.microsoft.com/office/drawing/2014/main" id="{CB49400B-E098-129B-0994-B1B1B3434AB0}"/>
+                  </a:ext>
+                </a:extLst>
+              </p:cNvPr>
+              <p:cNvPicPr/>
+              <p:nvPr/>
+            </p:nvPicPr>
+            <p:blipFill>
+              <a:blip r:embed="rId42"/>
+              <a:stretch>
+                <a:fillRect/>
+              </a:stretch>
+            </p:blipFill>
+            <p:spPr>
+              <a:xfrm>
+                <a:off x="9453772" y="1788735"/>
+                <a:ext cx="294840" cy="666720"/>
+              </a:xfrm>
+              <a:prstGeom prst="rect">
+                <a:avLst/>
+              </a:prstGeom>
+            </p:spPr>
+          </p:pic>
+        </mc:Fallback>
+      </mc:AlternateContent>
+      <mc:AlternateContent xmlns:mc="http://schemas.openxmlformats.org/markup-compatibility/2006">
+        <mc:Choice xmlns:p14="http://schemas.microsoft.com/office/powerpoint/2010/main" Requires="p14">
+          <p:contentPart p14:bwMode="auto" r:id="rId43">
+            <p14:nvContentPartPr>
+              <p14:cNvPr id="44" name="Ink 43">
+                <a:extLst>
+                  <a:ext uri="{FF2B5EF4-FFF2-40B4-BE49-F238E27FC236}">
+                    <a16:creationId xmlns:a16="http://schemas.microsoft.com/office/drawing/2014/main" id="{BBBD653C-1281-F478-C059-EA0AEC0865EB}"/>
+                  </a:ext>
+                </a:extLst>
+              </p14:cNvPr>
+              <p14:cNvContentPartPr/>
+              <p14:nvPr/>
+            </p14:nvContentPartPr>
+            <p14:xfrm>
+              <a:off x="-492102" y="1990262"/>
+              <a:ext cx="360" cy="360"/>
+            </p14:xfrm>
+          </p:contentPart>
+        </mc:Choice>
+        <mc:Fallback>
+          <p:pic>
+            <p:nvPicPr>
+              <p:cNvPr id="44" name="Ink 43">
+                <a:extLst>
+                  <a:ext uri="{FF2B5EF4-FFF2-40B4-BE49-F238E27FC236}">
+                    <a16:creationId xmlns:a16="http://schemas.microsoft.com/office/drawing/2014/main" id="{BBBD653C-1281-F478-C059-EA0AEC0865EB}"/>
+                  </a:ext>
+                </a:extLst>
+              </p:cNvPr>
+              <p:cNvPicPr/>
+              <p:nvPr/>
+            </p:nvPicPr>
+            <p:blipFill>
+              <a:blip r:embed="rId44"/>
+              <a:stretch>
+                <a:fillRect/>
+              </a:stretch>
+            </p:blipFill>
+            <p:spPr>
+              <a:xfrm>
+                <a:off x="-501102" y="1981622"/>
+                <a:ext cx="18000" cy="18000"/>
+              </a:xfrm>
+              <a:prstGeom prst="rect">
+                <a:avLst/>
+              </a:prstGeom>
+            </p:spPr>
+          </p:pic>
+        </mc:Fallback>
+      </mc:AlternateContent>
+    </p:spTree>
+    <p:extLst>
+      <p:ext uri="{BB962C8B-B14F-4D97-AF65-F5344CB8AC3E}">
+        <p14:creationId xmlns:p14="http://schemas.microsoft.com/office/powerpoint/2010/main" val="438023911"/>
       </p:ext>
     </p:extLst>
   </p:cSld>

--- a/documents/202425s2-RM-Slides-Sy.pptx
+++ b/documents/202425s2-RM-Slides-Sy.pptx
@@ -5,7 +5,7 @@
     <p:sldMasterId id="2147483657" r:id="rId1"/>
   </p:sldMasterIdLst>
   <p:notesMasterIdLst>
-    <p:notesMasterId r:id="rId18"/>
+    <p:notesMasterId r:id="rId20"/>
   </p:notesMasterIdLst>
   <p:sldIdLst>
     <p:sldId id="256" r:id="rId2"/>
@@ -24,6 +24,8 @@
     <p:sldId id="312" r:id="rId15"/>
     <p:sldId id="310" r:id="rId16"/>
     <p:sldId id="311" r:id="rId17"/>
+    <p:sldId id="313" r:id="rId18"/>
+    <p:sldId id="314" r:id="rId19"/>
   </p:sldIdLst>
   <p:sldSz cx="12192000" cy="6858000"/>
   <p:notesSz cx="6858000" cy="9144000"/>
@@ -6824,7 +6826,7 @@
           <a:p>
             <a:fld id="{B2B8B589-3DCF-4CC3-8CB1-8F263020D954}" type="datetimeFigureOut">
               <a:rPr lang="en-PH" smtClean="0"/>
-              <a:t>04/03/2025</a:t>
+              <a:t>04/29/2025</a:t>
             </a:fld>
             <a:endParaRPr lang="en-PH"/>
           </a:p>
@@ -7090,6 +7092,247 @@
     </a:lvl9pPr>
   </p:notesStyle>
 </p:notesMaster>
+</file>
+
+<file path=ppt/notesSlides/notesSlide1.xml><?xml version="1.0" encoding="utf-8"?>
+<p:notes xmlns:a="http://schemas.openxmlformats.org/drawingml/2006/main" xmlns:r="http://schemas.openxmlformats.org/officeDocument/2006/relationships" xmlns:p="http://schemas.openxmlformats.org/presentationml/2006/main">
+  <p:cSld>
+    <p:spTree>
+      <p:nvGrpSpPr>
+        <p:cNvPr id="1" name=""/>
+        <p:cNvGrpSpPr/>
+        <p:nvPr/>
+      </p:nvGrpSpPr>
+      <p:grpSpPr>
+        <a:xfrm>
+          <a:off x="0" y="0"/>
+          <a:ext cx="0" cy="0"/>
+          <a:chOff x="0" y="0"/>
+          <a:chExt cx="0" cy="0"/>
+        </a:xfrm>
+      </p:grpSpPr>
+      <p:sp>
+        <p:nvSpPr>
+          <p:cNvPr id="2" name="Slide Image Placeholder 1"/>
+          <p:cNvSpPr>
+            <a:spLocks noGrp="1" noRot="1" noChangeAspect="1"/>
+          </p:cNvSpPr>
+          <p:nvPr>
+            <p:ph type="sldImg"/>
+          </p:nvPr>
+        </p:nvSpPr>
+        <p:spPr/>
+      </p:sp>
+      <p:sp>
+        <p:nvSpPr>
+          <p:cNvPr id="3" name="Notes Placeholder 2"/>
+          <p:cNvSpPr>
+            <a:spLocks noGrp="1"/>
+          </p:cNvSpPr>
+          <p:nvPr>
+            <p:ph type="body" idx="1"/>
+          </p:nvPr>
+        </p:nvSpPr>
+        <p:spPr/>
+        <p:txBody>
+          <a:bodyPr/>
+          <a:lstStyle/>
+          <a:p>
+            <a:pPr marL="171450" indent="-171450">
+              <a:buFontTx/>
+              <a:buChar char="-"/>
+            </a:pPr>
+            <a:r>
+              <a:rPr lang="en-PH" dirty="0"/>
+              <a:t>PI is no longer recent (1990’s)</a:t>
+            </a:r>
+          </a:p>
+          <a:p>
+            <a:pPr marL="171450" indent="-171450">
+              <a:buFontTx/>
+              <a:buChar char="-"/>
+            </a:pPr>
+            <a:r>
+              <a:rPr lang="en-PH" dirty="0"/>
+              <a:t>During PI, co construction/co facilitator instead of knowledge transfer. Transfer usually for TI</a:t>
+            </a:r>
+          </a:p>
+          <a:p>
+            <a:pPr marL="171450" indent="-171450">
+              <a:buFontTx/>
+              <a:buChar char="-"/>
+            </a:pPr>
+            <a:r>
+              <a:rPr lang="en-PH" dirty="0"/>
+              <a:t>Will put in Pritchard model after (2) for other values of gain</a:t>
+            </a:r>
+          </a:p>
+          <a:p>
+            <a:pPr marL="171450" indent="-171450">
+              <a:buFontTx/>
+              <a:buChar char="-"/>
+            </a:pPr>
+            <a:r>
+              <a:rPr lang="en-PH" dirty="0"/>
+              <a:t>Add in experimental data from previous work (from ma’am </a:t>
+            </a:r>
+            <a:r>
+              <a:rPr lang="en-PH" dirty="0" err="1"/>
+              <a:t>ianne</a:t>
+            </a:r>
+            <a:r>
+              <a:rPr lang="en-PH" dirty="0"/>
+              <a:t>) to Figure 9 (</a:t>
+            </a:r>
+            <a:r>
+              <a:rPr lang="en-PH" dirty="0" err="1"/>
+              <a:t>nitta</a:t>
+            </a:r>
+            <a:r>
+              <a:rPr lang="en-PH" dirty="0"/>
+              <a:t> vs simulation)</a:t>
+            </a:r>
+          </a:p>
+          <a:p>
+            <a:pPr marL="171450" indent="-171450">
+              <a:buFontTx/>
+              <a:buChar char="-"/>
+            </a:pPr>
+            <a:r>
+              <a:rPr lang="en-PH" dirty="0"/>
+              <a:t>Flow of discussion</a:t>
+            </a:r>
+          </a:p>
+          <a:p>
+            <a:pPr marL="628650" lvl="1" indent="-171450">
+              <a:buFontTx/>
+              <a:buChar char="-"/>
+            </a:pPr>
+            <a:r>
+              <a:rPr lang="en-PH" dirty="0" err="1"/>
+              <a:t>Unahin</a:t>
+            </a:r>
+            <a:r>
+              <a:rPr lang="en-PH" dirty="0"/>
+              <a:t> ang figure 7 para </a:t>
+            </a:r>
+            <a:r>
+              <a:rPr lang="en-PH" dirty="0" err="1"/>
+              <a:t>maestablish</a:t>
+            </a:r>
+            <a:r>
+              <a:rPr lang="en-PH" dirty="0"/>
+              <a:t> </a:t>
+            </a:r>
+            <a:r>
+              <a:rPr lang="en-PH" dirty="0" err="1"/>
+              <a:t>na</a:t>
+            </a:r>
+            <a:r>
+              <a:rPr lang="en-PH" dirty="0"/>
+              <a:t> IC is best performing and can be used for comparison against TI</a:t>
+            </a:r>
+          </a:p>
+          <a:p>
+            <a:pPr marL="171450" lvl="0" indent="-171450">
+              <a:buFontTx/>
+              <a:buChar char="-"/>
+            </a:pPr>
+            <a:r>
+              <a:rPr lang="en-PH" dirty="0"/>
+              <a:t>Nuance for TI and PI</a:t>
+            </a:r>
+          </a:p>
+          <a:p>
+            <a:pPr marL="628650" lvl="1" indent="-171450">
+              <a:buFontTx/>
+              <a:buChar char="-"/>
+            </a:pPr>
+            <a:r>
+              <a:rPr lang="en-PH" dirty="0"/>
+              <a:t>Time step label -&gt; iteration</a:t>
+            </a:r>
+          </a:p>
+          <a:p>
+            <a:pPr marL="171450" lvl="0" indent="-171450">
+              <a:buFontTx/>
+              <a:buChar char="-"/>
+            </a:pPr>
+            <a:r>
+              <a:rPr lang="en-PH" dirty="0"/>
+              <a:t>Model difference to explain different SA results</a:t>
+            </a:r>
+          </a:p>
+          <a:p>
+            <a:pPr marL="628650" lvl="1" indent="-171450">
+              <a:buFontTx/>
+              <a:buChar char="-"/>
+            </a:pPr>
+            <a:r>
+              <a:rPr lang="en-PH" dirty="0"/>
+              <a:t>Assumption for this model: learning from the learned students</a:t>
+            </a:r>
+          </a:p>
+          <a:p>
+            <a:pPr marL="628650" lvl="1" indent="-171450">
+              <a:buFontTx/>
+              <a:buChar char="-"/>
+            </a:pPr>
+            <a:r>
+              <a:rPr lang="en-PH" dirty="0"/>
+              <a:t>Experiment: kahit low performing student can co-construct their knowledge</a:t>
+            </a:r>
+          </a:p>
+          <a:p>
+            <a:pPr marL="171450" lvl="0" indent="-171450">
+              <a:buFontTx/>
+              <a:buChar char="-"/>
+            </a:pPr>
+            <a:endParaRPr lang="en-PH" dirty="0"/>
+          </a:p>
+          <a:p>
+            <a:pPr marL="171450" lvl="0" indent="-171450">
+              <a:buFontTx/>
+              <a:buChar char="-"/>
+            </a:pPr>
+            <a:endParaRPr lang="en-PH" dirty="0"/>
+          </a:p>
+        </p:txBody>
+      </p:sp>
+      <p:sp>
+        <p:nvSpPr>
+          <p:cNvPr id="4" name="Slide Number Placeholder 3"/>
+          <p:cNvSpPr>
+            <a:spLocks noGrp="1"/>
+          </p:cNvSpPr>
+          <p:nvPr>
+            <p:ph type="sldNum" sz="quarter" idx="5"/>
+          </p:nvPr>
+        </p:nvSpPr>
+        <p:spPr/>
+        <p:txBody>
+          <a:bodyPr/>
+          <a:lstStyle/>
+          <a:p>
+            <a:fld id="{99E4DEC7-B541-49CD-9364-4AC7105E6440}" type="slidenum">
+              <a:rPr lang="en-PH" smtClean="0"/>
+              <a:t>18</a:t>
+            </a:fld>
+            <a:endParaRPr lang="en-PH"/>
+          </a:p>
+        </p:txBody>
+      </p:sp>
+    </p:spTree>
+    <p:extLst>
+      <p:ext uri="{BB962C8B-B14F-4D97-AF65-F5344CB8AC3E}">
+        <p14:creationId xmlns:p14="http://schemas.microsoft.com/office/powerpoint/2010/main" val="508189511"/>
+      </p:ext>
+    </p:extLst>
+  </p:cSld>
+  <p:clrMapOvr>
+    <a:masterClrMapping/>
+  </p:clrMapOvr>
+</p:notes>
 </file>
 
 <file path=ppt/slideLayouts/slideLayout1.xml><?xml version="1.0" encoding="utf-8"?>
@@ -7508,7 +7751,7 @@
           <a:p>
             <a:fld id="{843CB0FE-86D9-4EF0-AD61-3F5691C83FED}" type="datetimeFigureOut">
               <a:rPr lang="en-PH" smtClean="0"/>
-              <a:t>04/03/2025</a:t>
+              <a:t>04/29/2025</a:t>
             </a:fld>
             <a:endParaRPr lang="en-PH"/>
           </a:p>
@@ -14813,8 +15056,8 @@
             <a:chExt cx="459000" cy="415080"/>
           </a:xfrm>
         </p:grpSpPr>
-        <mc:AlternateContent xmlns:mc="http://schemas.openxmlformats.org/markup-compatibility/2006">
-          <mc:Choice xmlns:p14="http://schemas.microsoft.com/office/powerpoint/2010/main" Requires="p14">
+        <mc:AlternateContent xmlns:mc="http://schemas.openxmlformats.org/markup-compatibility/2006" xmlns:p14="http://schemas.microsoft.com/office/powerpoint/2010/main">
+          <mc:Choice Requires="p14">
             <p:contentPart p14:bwMode="auto" r:id="rId3">
               <p14:nvContentPartPr>
                 <p14:cNvPr id="15" name="Ink 14">
@@ -14833,7 +15076,7 @@
               </p14:xfrm>
             </p:contentPart>
           </mc:Choice>
-          <mc:Fallback>
+          <mc:Fallback xmlns="">
             <p:pic>
               <p:nvPicPr>
                 <p:cNvPr id="15" name="Ink 14">
@@ -14864,8 +15107,8 @@
             </p:pic>
           </mc:Fallback>
         </mc:AlternateContent>
-        <mc:AlternateContent xmlns:mc="http://schemas.openxmlformats.org/markup-compatibility/2006">
-          <mc:Choice xmlns:p14="http://schemas.microsoft.com/office/powerpoint/2010/main" Requires="p14">
+        <mc:AlternateContent xmlns:mc="http://schemas.openxmlformats.org/markup-compatibility/2006" xmlns:p14="http://schemas.microsoft.com/office/powerpoint/2010/main">
+          <mc:Choice Requires="p14">
             <p:contentPart p14:bwMode="auto" r:id="rId5">
               <p14:nvContentPartPr>
                 <p14:cNvPr id="16" name="Ink 15">
@@ -14884,7 +15127,7 @@
               </p14:xfrm>
             </p:contentPart>
           </mc:Choice>
-          <mc:Fallback>
+          <mc:Fallback xmlns="">
             <p:pic>
               <p:nvPicPr>
                 <p:cNvPr id="16" name="Ink 15">
@@ -14915,8 +15158,8 @@
             </p:pic>
           </mc:Fallback>
         </mc:AlternateContent>
-        <mc:AlternateContent xmlns:mc="http://schemas.openxmlformats.org/markup-compatibility/2006">
-          <mc:Choice xmlns:p14="http://schemas.microsoft.com/office/powerpoint/2010/main" Requires="p14">
+        <mc:AlternateContent xmlns:mc="http://schemas.openxmlformats.org/markup-compatibility/2006" xmlns:p14="http://schemas.microsoft.com/office/powerpoint/2010/main">
+          <mc:Choice Requires="p14">
             <p:contentPart p14:bwMode="auto" r:id="rId7">
               <p14:nvContentPartPr>
                 <p14:cNvPr id="17" name="Ink 16">
@@ -14935,7 +15178,7 @@
               </p14:xfrm>
             </p:contentPart>
           </mc:Choice>
-          <mc:Fallback>
+          <mc:Fallback xmlns="">
             <p:pic>
               <p:nvPicPr>
                 <p:cNvPr id="17" name="Ink 16">
@@ -14987,8 +15230,8 @@
             <a:chExt cx="964800" cy="227520"/>
           </a:xfrm>
         </p:grpSpPr>
-        <mc:AlternateContent xmlns:mc="http://schemas.openxmlformats.org/markup-compatibility/2006">
-          <mc:Choice xmlns:p14="http://schemas.microsoft.com/office/powerpoint/2010/main" Requires="p14">
+        <mc:AlternateContent xmlns:mc="http://schemas.openxmlformats.org/markup-compatibility/2006" xmlns:p14="http://schemas.microsoft.com/office/powerpoint/2010/main">
+          <mc:Choice Requires="p14">
             <p:contentPart p14:bwMode="auto" r:id="rId9">
               <p14:nvContentPartPr>
                 <p14:cNvPr id="18" name="Ink 17">
@@ -15007,7 +15250,7 @@
               </p14:xfrm>
             </p:contentPart>
           </mc:Choice>
-          <mc:Fallback>
+          <mc:Fallback xmlns="">
             <p:pic>
               <p:nvPicPr>
                 <p:cNvPr id="18" name="Ink 17">
@@ -15038,8 +15281,8 @@
             </p:pic>
           </mc:Fallback>
         </mc:AlternateContent>
-        <mc:AlternateContent xmlns:mc="http://schemas.openxmlformats.org/markup-compatibility/2006">
-          <mc:Choice xmlns:p14="http://schemas.microsoft.com/office/powerpoint/2010/main" Requires="p14">
+        <mc:AlternateContent xmlns:mc="http://schemas.openxmlformats.org/markup-compatibility/2006" xmlns:p14="http://schemas.microsoft.com/office/powerpoint/2010/main">
+          <mc:Choice Requires="p14">
             <p:contentPart p14:bwMode="auto" r:id="rId11">
               <p14:nvContentPartPr>
                 <p14:cNvPr id="20" name="Ink 19">
@@ -15058,7 +15301,7 @@
               </p14:xfrm>
             </p:contentPart>
           </mc:Choice>
-          <mc:Fallback>
+          <mc:Fallback xmlns="">
             <p:pic>
               <p:nvPicPr>
                 <p:cNvPr id="20" name="Ink 19">
@@ -15089,8 +15332,8 @@
             </p:pic>
           </mc:Fallback>
         </mc:AlternateContent>
-        <mc:AlternateContent xmlns:mc="http://schemas.openxmlformats.org/markup-compatibility/2006">
-          <mc:Choice xmlns:p14="http://schemas.microsoft.com/office/powerpoint/2010/main" Requires="p14">
+        <mc:AlternateContent xmlns:mc="http://schemas.openxmlformats.org/markup-compatibility/2006" xmlns:p14="http://schemas.microsoft.com/office/powerpoint/2010/main">
+          <mc:Choice Requires="p14">
             <p:contentPart p14:bwMode="auto" r:id="rId13">
               <p14:nvContentPartPr>
                 <p14:cNvPr id="21" name="Ink 20">
@@ -15109,7 +15352,7 @@
               </p14:xfrm>
             </p:contentPart>
           </mc:Choice>
-          <mc:Fallback>
+          <mc:Fallback xmlns="">
             <p:pic>
               <p:nvPicPr>
                 <p:cNvPr id="21" name="Ink 20">
@@ -15140,8 +15383,8 @@
             </p:pic>
           </mc:Fallback>
         </mc:AlternateContent>
-        <mc:AlternateContent xmlns:mc="http://schemas.openxmlformats.org/markup-compatibility/2006">
-          <mc:Choice xmlns:p14="http://schemas.microsoft.com/office/powerpoint/2010/main" Requires="p14">
+        <mc:AlternateContent xmlns:mc="http://schemas.openxmlformats.org/markup-compatibility/2006" xmlns:p14="http://schemas.microsoft.com/office/powerpoint/2010/main">
+          <mc:Choice Requires="p14">
             <p:contentPart p14:bwMode="auto" r:id="rId15">
               <p14:nvContentPartPr>
                 <p14:cNvPr id="22" name="Ink 21">
@@ -15160,7 +15403,7 @@
               </p14:xfrm>
             </p:contentPart>
           </mc:Choice>
-          <mc:Fallback>
+          <mc:Fallback xmlns="">
             <p:pic>
               <p:nvPicPr>
                 <p:cNvPr id="22" name="Ink 21">
@@ -15212,8 +15455,8 @@
             <a:chExt cx="98640" cy="60840"/>
           </a:xfrm>
         </p:grpSpPr>
-        <mc:AlternateContent xmlns:mc="http://schemas.openxmlformats.org/markup-compatibility/2006">
-          <mc:Choice xmlns:p14="http://schemas.microsoft.com/office/powerpoint/2010/main" Requires="p14">
+        <mc:AlternateContent xmlns:mc="http://schemas.openxmlformats.org/markup-compatibility/2006" xmlns:p14="http://schemas.microsoft.com/office/powerpoint/2010/main">
+          <mc:Choice Requires="p14">
             <p:contentPart p14:bwMode="auto" r:id="rId17">
               <p14:nvContentPartPr>
                 <p14:cNvPr id="23" name="Ink 22">
@@ -15232,7 +15475,7 @@
               </p14:xfrm>
             </p:contentPart>
           </mc:Choice>
-          <mc:Fallback>
+          <mc:Fallback xmlns="">
             <p:pic>
               <p:nvPicPr>
                 <p:cNvPr id="23" name="Ink 22">
@@ -15263,8 +15506,8 @@
             </p:pic>
           </mc:Fallback>
         </mc:AlternateContent>
-        <mc:AlternateContent xmlns:mc="http://schemas.openxmlformats.org/markup-compatibility/2006">
-          <mc:Choice xmlns:p14="http://schemas.microsoft.com/office/powerpoint/2010/main" Requires="p14">
+        <mc:AlternateContent xmlns:mc="http://schemas.openxmlformats.org/markup-compatibility/2006" xmlns:p14="http://schemas.microsoft.com/office/powerpoint/2010/main">
+          <mc:Choice Requires="p14">
             <p:contentPart p14:bwMode="auto" r:id="rId19">
               <p14:nvContentPartPr>
                 <p14:cNvPr id="24" name="Ink 23">
@@ -15283,7 +15526,7 @@
               </p14:xfrm>
             </p:contentPart>
           </mc:Choice>
-          <mc:Fallback>
+          <mc:Fallback xmlns="">
             <p:pic>
               <p:nvPicPr>
                 <p:cNvPr id="24" name="Ink 23">
@@ -15335,8 +15578,8 @@
             <a:chExt cx="172080" cy="280800"/>
           </a:xfrm>
         </p:grpSpPr>
-        <mc:AlternateContent xmlns:mc="http://schemas.openxmlformats.org/markup-compatibility/2006">
-          <mc:Choice xmlns:p14="http://schemas.microsoft.com/office/powerpoint/2010/main" Requires="p14">
+        <mc:AlternateContent xmlns:mc="http://schemas.openxmlformats.org/markup-compatibility/2006" xmlns:p14="http://schemas.microsoft.com/office/powerpoint/2010/main">
+          <mc:Choice Requires="p14">
             <p:contentPart p14:bwMode="auto" r:id="rId21">
               <p14:nvContentPartPr>
                 <p14:cNvPr id="25" name="Ink 24">
@@ -15355,7 +15598,7 @@
               </p14:xfrm>
             </p:contentPart>
           </mc:Choice>
-          <mc:Fallback>
+          <mc:Fallback xmlns="">
             <p:pic>
               <p:nvPicPr>
                 <p:cNvPr id="25" name="Ink 24">
@@ -15386,8 +15629,8 @@
             </p:pic>
           </mc:Fallback>
         </mc:AlternateContent>
-        <mc:AlternateContent xmlns:mc="http://schemas.openxmlformats.org/markup-compatibility/2006">
-          <mc:Choice xmlns:p14="http://schemas.microsoft.com/office/powerpoint/2010/main" Requires="p14">
+        <mc:AlternateContent xmlns:mc="http://schemas.openxmlformats.org/markup-compatibility/2006" xmlns:p14="http://schemas.microsoft.com/office/powerpoint/2010/main">
+          <mc:Choice Requires="p14">
             <p:contentPart p14:bwMode="auto" r:id="rId23">
               <p14:nvContentPartPr>
                 <p14:cNvPr id="26" name="Ink 25">
@@ -15406,7 +15649,7 @@
               </p14:xfrm>
             </p:contentPart>
           </mc:Choice>
-          <mc:Fallback>
+          <mc:Fallback xmlns="">
             <p:pic>
               <p:nvPicPr>
                 <p:cNvPr id="26" name="Ink 25">
@@ -15458,8 +15701,8 @@
             <a:chExt cx="538200" cy="200520"/>
           </a:xfrm>
         </p:grpSpPr>
-        <mc:AlternateContent xmlns:mc="http://schemas.openxmlformats.org/markup-compatibility/2006">
-          <mc:Choice xmlns:p14="http://schemas.microsoft.com/office/powerpoint/2010/main" Requires="p14">
+        <mc:AlternateContent xmlns:mc="http://schemas.openxmlformats.org/markup-compatibility/2006" xmlns:p14="http://schemas.microsoft.com/office/powerpoint/2010/main">
+          <mc:Choice Requires="p14">
             <p:contentPart p14:bwMode="auto" r:id="rId25">
               <p14:nvContentPartPr>
                 <p14:cNvPr id="27" name="Ink 26">
@@ -15478,7 +15721,7 @@
               </p14:xfrm>
             </p:contentPart>
           </mc:Choice>
-          <mc:Fallback>
+          <mc:Fallback xmlns="">
             <p:pic>
               <p:nvPicPr>
                 <p:cNvPr id="27" name="Ink 26">
@@ -15509,8 +15752,8 @@
             </p:pic>
           </mc:Fallback>
         </mc:AlternateContent>
-        <mc:AlternateContent xmlns:mc="http://schemas.openxmlformats.org/markup-compatibility/2006">
-          <mc:Choice xmlns:p14="http://schemas.microsoft.com/office/powerpoint/2010/main" Requires="p14">
+        <mc:AlternateContent xmlns:mc="http://schemas.openxmlformats.org/markup-compatibility/2006" xmlns:p14="http://schemas.microsoft.com/office/powerpoint/2010/main">
+          <mc:Choice Requires="p14">
             <p:contentPart p14:bwMode="auto" r:id="rId27">
               <p14:nvContentPartPr>
                 <p14:cNvPr id="28" name="Ink 27">
@@ -15529,7 +15772,7 @@
               </p14:xfrm>
             </p:contentPart>
           </mc:Choice>
-          <mc:Fallback>
+          <mc:Fallback xmlns="">
             <p:pic>
               <p:nvPicPr>
                 <p:cNvPr id="28" name="Ink 27">
@@ -15560,8 +15803,8 @@
             </p:pic>
           </mc:Fallback>
         </mc:AlternateContent>
-        <mc:AlternateContent xmlns:mc="http://schemas.openxmlformats.org/markup-compatibility/2006">
-          <mc:Choice xmlns:p14="http://schemas.microsoft.com/office/powerpoint/2010/main" Requires="p14">
+        <mc:AlternateContent xmlns:mc="http://schemas.openxmlformats.org/markup-compatibility/2006" xmlns:p14="http://schemas.microsoft.com/office/powerpoint/2010/main">
+          <mc:Choice Requires="p14">
             <p:contentPart p14:bwMode="auto" r:id="rId29">
               <p14:nvContentPartPr>
                 <p14:cNvPr id="29" name="Ink 28">
@@ -15580,7 +15823,7 @@
               </p14:xfrm>
             </p:contentPart>
           </mc:Choice>
-          <mc:Fallback>
+          <mc:Fallback xmlns="">
             <p:pic>
               <p:nvPicPr>
                 <p:cNvPr id="29" name="Ink 28">
@@ -15611,8 +15854,8 @@
             </p:pic>
           </mc:Fallback>
         </mc:AlternateContent>
-        <mc:AlternateContent xmlns:mc="http://schemas.openxmlformats.org/markup-compatibility/2006">
-          <mc:Choice xmlns:p14="http://schemas.microsoft.com/office/powerpoint/2010/main" Requires="p14">
+        <mc:AlternateContent xmlns:mc="http://schemas.openxmlformats.org/markup-compatibility/2006" xmlns:p14="http://schemas.microsoft.com/office/powerpoint/2010/main">
+          <mc:Choice Requires="p14">
             <p:contentPart p14:bwMode="auto" r:id="rId31">
               <p14:nvContentPartPr>
                 <p14:cNvPr id="30" name="Ink 29">
@@ -15631,7 +15874,7 @@
               </p14:xfrm>
             </p:contentPart>
           </mc:Choice>
-          <mc:Fallback>
+          <mc:Fallback xmlns="">
             <p:pic>
               <p:nvPicPr>
                 <p:cNvPr id="30" name="Ink 29">
@@ -15662,8 +15905,8 @@
             </p:pic>
           </mc:Fallback>
         </mc:AlternateContent>
-        <mc:AlternateContent xmlns:mc="http://schemas.openxmlformats.org/markup-compatibility/2006">
-          <mc:Choice xmlns:p14="http://schemas.microsoft.com/office/powerpoint/2010/main" Requires="p14">
+        <mc:AlternateContent xmlns:mc="http://schemas.openxmlformats.org/markup-compatibility/2006" xmlns:p14="http://schemas.microsoft.com/office/powerpoint/2010/main">
+          <mc:Choice Requires="p14">
             <p:contentPart p14:bwMode="auto" r:id="rId33">
               <p14:nvContentPartPr>
                 <p14:cNvPr id="31" name="Ink 30">
@@ -15682,7 +15925,7 @@
               </p14:xfrm>
             </p:contentPart>
           </mc:Choice>
-          <mc:Fallback>
+          <mc:Fallback xmlns="">
             <p:pic>
               <p:nvPicPr>
                 <p:cNvPr id="31" name="Ink 30">
@@ -15734,8 +15977,8 @@
             <a:chExt cx="576000" cy="586800"/>
           </a:xfrm>
         </p:grpSpPr>
-        <mc:AlternateContent xmlns:mc="http://schemas.openxmlformats.org/markup-compatibility/2006">
-          <mc:Choice xmlns:p14="http://schemas.microsoft.com/office/powerpoint/2010/main" Requires="p14">
+        <mc:AlternateContent xmlns:mc="http://schemas.openxmlformats.org/markup-compatibility/2006" xmlns:p14="http://schemas.microsoft.com/office/powerpoint/2010/main">
+          <mc:Choice Requires="p14">
             <p:contentPart p14:bwMode="auto" r:id="rId35">
               <p14:nvContentPartPr>
                 <p14:cNvPr id="38" name="Ink 37">
@@ -15754,7 +15997,7 @@
               </p14:xfrm>
             </p:contentPart>
           </mc:Choice>
-          <mc:Fallback>
+          <mc:Fallback xmlns="">
             <p:pic>
               <p:nvPicPr>
                 <p:cNvPr id="38" name="Ink 37">
@@ -15785,8 +16028,8 @@
             </p:pic>
           </mc:Fallback>
         </mc:AlternateContent>
-        <mc:AlternateContent xmlns:mc="http://schemas.openxmlformats.org/markup-compatibility/2006">
-          <mc:Choice xmlns:p14="http://schemas.microsoft.com/office/powerpoint/2010/main" Requires="p14">
+        <mc:AlternateContent xmlns:mc="http://schemas.openxmlformats.org/markup-compatibility/2006" xmlns:p14="http://schemas.microsoft.com/office/powerpoint/2010/main">
+          <mc:Choice Requires="p14">
             <p:contentPart p14:bwMode="auto" r:id="rId37">
               <p14:nvContentPartPr>
                 <p14:cNvPr id="39" name="Ink 38">
@@ -15805,7 +16048,7 @@
               </p14:xfrm>
             </p:contentPart>
           </mc:Choice>
-          <mc:Fallback>
+          <mc:Fallback xmlns="">
             <p:pic>
               <p:nvPicPr>
                 <p:cNvPr id="39" name="Ink 38">
@@ -15836,8 +16079,8 @@
             </p:pic>
           </mc:Fallback>
         </mc:AlternateContent>
-        <mc:AlternateContent xmlns:mc="http://schemas.openxmlformats.org/markup-compatibility/2006">
-          <mc:Choice xmlns:p14="http://schemas.microsoft.com/office/powerpoint/2010/main" Requires="p14">
+        <mc:AlternateContent xmlns:mc="http://schemas.openxmlformats.org/markup-compatibility/2006" xmlns:p14="http://schemas.microsoft.com/office/powerpoint/2010/main">
+          <mc:Choice Requires="p14">
             <p:contentPart p14:bwMode="auto" r:id="rId39">
               <p14:nvContentPartPr>
                 <p14:cNvPr id="40" name="Ink 39">
@@ -15856,7 +16099,7 @@
               </p14:xfrm>
             </p:contentPart>
           </mc:Choice>
-          <mc:Fallback>
+          <mc:Fallback xmlns="">
             <p:pic>
               <p:nvPicPr>
                 <p:cNvPr id="40" name="Ink 39">
@@ -15888,8 +16131,8 @@
           </mc:Fallback>
         </mc:AlternateContent>
       </p:grpSp>
-      <mc:AlternateContent xmlns:mc="http://schemas.openxmlformats.org/markup-compatibility/2006">
-        <mc:Choice xmlns:p14="http://schemas.microsoft.com/office/powerpoint/2010/main" Requires="p14">
+      <mc:AlternateContent xmlns:mc="http://schemas.openxmlformats.org/markup-compatibility/2006" xmlns:p14="http://schemas.microsoft.com/office/powerpoint/2010/main">
+        <mc:Choice Requires="p14">
           <p:contentPart p14:bwMode="auto" r:id="rId41">
             <p14:nvContentPartPr>
               <p14:cNvPr id="43" name="Ink 42">
@@ -15908,7 +16151,7 @@
             </p14:xfrm>
           </p:contentPart>
         </mc:Choice>
-        <mc:Fallback>
+        <mc:Fallback xmlns="">
           <p:pic>
             <p:nvPicPr>
               <p:cNvPr id="43" name="Ink 42">
@@ -15939,8 +16182,8 @@
           </p:pic>
         </mc:Fallback>
       </mc:AlternateContent>
-      <mc:AlternateContent xmlns:mc="http://schemas.openxmlformats.org/markup-compatibility/2006">
-        <mc:Choice xmlns:p14="http://schemas.microsoft.com/office/powerpoint/2010/main" Requires="p14">
+      <mc:AlternateContent xmlns:mc="http://schemas.openxmlformats.org/markup-compatibility/2006" xmlns:p14="http://schemas.microsoft.com/office/powerpoint/2010/main">
+        <mc:Choice Requires="p14">
           <p:contentPart p14:bwMode="auto" r:id="rId43">
             <p14:nvContentPartPr>
               <p14:cNvPr id="44" name="Ink 43">
@@ -15959,7 +16202,7 @@
             </p14:xfrm>
           </p:contentPart>
         </mc:Choice>
-        <mc:Fallback>
+        <mc:Fallback xmlns="">
           <p:pic>
             <p:nvPicPr>
               <p:cNvPr id="44" name="Ink 43">
@@ -15994,6 +16237,365 @@
     <p:extLst>
       <p:ext uri="{BB962C8B-B14F-4D97-AF65-F5344CB8AC3E}">
         <p14:creationId xmlns:p14="http://schemas.microsoft.com/office/powerpoint/2010/main" val="438023911"/>
+      </p:ext>
+    </p:extLst>
+  </p:cSld>
+  <p:clrMapOvr>
+    <a:masterClrMapping/>
+  </p:clrMapOvr>
+  <mc:AlternateContent xmlns:mc="http://schemas.openxmlformats.org/markup-compatibility/2006" xmlns:p14="http://schemas.microsoft.com/office/powerpoint/2010/main">
+    <mc:Choice Requires="p14">
+      <p:transition p14:dur="200">
+        <p:fade/>
+      </p:transition>
+    </mc:Choice>
+    <mc:Fallback xmlns="">
+      <p:transition>
+        <p:fade/>
+      </p:transition>
+    </mc:Fallback>
+  </mc:AlternateContent>
+</p:sld>
+</file>
+
+<file path=ppt/slides/slide17.xml><?xml version="1.0" encoding="utf-8"?>
+<p:sld xmlns:a="http://schemas.openxmlformats.org/drawingml/2006/main" xmlns:r="http://schemas.openxmlformats.org/officeDocument/2006/relationships" xmlns:p="http://schemas.openxmlformats.org/presentationml/2006/main">
+  <p:cSld>
+    <p:spTree>
+      <p:nvGrpSpPr>
+        <p:cNvPr id="1" name=""/>
+        <p:cNvGrpSpPr/>
+        <p:nvPr/>
+      </p:nvGrpSpPr>
+      <p:grpSpPr>
+        <a:xfrm>
+          <a:off x="0" y="0"/>
+          <a:ext cx="0" cy="0"/>
+          <a:chOff x="0" y="0"/>
+          <a:chExt cx="0" cy="0"/>
+        </a:xfrm>
+      </p:grpSpPr>
+      <p:sp>
+        <p:nvSpPr>
+          <p:cNvPr id="2" name="Title 1">
+            <a:extLst>
+              <a:ext uri="{FF2B5EF4-FFF2-40B4-BE49-F238E27FC236}">
+                <a16:creationId xmlns:a16="http://schemas.microsoft.com/office/drawing/2014/main" id="{5EC769FD-3045-255C-E06F-2A7928D61443}"/>
+              </a:ext>
+            </a:extLst>
+          </p:cNvPr>
+          <p:cNvSpPr>
+            <a:spLocks noGrp="1"/>
+          </p:cNvSpPr>
+          <p:nvPr>
+            <p:ph type="title"/>
+          </p:nvPr>
+        </p:nvSpPr>
+        <p:spPr/>
+        <p:txBody>
+          <a:bodyPr/>
+          <a:lstStyle/>
+          <a:p>
+            <a:r>
+              <a:rPr lang="en-PH" dirty="0"/>
+              <a:t>April 29, 2025</a:t>
+            </a:r>
+          </a:p>
+        </p:txBody>
+      </p:sp>
+      <p:sp>
+        <p:nvSpPr>
+          <p:cNvPr id="3" name="Slide Number Placeholder 2">
+            <a:extLst>
+              <a:ext uri="{FF2B5EF4-FFF2-40B4-BE49-F238E27FC236}">
+                <a16:creationId xmlns:a16="http://schemas.microsoft.com/office/drawing/2014/main" id="{ECF05900-1011-101D-7B5E-77C48554A382}"/>
+              </a:ext>
+            </a:extLst>
+          </p:cNvPr>
+          <p:cNvSpPr>
+            <a:spLocks noGrp="1"/>
+          </p:cNvSpPr>
+          <p:nvPr>
+            <p:ph type="sldNum" sz="quarter" idx="12"/>
+          </p:nvPr>
+        </p:nvSpPr>
+        <p:spPr/>
+        <p:txBody>
+          <a:bodyPr/>
+          <a:lstStyle/>
+          <a:p>
+            <a:fld id="{32177519-FDB5-46C8-A273-662D2447F0A4}" type="slidenum">
+              <a:rPr lang="en-PH" smtClean="0"/>
+              <a:t>17</a:t>
+            </a:fld>
+            <a:endParaRPr lang="en-PH"/>
+          </a:p>
+        </p:txBody>
+      </p:sp>
+      <p:sp>
+        <p:nvSpPr>
+          <p:cNvPr id="4" name="Footer Placeholder 3">
+            <a:extLst>
+              <a:ext uri="{FF2B5EF4-FFF2-40B4-BE49-F238E27FC236}">
+                <a16:creationId xmlns:a16="http://schemas.microsoft.com/office/drawing/2014/main" id="{1543CD47-370E-621A-FEFA-BE68E3706AF3}"/>
+              </a:ext>
+            </a:extLst>
+          </p:cNvPr>
+          <p:cNvSpPr>
+            <a:spLocks noGrp="1"/>
+          </p:cNvSpPr>
+          <p:nvPr>
+            <p:ph type="ftr" sz="quarter" idx="3"/>
+          </p:nvPr>
+        </p:nvSpPr>
+        <p:spPr/>
+        <p:txBody>
+          <a:bodyPr/>
+          <a:lstStyle/>
+          <a:p>
+            <a:endParaRPr lang="en-PH" dirty="0"/>
+          </a:p>
+        </p:txBody>
+      </p:sp>
+      <p:sp>
+        <p:nvSpPr>
+          <p:cNvPr id="5" name="Date Placeholder 4">
+            <a:extLst>
+              <a:ext uri="{FF2B5EF4-FFF2-40B4-BE49-F238E27FC236}">
+                <a16:creationId xmlns:a16="http://schemas.microsoft.com/office/drawing/2014/main" id="{42DD8C1B-F408-A96E-1466-10E73E7F3329}"/>
+              </a:ext>
+            </a:extLst>
+          </p:cNvPr>
+          <p:cNvSpPr>
+            <a:spLocks noGrp="1"/>
+          </p:cNvSpPr>
+          <p:nvPr>
+            <p:ph type="dt" sz="half" idx="2"/>
+          </p:nvPr>
+        </p:nvSpPr>
+        <p:spPr/>
+        <p:txBody>
+          <a:bodyPr/>
+          <a:lstStyle/>
+          <a:p>
+            <a:r>
+              <a:rPr lang="en-US"/>
+              <a:t>2024.12.12</a:t>
+            </a:r>
+            <a:endParaRPr lang="en-PH" dirty="0"/>
+          </a:p>
+        </p:txBody>
+      </p:sp>
+      <p:sp>
+        <p:nvSpPr>
+          <p:cNvPr id="6" name="Text Placeholder 5">
+            <a:extLst>
+              <a:ext uri="{FF2B5EF4-FFF2-40B4-BE49-F238E27FC236}">
+                <a16:creationId xmlns:a16="http://schemas.microsoft.com/office/drawing/2014/main" id="{DB221E53-5753-F0F7-DEA3-49D317060ECF}"/>
+              </a:ext>
+            </a:extLst>
+          </p:cNvPr>
+          <p:cNvSpPr>
+            <a:spLocks noGrp="1"/>
+          </p:cNvSpPr>
+          <p:nvPr>
+            <p:ph type="body" sz="quarter" idx="13"/>
+          </p:nvPr>
+        </p:nvSpPr>
+        <p:spPr/>
+        <p:txBody>
+          <a:bodyPr/>
+          <a:lstStyle/>
+          <a:p>
+            <a:r>
+              <a:rPr lang="en-PH" dirty="0"/>
+              <a:t>Consultation w/ ma’am Ianne</a:t>
+            </a:r>
+          </a:p>
+        </p:txBody>
+      </p:sp>
+    </p:spTree>
+    <p:extLst>
+      <p:ext uri="{BB962C8B-B14F-4D97-AF65-F5344CB8AC3E}">
+        <p14:creationId xmlns:p14="http://schemas.microsoft.com/office/powerpoint/2010/main" val="340951746"/>
+      </p:ext>
+    </p:extLst>
+  </p:cSld>
+  <p:clrMapOvr>
+    <a:masterClrMapping/>
+  </p:clrMapOvr>
+  <mc:AlternateContent xmlns:mc="http://schemas.openxmlformats.org/markup-compatibility/2006" xmlns:p14="http://schemas.microsoft.com/office/powerpoint/2010/main">
+    <mc:Choice Requires="p14">
+      <p:transition p14:dur="200">
+        <p:fade/>
+      </p:transition>
+    </mc:Choice>
+    <mc:Fallback xmlns="">
+      <p:transition>
+        <p:fade/>
+      </p:transition>
+    </mc:Fallback>
+  </mc:AlternateContent>
+</p:sld>
+</file>
+
+<file path=ppt/slides/slide18.xml><?xml version="1.0" encoding="utf-8"?>
+<p:sld xmlns:a="http://schemas.openxmlformats.org/drawingml/2006/main" xmlns:r="http://schemas.openxmlformats.org/officeDocument/2006/relationships" xmlns:p="http://schemas.openxmlformats.org/presentationml/2006/main">
+  <p:cSld>
+    <p:spTree>
+      <p:nvGrpSpPr>
+        <p:cNvPr id="1" name=""/>
+        <p:cNvGrpSpPr/>
+        <p:nvPr/>
+      </p:nvGrpSpPr>
+      <p:grpSpPr>
+        <a:xfrm>
+          <a:off x="0" y="0"/>
+          <a:ext cx="0" cy="0"/>
+          <a:chOff x="0" y="0"/>
+          <a:chExt cx="0" cy="0"/>
+        </a:xfrm>
+      </p:grpSpPr>
+      <p:sp>
+        <p:nvSpPr>
+          <p:cNvPr id="2" name="Title 1">
+            <a:extLst>
+              <a:ext uri="{FF2B5EF4-FFF2-40B4-BE49-F238E27FC236}">
+                <a16:creationId xmlns:a16="http://schemas.microsoft.com/office/drawing/2014/main" id="{CC3C45F4-A31F-2D02-EDDD-142F8EED31B9}"/>
+              </a:ext>
+            </a:extLst>
+          </p:cNvPr>
+          <p:cNvSpPr>
+            <a:spLocks noGrp="1"/>
+          </p:cNvSpPr>
+          <p:nvPr>
+            <p:ph type="title"/>
+          </p:nvPr>
+        </p:nvSpPr>
+        <p:spPr/>
+        <p:txBody>
+          <a:bodyPr/>
+          <a:lstStyle/>
+          <a:p>
+            <a:r>
+              <a:rPr lang="en-PH" dirty="0"/>
+              <a:t>Comments</a:t>
+            </a:r>
+          </a:p>
+        </p:txBody>
+      </p:sp>
+      <p:sp>
+        <p:nvSpPr>
+          <p:cNvPr id="3" name="Content Placeholder 2">
+            <a:extLst>
+              <a:ext uri="{FF2B5EF4-FFF2-40B4-BE49-F238E27FC236}">
+                <a16:creationId xmlns:a16="http://schemas.microsoft.com/office/drawing/2014/main" id="{65A43ECC-8235-095B-2FFD-CB2E018568D5}"/>
+              </a:ext>
+            </a:extLst>
+          </p:cNvPr>
+          <p:cNvSpPr>
+            <a:spLocks noGrp="1"/>
+          </p:cNvSpPr>
+          <p:nvPr>
+            <p:ph idx="1"/>
+          </p:nvPr>
+        </p:nvSpPr>
+        <p:spPr/>
+        <p:txBody>
+          <a:bodyPr/>
+          <a:lstStyle/>
+          <a:p>
+            <a:endParaRPr lang="en-PH" dirty="0"/>
+          </a:p>
+        </p:txBody>
+      </p:sp>
+      <p:sp>
+        <p:nvSpPr>
+          <p:cNvPr id="4" name="Slide Number Placeholder 3">
+            <a:extLst>
+              <a:ext uri="{FF2B5EF4-FFF2-40B4-BE49-F238E27FC236}">
+                <a16:creationId xmlns:a16="http://schemas.microsoft.com/office/drawing/2014/main" id="{C8061B73-3D1B-7CFD-80FF-4276D40F468B}"/>
+              </a:ext>
+            </a:extLst>
+          </p:cNvPr>
+          <p:cNvSpPr>
+            <a:spLocks noGrp="1"/>
+          </p:cNvSpPr>
+          <p:nvPr>
+            <p:ph type="sldNum" sz="quarter" idx="12"/>
+          </p:nvPr>
+        </p:nvSpPr>
+        <p:spPr/>
+        <p:txBody>
+          <a:bodyPr/>
+          <a:lstStyle/>
+          <a:p>
+            <a:fld id="{32177519-FDB5-46C8-A273-662D2447F0A4}" type="slidenum">
+              <a:rPr lang="en-PH" smtClean="0"/>
+              <a:t>18</a:t>
+            </a:fld>
+            <a:endParaRPr lang="en-PH"/>
+          </a:p>
+        </p:txBody>
+      </p:sp>
+      <p:sp>
+        <p:nvSpPr>
+          <p:cNvPr id="5" name="Footer Placeholder 4">
+            <a:extLst>
+              <a:ext uri="{FF2B5EF4-FFF2-40B4-BE49-F238E27FC236}">
+                <a16:creationId xmlns:a16="http://schemas.microsoft.com/office/drawing/2014/main" id="{CE10C40C-1824-2CA9-8B87-12640C15931F}"/>
+              </a:ext>
+            </a:extLst>
+          </p:cNvPr>
+          <p:cNvSpPr>
+            <a:spLocks noGrp="1"/>
+          </p:cNvSpPr>
+          <p:nvPr>
+            <p:ph type="ftr" sz="quarter" idx="3"/>
+          </p:nvPr>
+        </p:nvSpPr>
+        <p:spPr/>
+        <p:txBody>
+          <a:bodyPr/>
+          <a:lstStyle/>
+          <a:p>
+            <a:endParaRPr lang="en-PH" dirty="0"/>
+          </a:p>
+        </p:txBody>
+      </p:sp>
+      <p:sp>
+        <p:nvSpPr>
+          <p:cNvPr id="6" name="Date Placeholder 5">
+            <a:extLst>
+              <a:ext uri="{FF2B5EF4-FFF2-40B4-BE49-F238E27FC236}">
+                <a16:creationId xmlns:a16="http://schemas.microsoft.com/office/drawing/2014/main" id="{4567A359-BCD0-B5F9-57DC-D9C2DA7AEC0C}"/>
+              </a:ext>
+            </a:extLst>
+          </p:cNvPr>
+          <p:cNvSpPr>
+            <a:spLocks noGrp="1"/>
+          </p:cNvSpPr>
+          <p:nvPr>
+            <p:ph type="dt" sz="half" idx="2"/>
+          </p:nvPr>
+        </p:nvSpPr>
+        <p:spPr/>
+        <p:txBody>
+          <a:bodyPr/>
+          <a:lstStyle/>
+          <a:p>
+            <a:r>
+              <a:rPr lang="en-US"/>
+              <a:t>2025.02.06</a:t>
+            </a:r>
+            <a:endParaRPr lang="en-PH" dirty="0"/>
+          </a:p>
+        </p:txBody>
+      </p:sp>
+    </p:spTree>
+    <p:extLst>
+      <p:ext uri="{BB962C8B-B14F-4D97-AF65-F5344CB8AC3E}">
+        <p14:creationId xmlns:p14="http://schemas.microsoft.com/office/powerpoint/2010/main" val="3969202886"/>
       </p:ext>
     </p:extLst>
   </p:cSld>
